--- a/assignment10/nbodyproblem/nbody_presentation.pptx
+++ b/assignment10/nbodyproblem/nbody_presentation.pptx
@@ -4,20 +4,20 @@
   <p:sldMasterIdLst>
     <p:sldMasterId id="2147483648" r:id="rId1"/>
   </p:sldMasterIdLst>
-  <p:sldIdLst>
-    <p:sldId id="256" r:id="rId2"/>
-    <p:sldId id="257" r:id="rId3"/>
-    <p:sldId id="258" r:id="rId4"/>
-    <p:sldId id="259" r:id="rId5"/>
-    <p:sldId id="260" r:id="rId6"/>
-    <p:sldId id="261" r:id="rId7"/>
-    <p:sldId id="262" r:id="rId8"/>
-    <p:sldId id="263" r:id="rId9"/>
-  </p:sldIdLst>
   <p:notesMasterIdLst>
     <p:notesMasterId r:id="rId10"/>
   </p:notesMasterIdLst>
-  <p:sldSz cx="9144000" cy="5143500"/>
+  <p:sldIdLst>
+    <p:sldId id="272" r:id="rId2"/>
+    <p:sldId id="273" r:id="rId3"/>
+    <p:sldId id="274" r:id="rId4"/>
+    <p:sldId id="275" r:id="rId5"/>
+    <p:sldId id="276" r:id="rId6"/>
+    <p:sldId id="277" r:id="rId7"/>
+    <p:sldId id="278" r:id="rId8"/>
+    <p:sldId id="279" r:id="rId9"/>
+  </p:sldIdLst>
+  <p:sldSz cx="9144000" cy="5143500" type="screen16x9"/>
   <p:notesSz cx="5143500" cy="9144000"/>
   <p:defaultTextStyle>
     <a:lvl1pPr marL="0" algn="l" defTabSz="914400" rtl="0" eaLnBrk="1" latinLnBrk="0" hangingPunct="1">
@@ -111,18 +111,26 @@
       </a:defRPr>
     </a:lvl9pPr>
   </p:defaultTextStyle>
+  <p:extLst>
+    <p:ext uri="{EFAFB233-063F-42B5-8137-9DF3F51BA10A}">
+      <p15:sldGuideLst xmlns:p15="http://schemas.microsoft.com/office/powerpoint/2012/main"/>
+    </p:ext>
+  </p:extLst>
 </p:presentation>
 </file>
 
 <file path=ppt/charts/chart1.xml><?xml version="1.0" encoding="utf-8"?>
-<c:chartSpace xmlns:c="http://schemas.openxmlformats.org/drawingml/2006/chart" xmlns:a="http://schemas.openxmlformats.org/drawingml/2006/main" xmlns:r="http://schemas.openxmlformats.org/officeDocument/2006/relationships">
+<c:chartSpace xmlns:c="http://schemas.openxmlformats.org/drawingml/2006/chart" xmlns:a="http://schemas.openxmlformats.org/drawingml/2006/main" xmlns:r="http://schemas.openxmlformats.org/officeDocument/2006/relationships" xmlns:c16r2="http://schemas.microsoft.com/office/drawing/2015/06/chart">
   <c:date1904 val="0"/>
+  <c:lang val="en-US"/>
   <c:roundedCorners val="0"/>
+  <c:style val="2"/>
   <c:chart>
     <c:autoTitleDeleted val="1"/>
     <c:plotArea>
       <c:layout/>
       <c:lineChart>
+        <c:grouping val="standard"/>
         <c:varyColors val="0"/>
         <c:ser>
           <c:idx val="0"/>
@@ -139,9 +147,6 @@
             </c:strRef>
           </c:tx>
           <c:spPr>
-            <a:solidFill>
-              <a:srgbClr val="F4A261"/>
-            </a:solidFill>
             <a:ln w="31750" cap="flat">
               <a:solidFill>
                 <a:srgbClr val="F4A261"/>
@@ -151,31 +156,6 @@
             </a:ln>
             <a:effectLst/>
           </c:spPr>
-          <c:invertIfNegative val="0"/>
-          <c:dLbls>
-            <c:numFmt formatCode="#,##0" sourceLinked="0"/>
-            <c:txPr>
-              <a:bodyPr/>
-              <a:lstStyle/>
-              <a:p>
-                <a:pPr>
-                  <a:defRPr b="0" i="0" strike="noStrike" sz="1200" u="none">
-                    <a:solidFill>
-                      <a:srgbClr val="000000"/>
-                    </a:solidFill>
-                    <a:latin typeface="Arial"/>
-                  </a:defRPr>
-                </a:pPr>
-              </a:p>
-            </c:txPr>
-            <c:showLegendKey val="0"/>
-            <c:showVal val="0"/>
-            <c:showCatName val="0"/>
-            <c:showSerName val="0"/>
-            <c:showPercent val="0"/>
-            <c:showBubbleSize val="0"/>
-            <c:showLeaderLines val="0"/>
-          </c:dLbls>
           <c:marker>
             <c:symbol val="circle"/>
             <c:size val="6"/>
@@ -194,86 +174,84 @@
             </c:spPr>
           </c:marker>
           <c:cat>
-            <c:multiLvlStrRef>
+            <c:strRef>
               <c:f>Sheet1!$A$2:$A$25</c:f>
-              <c:multiLvlStrCache>
+              <c:strCache>
                 <c:ptCount val="24"/>
-                <c:lvl>
-                  <c:pt idx="0">
-                    <c:v>1</c:v>
-                  </c:pt>
-                  <c:pt idx="1">
-                    <c:v>2</c:v>
-                  </c:pt>
-                  <c:pt idx="2">
-                    <c:v>3</c:v>
-                  </c:pt>
-                  <c:pt idx="3">
-                    <c:v>4</c:v>
-                  </c:pt>
-                  <c:pt idx="4">
-                    <c:v>5</c:v>
-                  </c:pt>
-                  <c:pt idx="5">
-                    <c:v>6</c:v>
-                  </c:pt>
-                  <c:pt idx="6">
-                    <c:v>7</c:v>
-                  </c:pt>
-                  <c:pt idx="7">
-                    <c:v>8</c:v>
-                  </c:pt>
-                  <c:pt idx="8">
-                    <c:v>9</c:v>
-                  </c:pt>
-                  <c:pt idx="9">
-                    <c:v>10</c:v>
-                  </c:pt>
-                  <c:pt idx="10">
-                    <c:v>11</c:v>
-                  </c:pt>
-                  <c:pt idx="11">
-                    <c:v>12</c:v>
-                  </c:pt>
-                  <c:pt idx="12">
-                    <c:v>13</c:v>
-                  </c:pt>
-                  <c:pt idx="13">
-                    <c:v>14</c:v>
-                  </c:pt>
-                  <c:pt idx="14">
-                    <c:v>15</c:v>
-                  </c:pt>
-                  <c:pt idx="15">
-                    <c:v>16</c:v>
-                  </c:pt>
-                  <c:pt idx="16">
-                    <c:v>17</c:v>
-                  </c:pt>
-                  <c:pt idx="17">
-                    <c:v>18</c:v>
-                  </c:pt>
-                  <c:pt idx="18">
-                    <c:v>19</c:v>
-                  </c:pt>
-                  <c:pt idx="19">
-                    <c:v>20</c:v>
-                  </c:pt>
-                  <c:pt idx="20">
-                    <c:v>21</c:v>
-                  </c:pt>
-                  <c:pt idx="21">
-                    <c:v>22</c:v>
-                  </c:pt>
-                  <c:pt idx="22">
-                    <c:v>23</c:v>
-                  </c:pt>
-                  <c:pt idx="23">
-                    <c:v>24</c:v>
-                  </c:pt>
-                </c:lvl>
-              </c:multiLvlStrCache>
-            </c:multiLvlStrRef>
+                <c:pt idx="0">
+                  <c:v>1</c:v>
+                </c:pt>
+                <c:pt idx="1">
+                  <c:v>2</c:v>
+                </c:pt>
+                <c:pt idx="2">
+                  <c:v>3</c:v>
+                </c:pt>
+                <c:pt idx="3">
+                  <c:v>4</c:v>
+                </c:pt>
+                <c:pt idx="4">
+                  <c:v>5</c:v>
+                </c:pt>
+                <c:pt idx="5">
+                  <c:v>6</c:v>
+                </c:pt>
+                <c:pt idx="6">
+                  <c:v>7</c:v>
+                </c:pt>
+                <c:pt idx="7">
+                  <c:v>8</c:v>
+                </c:pt>
+                <c:pt idx="8">
+                  <c:v>9</c:v>
+                </c:pt>
+                <c:pt idx="9">
+                  <c:v>10</c:v>
+                </c:pt>
+                <c:pt idx="10">
+                  <c:v>11</c:v>
+                </c:pt>
+                <c:pt idx="11">
+                  <c:v>12</c:v>
+                </c:pt>
+                <c:pt idx="12">
+                  <c:v>13</c:v>
+                </c:pt>
+                <c:pt idx="13">
+                  <c:v>14</c:v>
+                </c:pt>
+                <c:pt idx="14">
+                  <c:v>15</c:v>
+                </c:pt>
+                <c:pt idx="15">
+                  <c:v>16</c:v>
+                </c:pt>
+                <c:pt idx="16">
+                  <c:v>17</c:v>
+                </c:pt>
+                <c:pt idx="17">
+                  <c:v>18</c:v>
+                </c:pt>
+                <c:pt idx="18">
+                  <c:v>19</c:v>
+                </c:pt>
+                <c:pt idx="19">
+                  <c:v>20</c:v>
+                </c:pt>
+                <c:pt idx="20">
+                  <c:v>21</c:v>
+                </c:pt>
+                <c:pt idx="21">
+                  <c:v>22</c:v>
+                </c:pt>
+                <c:pt idx="22">
+                  <c:v>23</c:v>
+                </c:pt>
+                <c:pt idx="23">
+                  <c:v>24</c:v>
+                </c:pt>
+              </c:strCache>
+            </c:strRef>
           </c:cat>
           <c:val>
             <c:numRef>
@@ -288,19 +266,19 @@
                   <c:v>1.522</c:v>
                 </c:pt>
                 <c:pt idx="2">
-                  <c:v>1.622</c:v>
+                  <c:v>1.6220000000000001</c:v>
                 </c:pt>
                 <c:pt idx="3">
                   <c:v>1.895</c:v>
                 </c:pt>
                 <c:pt idx="4">
-                  <c:v>1.834</c:v>
+                  <c:v>1.8340000000000001</c:v>
                 </c:pt>
                 <c:pt idx="5">
-                  <c:v>1.799</c:v>
+                  <c:v>1.7989999999999999</c:v>
                 </c:pt>
                 <c:pt idx="6">
-                  <c:v>1.666</c:v>
+                  <c:v>1.6659999999999999</c:v>
                 </c:pt>
                 <c:pt idx="7">
                   <c:v>1.919</c:v>
@@ -318,10 +296,10 @@
                   <c:v>1.712</c:v>
                 </c:pt>
                 <c:pt idx="12">
-                  <c:v>1.592</c:v>
+                  <c:v>1.5920000000000001</c:v>
                 </c:pt>
                 <c:pt idx="13">
-                  <c:v>1.572</c:v>
+                  <c:v>1.5720000000000001</c:v>
                 </c:pt>
                 <c:pt idx="14">
                   <c:v>1.657</c:v>
@@ -333,13 +311,13 @@
                   <c:v>1.575</c:v>
                 </c:pt>
                 <c:pt idx="17">
-                  <c:v>1.563</c:v>
+                  <c:v>1.5629999999999999</c:v>
                 </c:pt>
                 <c:pt idx="18">
                   <c:v>1.502</c:v>
                 </c:pt>
                 <c:pt idx="19">
-                  <c:v>1.404</c:v>
+                  <c:v>1.4039999999999999</c:v>
                 </c:pt>
                 <c:pt idx="20">
                   <c:v>1.38</c:v>
@@ -348,7 +326,7 @@
                   <c:v>1.36</c:v>
                 </c:pt>
                 <c:pt idx="22">
-                  <c:v>1.408</c:v>
+                  <c:v>1.4079999999999999</c:v>
                 </c:pt>
                 <c:pt idx="23">
                   <c:v>1.444</c:v>
@@ -357,6 +335,11 @@
             </c:numRef>
           </c:val>
           <c:smooth val="0"/>
+          <c:extLst>
+            <c:ext xmlns:c16="http://schemas.microsoft.com/office/drawing/2014/chart" uri="{C3380CC4-5D6E-409C-BE32-E72D297353CC}">
+              <c16:uniqueId val="{00000000-BED2-4406-A1F7-14A567CEC1BC}"/>
+            </c:ext>
+          </c:extLst>
         </c:ser>
         <c:ser>
           <c:idx val="1"/>
@@ -373,9 +356,6 @@
             </c:strRef>
           </c:tx>
           <c:spPr>
-            <a:solidFill>
-              <a:srgbClr val="3A86FF"/>
-            </a:solidFill>
             <a:ln w="31750" cap="flat">
               <a:solidFill>
                 <a:srgbClr val="3A86FF"/>
@@ -385,31 +365,6 @@
             </a:ln>
             <a:effectLst/>
           </c:spPr>
-          <c:invertIfNegative val="0"/>
-          <c:dLbls>
-            <c:numFmt formatCode="#,##0" sourceLinked="0"/>
-            <c:txPr>
-              <a:bodyPr/>
-              <a:lstStyle/>
-              <a:p>
-                <a:pPr>
-                  <a:defRPr b="0" i="0" strike="noStrike" sz="1200" u="none">
-                    <a:solidFill>
-                      <a:srgbClr val="000000"/>
-                    </a:solidFill>
-                    <a:latin typeface="Arial"/>
-                  </a:defRPr>
-                </a:pPr>
-              </a:p>
-            </c:txPr>
-            <c:showLegendKey val="0"/>
-            <c:showVal val="0"/>
-            <c:showCatName val="0"/>
-            <c:showSerName val="0"/>
-            <c:showPercent val="0"/>
-            <c:showBubbleSize val="0"/>
-            <c:showLeaderLines val="0"/>
-          </c:dLbls>
           <c:marker>
             <c:symbol val="circle"/>
             <c:size val="6"/>
@@ -428,86 +383,84 @@
             </c:spPr>
           </c:marker>
           <c:cat>
-            <c:multiLvlStrRef>
+            <c:strRef>
               <c:f>Sheet1!$A$2:$A$25</c:f>
-              <c:multiLvlStrCache>
+              <c:strCache>
                 <c:ptCount val="24"/>
-                <c:lvl>
-                  <c:pt idx="0">
-                    <c:v>1</c:v>
-                  </c:pt>
-                  <c:pt idx="1">
-                    <c:v>2</c:v>
-                  </c:pt>
-                  <c:pt idx="2">
-                    <c:v>3</c:v>
-                  </c:pt>
-                  <c:pt idx="3">
-                    <c:v>4</c:v>
-                  </c:pt>
-                  <c:pt idx="4">
-                    <c:v>5</c:v>
-                  </c:pt>
-                  <c:pt idx="5">
-                    <c:v>6</c:v>
-                  </c:pt>
-                  <c:pt idx="6">
-                    <c:v>7</c:v>
-                  </c:pt>
-                  <c:pt idx="7">
-                    <c:v>8</c:v>
-                  </c:pt>
-                  <c:pt idx="8">
-                    <c:v>9</c:v>
-                  </c:pt>
-                  <c:pt idx="9">
-                    <c:v>10</c:v>
-                  </c:pt>
-                  <c:pt idx="10">
-                    <c:v>11</c:v>
-                  </c:pt>
-                  <c:pt idx="11">
-                    <c:v>12</c:v>
-                  </c:pt>
-                  <c:pt idx="12">
-                    <c:v>13</c:v>
-                  </c:pt>
-                  <c:pt idx="13">
-                    <c:v>14</c:v>
-                  </c:pt>
-                  <c:pt idx="14">
-                    <c:v>15</c:v>
-                  </c:pt>
-                  <c:pt idx="15">
-                    <c:v>16</c:v>
-                  </c:pt>
-                  <c:pt idx="16">
-                    <c:v>17</c:v>
-                  </c:pt>
-                  <c:pt idx="17">
-                    <c:v>18</c:v>
-                  </c:pt>
-                  <c:pt idx="18">
-                    <c:v>19</c:v>
-                  </c:pt>
-                  <c:pt idx="19">
-                    <c:v>20</c:v>
-                  </c:pt>
-                  <c:pt idx="20">
-                    <c:v>21</c:v>
-                  </c:pt>
-                  <c:pt idx="21">
-                    <c:v>22</c:v>
-                  </c:pt>
-                  <c:pt idx="22">
-                    <c:v>23</c:v>
-                  </c:pt>
-                  <c:pt idx="23">
-                    <c:v>24</c:v>
-                  </c:pt>
-                </c:lvl>
-              </c:multiLvlStrCache>
-            </c:multiLvlStrRef>
+                <c:pt idx="0">
+                  <c:v>1</c:v>
+                </c:pt>
+                <c:pt idx="1">
+                  <c:v>2</c:v>
+                </c:pt>
+                <c:pt idx="2">
+                  <c:v>3</c:v>
+                </c:pt>
+                <c:pt idx="3">
+                  <c:v>4</c:v>
+                </c:pt>
+                <c:pt idx="4">
+                  <c:v>5</c:v>
+                </c:pt>
+                <c:pt idx="5">
+                  <c:v>6</c:v>
+                </c:pt>
+                <c:pt idx="6">
+                  <c:v>7</c:v>
+                </c:pt>
+                <c:pt idx="7">
+                  <c:v>8</c:v>
+                </c:pt>
+                <c:pt idx="8">
+                  <c:v>9</c:v>
+                </c:pt>
+                <c:pt idx="9">
+                  <c:v>10</c:v>
+                </c:pt>
+                <c:pt idx="10">
+                  <c:v>11</c:v>
+                </c:pt>
+                <c:pt idx="11">
+                  <c:v>12</c:v>
+                </c:pt>
+                <c:pt idx="12">
+                  <c:v>13</c:v>
+                </c:pt>
+                <c:pt idx="13">
+                  <c:v>14</c:v>
+                </c:pt>
+                <c:pt idx="14">
+                  <c:v>15</c:v>
+                </c:pt>
+                <c:pt idx="15">
+                  <c:v>16</c:v>
+                </c:pt>
+                <c:pt idx="16">
+                  <c:v>17</c:v>
+                </c:pt>
+                <c:pt idx="17">
+                  <c:v>18</c:v>
+                </c:pt>
+                <c:pt idx="18">
+                  <c:v>19</c:v>
+                </c:pt>
+                <c:pt idx="19">
+                  <c:v>20</c:v>
+                </c:pt>
+                <c:pt idx="20">
+                  <c:v>21</c:v>
+                </c:pt>
+                <c:pt idx="21">
+                  <c:v>22</c:v>
+                </c:pt>
+                <c:pt idx="22">
+                  <c:v>23</c:v>
+                </c:pt>
+                <c:pt idx="23">
+                  <c:v>24</c:v>
+                </c:pt>
+              </c:strCache>
+            </c:strRef>
           </c:cat>
           <c:val>
             <c:numRef>
@@ -522,37 +475,37 @@
                   <c:v>1.831</c:v>
                 </c:pt>
                 <c:pt idx="2">
-                  <c:v>2.374</c:v>
+                  <c:v>2.3740000000000001</c:v>
                 </c:pt>
                 <c:pt idx="3">
-                  <c:v>2.884</c:v>
+                  <c:v>2.8839999999999999</c:v>
                 </c:pt>
                 <c:pt idx="4">
-                  <c:v>3.184</c:v>
+                  <c:v>3.1840000000000002</c:v>
                 </c:pt>
                 <c:pt idx="5">
-                  <c:v>3.487</c:v>
+                  <c:v>3.4870000000000001</c:v>
                 </c:pt>
                 <c:pt idx="6">
-                  <c:v>3.565</c:v>
+                  <c:v>3.5649999999999999</c:v>
                 </c:pt>
                 <c:pt idx="7">
                   <c:v>3.835</c:v>
                 </c:pt>
                 <c:pt idx="8">
-                  <c:v>3.739</c:v>
+                  <c:v>3.7389999999999999</c:v>
                 </c:pt>
                 <c:pt idx="9">
                   <c:v>3.823</c:v>
                 </c:pt>
                 <c:pt idx="10">
-                  <c:v>3.924</c:v>
+                  <c:v>3.9239999999999999</c:v>
                 </c:pt>
                 <c:pt idx="11">
-                  <c:v>4.112</c:v>
+                  <c:v>4.1120000000000001</c:v>
                 </c:pt>
                 <c:pt idx="12">
-                  <c:v>3.777</c:v>
+                  <c:v>3.7770000000000001</c:v>
                 </c:pt>
                 <c:pt idx="13">
                   <c:v>3.65</c:v>
@@ -561,16 +514,16 @@
                   <c:v>3.835</c:v>
                 </c:pt>
                 <c:pt idx="15">
-                  <c:v>3.549</c:v>
+                  <c:v>3.5489999999999999</c:v>
                 </c:pt>
                 <c:pt idx="16">
                   <c:v>3.601</c:v>
                 </c:pt>
                 <c:pt idx="17">
-                  <c:v>3.731</c:v>
+                  <c:v>3.7309999999999999</c:v>
                 </c:pt>
                 <c:pt idx="18">
-                  <c:v>3.487</c:v>
+                  <c:v>3.4870000000000001</c:v>
                 </c:pt>
                 <c:pt idx="19">
                   <c:v>3.472</c:v>
@@ -579,18 +532,23 @@
                   <c:v>3.456</c:v>
                 </c:pt>
                 <c:pt idx="21">
-                  <c:v>3.388</c:v>
+                  <c:v>3.3879999999999999</c:v>
                 </c:pt>
                 <c:pt idx="22">
                   <c:v>3.28</c:v>
                 </c:pt>
                 <c:pt idx="23">
-                  <c:v>3.209</c:v>
+                  <c:v>3.2090000000000001</c:v>
                 </c:pt>
               </c:numCache>
             </c:numRef>
           </c:val>
           <c:smooth val="0"/>
+          <c:extLst>
+            <c:ext xmlns:c16="http://schemas.microsoft.com/office/drawing/2014/chart" uri="{C3380CC4-5D6E-409C-BE32-E72D297353CC}">
+              <c16:uniqueId val="{00000001-BED2-4406-A1F7-14A567CEC1BC}"/>
+            </c:ext>
+          </c:extLst>
         </c:ser>
         <c:ser>
           <c:idx val="2"/>
@@ -607,9 +565,6 @@
             </c:strRef>
           </c:tx>
           <c:spPr>
-            <a:solidFill>
-              <a:srgbClr val="10B981"/>
-            </a:solidFill>
             <a:ln w="31750" cap="flat">
               <a:solidFill>
                 <a:srgbClr val="10B981"/>
@@ -619,31 +574,6 @@
             </a:ln>
             <a:effectLst/>
           </c:spPr>
-          <c:invertIfNegative val="0"/>
-          <c:dLbls>
-            <c:numFmt formatCode="#,##0" sourceLinked="0"/>
-            <c:txPr>
-              <a:bodyPr/>
-              <a:lstStyle/>
-              <a:p>
-                <a:pPr>
-                  <a:defRPr b="0" i="0" strike="noStrike" sz="1200" u="none">
-                    <a:solidFill>
-                      <a:srgbClr val="000000"/>
-                    </a:solidFill>
-                    <a:latin typeface="Arial"/>
-                  </a:defRPr>
-                </a:pPr>
-              </a:p>
-            </c:txPr>
-            <c:showLegendKey val="0"/>
-            <c:showVal val="0"/>
-            <c:showCatName val="0"/>
-            <c:showSerName val="0"/>
-            <c:showPercent val="0"/>
-            <c:showBubbleSize val="0"/>
-            <c:showLeaderLines val="0"/>
-          </c:dLbls>
           <c:marker>
             <c:symbol val="circle"/>
             <c:size val="6"/>
@@ -662,86 +592,84 @@
             </c:spPr>
           </c:marker>
           <c:cat>
-            <c:multiLvlStrRef>
+            <c:strRef>
               <c:f>Sheet1!$A$2:$A$25</c:f>
-              <c:multiLvlStrCache>
+              <c:strCache>
                 <c:ptCount val="24"/>
-                <c:lvl>
-                  <c:pt idx="0">
-                    <c:v>1</c:v>
-                  </c:pt>
-                  <c:pt idx="1">
-                    <c:v>2</c:v>
-                  </c:pt>
-                  <c:pt idx="2">
-                    <c:v>3</c:v>
-                  </c:pt>
-                  <c:pt idx="3">
-                    <c:v>4</c:v>
-                  </c:pt>
-                  <c:pt idx="4">
-                    <c:v>5</c:v>
-                  </c:pt>
-                  <c:pt idx="5">
-                    <c:v>6</c:v>
-                  </c:pt>
-                  <c:pt idx="6">
-                    <c:v>7</c:v>
-                  </c:pt>
-                  <c:pt idx="7">
-                    <c:v>8</c:v>
-                  </c:pt>
-                  <c:pt idx="8">
-                    <c:v>9</c:v>
-                  </c:pt>
-                  <c:pt idx="9">
-                    <c:v>10</c:v>
-                  </c:pt>
-                  <c:pt idx="10">
-                    <c:v>11</c:v>
-                  </c:pt>
-                  <c:pt idx="11">
-                    <c:v>12</c:v>
-                  </c:pt>
-                  <c:pt idx="12">
-                    <c:v>13</c:v>
-                  </c:pt>
-                  <c:pt idx="13">
-                    <c:v>14</c:v>
-                  </c:pt>
-                  <c:pt idx="14">
-                    <c:v>15</c:v>
-                  </c:pt>
-                  <c:pt idx="15">
-                    <c:v>16</c:v>
-                  </c:pt>
-                  <c:pt idx="16">
-                    <c:v>17</c:v>
-                  </c:pt>
-                  <c:pt idx="17">
-                    <c:v>18</c:v>
-                  </c:pt>
-                  <c:pt idx="18">
-                    <c:v>19</c:v>
-                  </c:pt>
-                  <c:pt idx="19">
-                    <c:v>20</c:v>
-                  </c:pt>
-                  <c:pt idx="20">
-                    <c:v>21</c:v>
-                  </c:pt>
-                  <c:pt idx="21">
-                    <c:v>22</c:v>
-                  </c:pt>
-                  <c:pt idx="22">
-                    <c:v>23</c:v>
-                  </c:pt>
-                  <c:pt idx="23">
-                    <c:v>24</c:v>
-                  </c:pt>
-                </c:lvl>
-              </c:multiLvlStrCache>
-            </c:multiLvlStrRef>
+                <c:pt idx="0">
+                  <c:v>1</c:v>
+                </c:pt>
+                <c:pt idx="1">
+                  <c:v>2</c:v>
+                </c:pt>
+                <c:pt idx="2">
+                  <c:v>3</c:v>
+                </c:pt>
+                <c:pt idx="3">
+                  <c:v>4</c:v>
+                </c:pt>
+                <c:pt idx="4">
+                  <c:v>5</c:v>
+                </c:pt>
+                <c:pt idx="5">
+                  <c:v>6</c:v>
+                </c:pt>
+                <c:pt idx="6">
+                  <c:v>7</c:v>
+                </c:pt>
+                <c:pt idx="7">
+                  <c:v>8</c:v>
+                </c:pt>
+                <c:pt idx="8">
+                  <c:v>9</c:v>
+                </c:pt>
+                <c:pt idx="9">
+                  <c:v>10</c:v>
+                </c:pt>
+                <c:pt idx="10">
+                  <c:v>11</c:v>
+                </c:pt>
+                <c:pt idx="11">
+                  <c:v>12</c:v>
+                </c:pt>
+                <c:pt idx="12">
+                  <c:v>13</c:v>
+                </c:pt>
+                <c:pt idx="13">
+                  <c:v>14</c:v>
+                </c:pt>
+                <c:pt idx="14">
+                  <c:v>15</c:v>
+                </c:pt>
+                <c:pt idx="15">
+                  <c:v>16</c:v>
+                </c:pt>
+                <c:pt idx="16">
+                  <c:v>17</c:v>
+                </c:pt>
+                <c:pt idx="17">
+                  <c:v>18</c:v>
+                </c:pt>
+                <c:pt idx="18">
+                  <c:v>19</c:v>
+                </c:pt>
+                <c:pt idx="19">
+                  <c:v>20</c:v>
+                </c:pt>
+                <c:pt idx="20">
+                  <c:v>21</c:v>
+                </c:pt>
+                <c:pt idx="21">
+                  <c:v>22</c:v>
+                </c:pt>
+                <c:pt idx="22">
+                  <c:v>23</c:v>
+                </c:pt>
+                <c:pt idx="23">
+                  <c:v>24</c:v>
+                </c:pt>
+              </c:strCache>
+            </c:strRef>
           </c:cat>
           <c:val>
             <c:numRef>
@@ -753,13 +681,13 @@
                   <c:v>1</c:v>
                 </c:pt>
                 <c:pt idx="1">
-                  <c:v>1.937</c:v>
+                  <c:v>1.9370000000000001</c:v>
                 </c:pt>
                 <c:pt idx="2">
-                  <c:v>2.775</c:v>
+                  <c:v>2.7749999999999999</c:v>
                 </c:pt>
                 <c:pt idx="3">
-                  <c:v>3.515</c:v>
+                  <c:v>3.5150000000000001</c:v>
                 </c:pt>
                 <c:pt idx="4">
                   <c:v>4.181</c:v>
@@ -768,63 +696,68 @@
                   <c:v>4.76</c:v>
                 </c:pt>
                 <c:pt idx="6">
-                  <c:v>5.129</c:v>
+                  <c:v>5.1289999999999996</c:v>
                 </c:pt>
                 <c:pt idx="7">
-                  <c:v>5.526</c:v>
+                  <c:v>5.5259999999999998</c:v>
                 </c:pt>
                 <c:pt idx="8">
-                  <c:v>5.986</c:v>
+                  <c:v>5.9859999999999998</c:v>
                 </c:pt>
                 <c:pt idx="9">
                   <c:v>6.141</c:v>
                 </c:pt>
                 <c:pt idx="10">
-                  <c:v>6.381</c:v>
+                  <c:v>6.3810000000000002</c:v>
                 </c:pt>
                 <c:pt idx="11">
-                  <c:v>6.571</c:v>
+                  <c:v>6.5709999999999997</c:v>
                 </c:pt>
                 <c:pt idx="12">
                   <c:v>6.52</c:v>
                 </c:pt>
                 <c:pt idx="13">
-                  <c:v>6.417</c:v>
+                  <c:v>6.4169999999999998</c:v>
                 </c:pt>
                 <c:pt idx="14">
                   <c:v>6.47</c:v>
                 </c:pt>
                 <c:pt idx="15">
-                  <c:v>6.268</c:v>
+                  <c:v>6.2679999999999998</c:v>
                 </c:pt>
                 <c:pt idx="16">
-                  <c:v>6.376</c:v>
+                  <c:v>6.3760000000000003</c:v>
                 </c:pt>
                 <c:pt idx="17">
-                  <c:v>6.412</c:v>
+                  <c:v>6.4119999999999999</c:v>
                 </c:pt>
                 <c:pt idx="18">
-                  <c:v>6.475</c:v>
+                  <c:v>6.4749999999999996</c:v>
                 </c:pt>
                 <c:pt idx="19">
-                  <c:v>6.498</c:v>
+                  <c:v>6.4980000000000002</c:v>
                 </c:pt>
                 <c:pt idx="20">
-                  <c:v>6.545</c:v>
+                  <c:v>6.5449999999999999</c:v>
                 </c:pt>
                 <c:pt idx="21">
                   <c:v>6.101</c:v>
                 </c:pt>
                 <c:pt idx="22">
-                  <c:v>5.426</c:v>
+                  <c:v>5.4260000000000002</c:v>
                 </c:pt>
                 <c:pt idx="23">
-                  <c:v>5.426</c:v>
+                  <c:v>5.4260000000000002</c:v>
                 </c:pt>
               </c:numCache>
             </c:numRef>
           </c:val>
           <c:smooth val="0"/>
+          <c:extLst>
+            <c:ext xmlns:c16="http://schemas.microsoft.com/office/drawing/2014/chart" uri="{C3380CC4-5D6E-409C-BE32-E72D297353CC}">
+              <c16:uniqueId val="{00000002-BED2-4406-A1F7-14A567CEC1BC}"/>
+            </c:ext>
+          </c:extLst>
         </c:ser>
         <c:ser>
           <c:idx val="3"/>
@@ -841,9 +774,6 @@
             </c:strRef>
           </c:tx>
           <c:spPr>
-            <a:solidFill>
-              <a:srgbClr val="BBBBBB"/>
-            </a:solidFill>
             <a:ln w="31750" cap="flat">
               <a:solidFill>
                 <a:srgbClr val="BBBBBB"/>
@@ -853,31 +783,6 @@
             </a:ln>
             <a:effectLst/>
           </c:spPr>
-          <c:invertIfNegative val="0"/>
-          <c:dLbls>
-            <c:numFmt formatCode="#,##0" sourceLinked="0"/>
-            <c:txPr>
-              <a:bodyPr/>
-              <a:lstStyle/>
-              <a:p>
-                <a:pPr>
-                  <a:defRPr b="0" i="0" strike="noStrike" sz="1200" u="none">
-                    <a:solidFill>
-                      <a:srgbClr val="000000"/>
-                    </a:solidFill>
-                    <a:latin typeface="Arial"/>
-                  </a:defRPr>
-                </a:pPr>
-              </a:p>
-            </c:txPr>
-            <c:showLegendKey val="0"/>
-            <c:showVal val="0"/>
-            <c:showCatName val="0"/>
-            <c:showSerName val="0"/>
-            <c:showPercent val="0"/>
-            <c:showBubbleSize val="0"/>
-            <c:showLeaderLines val="0"/>
-          </c:dLbls>
           <c:marker>
             <c:symbol val="circle"/>
             <c:size val="6"/>
@@ -896,86 +801,84 @@
             </c:spPr>
           </c:marker>
           <c:cat>
-            <c:multiLvlStrRef>
+            <c:strRef>
               <c:f>Sheet1!$A$2:$A$25</c:f>
-              <c:multiLvlStrCache>
+              <c:strCache>
                 <c:ptCount val="24"/>
-                <c:lvl>
-                  <c:pt idx="0">
-                    <c:v>1</c:v>
-                  </c:pt>
-                  <c:pt idx="1">
-                    <c:v>2</c:v>
-                  </c:pt>
-                  <c:pt idx="2">
-                    <c:v>3</c:v>
-                  </c:pt>
-                  <c:pt idx="3">
-                    <c:v>4</c:v>
-                  </c:pt>
-                  <c:pt idx="4">
-                    <c:v>5</c:v>
-                  </c:pt>
-                  <c:pt idx="5">
-                    <c:v>6</c:v>
-                  </c:pt>
-                  <c:pt idx="6">
-                    <c:v>7</c:v>
-                  </c:pt>
-                  <c:pt idx="7">
-                    <c:v>8</c:v>
-                  </c:pt>
-                  <c:pt idx="8">
-                    <c:v>9</c:v>
-                  </c:pt>
-                  <c:pt idx="9">
-                    <c:v>10</c:v>
-                  </c:pt>
-                  <c:pt idx="10">
-                    <c:v>11</c:v>
-                  </c:pt>
-                  <c:pt idx="11">
-                    <c:v>12</c:v>
-                  </c:pt>
-                  <c:pt idx="12">
-                    <c:v>13</c:v>
-                  </c:pt>
-                  <c:pt idx="13">
-                    <c:v>14</c:v>
-                  </c:pt>
-                  <c:pt idx="14">
-                    <c:v>15</c:v>
-                  </c:pt>
-                  <c:pt idx="15">
-                    <c:v>16</c:v>
-                  </c:pt>
-                  <c:pt idx="16">
-                    <c:v>17</c:v>
-                  </c:pt>
-                  <c:pt idx="17">
-                    <c:v>18</c:v>
-                  </c:pt>
-                  <c:pt idx="18">
-                    <c:v>19</c:v>
-                  </c:pt>
-                  <c:pt idx="19">
-                    <c:v>20</c:v>
-                  </c:pt>
-                  <c:pt idx="20">
-                    <c:v>21</c:v>
-                  </c:pt>
-                  <c:pt idx="21">
-                    <c:v>22</c:v>
-                  </c:pt>
-                  <c:pt idx="22">
-                    <c:v>23</c:v>
-                  </c:pt>
-                  <c:pt idx="23">
-                    <c:v>24</c:v>
-                  </c:pt>
-                </c:lvl>
-              </c:multiLvlStrCache>
-            </c:multiLvlStrRef>
+                <c:pt idx="0">
+                  <c:v>1</c:v>
+                </c:pt>
+                <c:pt idx="1">
+                  <c:v>2</c:v>
+                </c:pt>
+                <c:pt idx="2">
+                  <c:v>3</c:v>
+                </c:pt>
+                <c:pt idx="3">
+                  <c:v>4</c:v>
+                </c:pt>
+                <c:pt idx="4">
+                  <c:v>5</c:v>
+                </c:pt>
+                <c:pt idx="5">
+                  <c:v>6</c:v>
+                </c:pt>
+                <c:pt idx="6">
+                  <c:v>7</c:v>
+                </c:pt>
+                <c:pt idx="7">
+                  <c:v>8</c:v>
+                </c:pt>
+                <c:pt idx="8">
+                  <c:v>9</c:v>
+                </c:pt>
+                <c:pt idx="9">
+                  <c:v>10</c:v>
+                </c:pt>
+                <c:pt idx="10">
+                  <c:v>11</c:v>
+                </c:pt>
+                <c:pt idx="11">
+                  <c:v>12</c:v>
+                </c:pt>
+                <c:pt idx="12">
+                  <c:v>13</c:v>
+                </c:pt>
+                <c:pt idx="13">
+                  <c:v>14</c:v>
+                </c:pt>
+                <c:pt idx="14">
+                  <c:v>15</c:v>
+                </c:pt>
+                <c:pt idx="15">
+                  <c:v>16</c:v>
+                </c:pt>
+                <c:pt idx="16">
+                  <c:v>17</c:v>
+                </c:pt>
+                <c:pt idx="17">
+                  <c:v>18</c:v>
+                </c:pt>
+                <c:pt idx="18">
+                  <c:v>19</c:v>
+                </c:pt>
+                <c:pt idx="19">
+                  <c:v>20</c:v>
+                </c:pt>
+                <c:pt idx="20">
+                  <c:v>21</c:v>
+                </c:pt>
+                <c:pt idx="21">
+                  <c:v>22</c:v>
+                </c:pt>
+                <c:pt idx="22">
+                  <c:v>23</c:v>
+                </c:pt>
+                <c:pt idx="23">
+                  <c:v>24</c:v>
+                </c:pt>
+              </c:strCache>
+            </c:strRef>
           </c:cat>
           <c:val>
             <c:numRef>
@@ -1059,35 +962,24 @@
             </c:numRef>
           </c:val>
           <c:smooth val="0"/>
+          <c:extLst>
+            <c:ext xmlns:c16="http://schemas.microsoft.com/office/drawing/2014/chart" uri="{C3380CC4-5D6E-409C-BE32-E72D297353CC}">
+              <c16:uniqueId val="{00000003-BED2-4406-A1F7-14A567CEC1BC}"/>
+            </c:ext>
+          </c:extLst>
         </c:ser>
         <c:dLbls>
-          <c:numFmt formatCode="#,##0" sourceLinked="0"/>
-          <c:txPr>
-            <a:bodyPr/>
-            <a:lstStyle/>
-            <a:p>
-              <a:pPr>
-                <a:defRPr b="0" i="0" strike="noStrike" sz="1200" u="none">
-                  <a:solidFill>
-                    <a:srgbClr val="000000"/>
-                  </a:solidFill>
-                  <a:latin typeface="Arial"/>
-                </a:defRPr>
-              </a:pPr>
-            </a:p>
-          </c:txPr>
           <c:showLegendKey val="0"/>
           <c:showVal val="0"/>
           <c:showCatName val="0"/>
           <c:showSerName val="0"/>
           <c:showPercent val="0"/>
           <c:showBubbleSize val="0"/>
-          <c:showLeaderLines val="0"/>
         </c:dLbls>
         <c:marker val="1"/>
+        <c:smooth val="0"/>
         <c:axId val="2094734554"/>
         <c:axId val="2094734552"/>
-        <c:axId val="2094734556"/>
       </c:lineChart>
       <c:catAx>
         <c:axId val="2094734554"/>
@@ -1111,7 +1003,7 @@
                   </a:defRPr>
                 </a:pPr>
                 <a:r>
-                  <a:rPr b="0" i="0" u="none" strike="noStrike">
+                  <a:rPr lang="en-US" b="0" i="0" u="none" strike="noStrike">
                     <a:solidFill>
                       <a:srgbClr val="000000"/>
                     </a:solidFill>
@@ -1122,7 +1014,6 @@
               </a:p>
             </c:rich>
           </c:tx>
-          <c:layout/>
           <c:overlay val="0"/>
         </c:title>
         <c:numFmt formatCode="General" sourceLinked="1"/>
@@ -1157,6 +1048,7 @@
         <c:crosses val="autoZero"/>
         <c:auto val="1"/>
         <c:lblAlgn val="ctr"/>
+        <c:lblOffset val="100"/>
         <c:noMultiLvlLbl val="1"/>
       </c:catAx>
       <c:valAx>
@@ -1193,7 +1085,7 @@
                   </a:defRPr>
                 </a:pPr>
                 <a:r>
-                  <a:rPr b="0" i="0" u="none" strike="noStrike">
+                  <a:rPr lang="en-US" b="0" i="0" u="none" strike="noStrike">
                     <a:solidFill>
                       <a:srgbClr val="000000"/>
                     </a:solidFill>
@@ -1204,7 +1096,6 @@
               </a:p>
             </c:rich>
           </c:tx>
-          <c:layout/>
           <c:overlay val="0"/>
         </c:title>
         <c:numFmt formatCode="General" sourceLinked="0"/>
@@ -1255,6 +1146,7 @@
     </c:legend>
     <c:plotVisOnly val="1"/>
     <c:dispBlanksAs val="span"/>
+    <c:showDLblsOverMax val="1"/>
   </c:chart>
   <c:spPr>
     <a:solidFill>
@@ -1272,14 +1164,17 @@
 </file>
 
 <file path=ppt/charts/chart2.xml><?xml version="1.0" encoding="utf-8"?>
-<c:chartSpace xmlns:c="http://schemas.openxmlformats.org/drawingml/2006/chart" xmlns:a="http://schemas.openxmlformats.org/drawingml/2006/main" xmlns:r="http://schemas.openxmlformats.org/officeDocument/2006/relationships">
+<c:chartSpace xmlns:c="http://schemas.openxmlformats.org/drawingml/2006/chart" xmlns:a="http://schemas.openxmlformats.org/drawingml/2006/main" xmlns:r="http://schemas.openxmlformats.org/officeDocument/2006/relationships" xmlns:c16r2="http://schemas.microsoft.com/office/drawing/2015/06/chart">
   <c:date1904 val="0"/>
+  <c:lang val="en-US"/>
   <c:roundedCorners val="1"/>
+  <c:style val="2"/>
   <c:chart>
     <c:autoTitleDeleted val="1"/>
     <c:plotArea>
       <c:layout/>
       <c:lineChart>
+        <c:grouping val="standard"/>
         <c:varyColors val="0"/>
         <c:ser>
           <c:idx val="0"/>
@@ -1296,9 +1191,6 @@
             </c:strRef>
           </c:tx>
           <c:spPr>
-            <a:solidFill>
-              <a:srgbClr val="3A86FF"/>
-            </a:solidFill>
             <a:ln w="31750" cap="flat">
               <a:solidFill>
                 <a:srgbClr val="3A86FF"/>
@@ -1308,31 +1200,6 @@
             </a:ln>
             <a:effectLst/>
           </c:spPr>
-          <c:invertIfNegative val="0"/>
-          <c:dLbls>
-            <c:numFmt formatCode="#,##0" sourceLinked="0"/>
-            <c:txPr>
-              <a:bodyPr/>
-              <a:lstStyle/>
-              <a:p>
-                <a:pPr>
-                  <a:defRPr b="0" i="0" strike="noStrike" sz="1200" u="none">
-                    <a:solidFill>
-                      <a:srgbClr val="000000"/>
-                    </a:solidFill>
-                    <a:latin typeface="Arial"/>
-                  </a:defRPr>
-                </a:pPr>
-              </a:p>
-            </c:txPr>
-            <c:showLegendKey val="0"/>
-            <c:showVal val="0"/>
-            <c:showCatName val="0"/>
-            <c:showSerName val="0"/>
-            <c:showPercent val="0"/>
-            <c:showBubbleSize val="0"/>
-            <c:showLeaderLines val="0"/>
-          </c:dLbls>
           <c:marker>
             <c:symbol val="circle"/>
             <c:size val="6"/>
@@ -1351,86 +1218,84 @@
             </c:spPr>
           </c:marker>
           <c:cat>
-            <c:multiLvlStrRef>
+            <c:strRef>
               <c:f>Sheet1!$A$2:$A$25</c:f>
-              <c:multiLvlStrCache>
+              <c:strCache>
                 <c:ptCount val="24"/>
-                <c:lvl>
-                  <c:pt idx="0">
-                    <c:v>1</c:v>
-                  </c:pt>
-                  <c:pt idx="1">
-                    <c:v>2</c:v>
-                  </c:pt>
-                  <c:pt idx="2">
-                    <c:v>3</c:v>
-                  </c:pt>
-                  <c:pt idx="3">
-                    <c:v>4</c:v>
-                  </c:pt>
-                  <c:pt idx="4">
-                    <c:v>5</c:v>
-                  </c:pt>
-                  <c:pt idx="5">
-                    <c:v>6</c:v>
-                  </c:pt>
-                  <c:pt idx="6">
-                    <c:v>7</c:v>
-                  </c:pt>
-                  <c:pt idx="7">
-                    <c:v>8</c:v>
-                  </c:pt>
-                  <c:pt idx="8">
-                    <c:v>9</c:v>
-                  </c:pt>
-                  <c:pt idx="9">
-                    <c:v>10</c:v>
-                  </c:pt>
-                  <c:pt idx="10">
-                    <c:v>11</c:v>
-                  </c:pt>
-                  <c:pt idx="11">
-                    <c:v>12</c:v>
-                  </c:pt>
-                  <c:pt idx="12">
-                    <c:v>13</c:v>
-                  </c:pt>
-                  <c:pt idx="13">
-                    <c:v>14</c:v>
-                  </c:pt>
-                  <c:pt idx="14">
-                    <c:v>15</c:v>
-                  </c:pt>
-                  <c:pt idx="15">
-                    <c:v>16</c:v>
-                  </c:pt>
-                  <c:pt idx="16">
-                    <c:v>17</c:v>
-                  </c:pt>
-                  <c:pt idx="17">
-                    <c:v>18</c:v>
-                  </c:pt>
-                  <c:pt idx="18">
-                    <c:v>19</c:v>
-                  </c:pt>
-                  <c:pt idx="19">
-                    <c:v>20</c:v>
-                  </c:pt>
-                  <c:pt idx="20">
-                    <c:v>21</c:v>
-                  </c:pt>
-                  <c:pt idx="21">
-                    <c:v>22</c:v>
-                  </c:pt>
-                  <c:pt idx="22">
-                    <c:v>23</c:v>
-                  </c:pt>
-                  <c:pt idx="23">
-                    <c:v>24</c:v>
-                  </c:pt>
-                </c:lvl>
-              </c:multiLvlStrCache>
-            </c:multiLvlStrRef>
+                <c:pt idx="0">
+                  <c:v>1</c:v>
+                </c:pt>
+                <c:pt idx="1">
+                  <c:v>2</c:v>
+                </c:pt>
+                <c:pt idx="2">
+                  <c:v>3</c:v>
+                </c:pt>
+                <c:pt idx="3">
+                  <c:v>4</c:v>
+                </c:pt>
+                <c:pt idx="4">
+                  <c:v>5</c:v>
+                </c:pt>
+                <c:pt idx="5">
+                  <c:v>6</c:v>
+                </c:pt>
+                <c:pt idx="6">
+                  <c:v>7</c:v>
+                </c:pt>
+                <c:pt idx="7">
+                  <c:v>8</c:v>
+                </c:pt>
+                <c:pt idx="8">
+                  <c:v>9</c:v>
+                </c:pt>
+                <c:pt idx="9">
+                  <c:v>10</c:v>
+                </c:pt>
+                <c:pt idx="10">
+                  <c:v>11</c:v>
+                </c:pt>
+                <c:pt idx="11">
+                  <c:v>12</c:v>
+                </c:pt>
+                <c:pt idx="12">
+                  <c:v>13</c:v>
+                </c:pt>
+                <c:pt idx="13">
+                  <c:v>14</c:v>
+                </c:pt>
+                <c:pt idx="14">
+                  <c:v>15</c:v>
+                </c:pt>
+                <c:pt idx="15">
+                  <c:v>16</c:v>
+                </c:pt>
+                <c:pt idx="16">
+                  <c:v>17</c:v>
+                </c:pt>
+                <c:pt idx="17">
+                  <c:v>18</c:v>
+                </c:pt>
+                <c:pt idx="18">
+                  <c:v>19</c:v>
+                </c:pt>
+                <c:pt idx="19">
+                  <c:v>20</c:v>
+                </c:pt>
+                <c:pt idx="20">
+                  <c:v>21</c:v>
+                </c:pt>
+                <c:pt idx="21">
+                  <c:v>22</c:v>
+                </c:pt>
+                <c:pt idx="22">
+                  <c:v>23</c:v>
+                </c:pt>
+                <c:pt idx="23">
+                  <c:v>24</c:v>
+                </c:pt>
+              </c:strCache>
+            </c:strRef>
           </c:cat>
           <c:val>
             <c:numRef>
@@ -1445,16 +1310,16 @@
                   <c:v>2.867</c:v>
                 </c:pt>
                 <c:pt idx="2">
-                  <c:v>4.616</c:v>
+                  <c:v>4.6159999999999997</c:v>
                 </c:pt>
                 <c:pt idx="3">
-                  <c:v>5.988</c:v>
+                  <c:v>5.9880000000000004</c:v>
                 </c:pt>
                 <c:pt idx="4">
-                  <c:v>7.519</c:v>
+                  <c:v>7.5190000000000001</c:v>
                 </c:pt>
                 <c:pt idx="5">
-                  <c:v>8.872</c:v>
+                  <c:v>8.8719999999999999</c:v>
                 </c:pt>
                 <c:pt idx="6">
                   <c:v>10.58</c:v>
@@ -1463,25 +1328,25 @@
                   <c:v>12.118</c:v>
                 </c:pt>
                 <c:pt idx="8">
-                  <c:v>13.658</c:v>
+                  <c:v>13.657999999999999</c:v>
                 </c:pt>
                 <c:pt idx="9">
                   <c:v>15.507</c:v>
                 </c:pt>
                 <c:pt idx="10">
-                  <c:v>14.018</c:v>
+                  <c:v>14.018000000000001</c:v>
                 </c:pt>
                 <c:pt idx="11">
                   <c:v>15.041</c:v>
                 </c:pt>
                 <c:pt idx="12">
-                  <c:v>16.203</c:v>
+                  <c:v>16.202999999999999</c:v>
                 </c:pt>
                 <c:pt idx="13">
                   <c:v>17.22</c:v>
                 </c:pt>
                 <c:pt idx="14">
-                  <c:v>18.342</c:v>
+                  <c:v>18.341999999999999</c:v>
                 </c:pt>
                 <c:pt idx="15">
                   <c:v>30.811</c:v>
@@ -1490,30 +1355,35 @@
                   <c:v>20.59</c:v>
                 </c:pt>
                 <c:pt idx="17">
-                  <c:v>21.694</c:v>
+                  <c:v>21.693999999999999</c:v>
                 </c:pt>
                 <c:pt idx="18">
-                  <c:v>22.861</c:v>
+                  <c:v>22.861000000000001</c:v>
                 </c:pt>
                 <c:pt idx="19">
-                  <c:v>24.925</c:v>
+                  <c:v>24.925000000000001</c:v>
                 </c:pt>
                 <c:pt idx="20">
-                  <c:v>27.774</c:v>
+                  <c:v>27.774000000000001</c:v>
                 </c:pt>
                 <c:pt idx="21">
-                  <c:v>29.554</c:v>
+                  <c:v>29.553999999999998</c:v>
                 </c:pt>
                 <c:pt idx="22">
                   <c:v>31.61</c:v>
                 </c:pt>
                 <c:pt idx="23">
-                  <c:v>32.627</c:v>
+                  <c:v>32.627000000000002</c:v>
                 </c:pt>
               </c:numCache>
             </c:numRef>
           </c:val>
           <c:smooth val="0"/>
+          <c:extLst>
+            <c:ext xmlns:c16="http://schemas.microsoft.com/office/drawing/2014/chart" uri="{C3380CC4-5D6E-409C-BE32-E72D297353CC}">
+              <c16:uniqueId val="{00000000-9F9F-46E1-BE39-7D2574B7FFFB}"/>
+            </c:ext>
+          </c:extLst>
         </c:ser>
         <c:ser>
           <c:idx val="1"/>
@@ -1530,9 +1400,6 @@
             </c:strRef>
           </c:tx>
           <c:spPr>
-            <a:solidFill>
-              <a:srgbClr val="EF4444"/>
-            </a:solidFill>
             <a:ln w="31750" cap="flat">
               <a:solidFill>
                 <a:srgbClr val="EF4444"/>
@@ -1542,31 +1409,6 @@
             </a:ln>
             <a:effectLst/>
           </c:spPr>
-          <c:invertIfNegative val="0"/>
-          <c:dLbls>
-            <c:numFmt formatCode="#,##0" sourceLinked="0"/>
-            <c:txPr>
-              <a:bodyPr/>
-              <a:lstStyle/>
-              <a:p>
-                <a:pPr>
-                  <a:defRPr b="0" i="0" strike="noStrike" sz="1200" u="none">
-                    <a:solidFill>
-                      <a:srgbClr val="000000"/>
-                    </a:solidFill>
-                    <a:latin typeface="Arial"/>
-                  </a:defRPr>
-                </a:pPr>
-              </a:p>
-            </c:txPr>
-            <c:showLegendKey val="0"/>
-            <c:showVal val="0"/>
-            <c:showCatName val="0"/>
-            <c:showSerName val="0"/>
-            <c:showPercent val="0"/>
-            <c:showBubbleSize val="0"/>
-            <c:showLeaderLines val="0"/>
-          </c:dLbls>
           <c:marker>
             <c:symbol val="circle"/>
             <c:size val="6"/>
@@ -1585,86 +1427,84 @@
             </c:spPr>
           </c:marker>
           <c:cat>
-            <c:multiLvlStrRef>
+            <c:strRef>
               <c:f>Sheet1!$A$2:$A$25</c:f>
-              <c:multiLvlStrCache>
+              <c:strCache>
                 <c:ptCount val="24"/>
-                <c:lvl>
-                  <c:pt idx="0">
-                    <c:v>1</c:v>
-                  </c:pt>
-                  <c:pt idx="1">
-                    <c:v>2</c:v>
-                  </c:pt>
-                  <c:pt idx="2">
-                    <c:v>3</c:v>
-                  </c:pt>
-                  <c:pt idx="3">
-                    <c:v>4</c:v>
-                  </c:pt>
-                  <c:pt idx="4">
-                    <c:v>5</c:v>
-                  </c:pt>
-                  <c:pt idx="5">
-                    <c:v>6</c:v>
-                  </c:pt>
-                  <c:pt idx="6">
-                    <c:v>7</c:v>
-                  </c:pt>
-                  <c:pt idx="7">
-                    <c:v>8</c:v>
-                  </c:pt>
-                  <c:pt idx="8">
-                    <c:v>9</c:v>
-                  </c:pt>
-                  <c:pt idx="9">
-                    <c:v>10</c:v>
-                  </c:pt>
-                  <c:pt idx="10">
-                    <c:v>11</c:v>
-                  </c:pt>
-                  <c:pt idx="11">
-                    <c:v>12</c:v>
-                  </c:pt>
-                  <c:pt idx="12">
-                    <c:v>13</c:v>
-                  </c:pt>
-                  <c:pt idx="13">
-                    <c:v>14</c:v>
-                  </c:pt>
-                  <c:pt idx="14">
-                    <c:v>15</c:v>
-                  </c:pt>
-                  <c:pt idx="15">
-                    <c:v>16</c:v>
-                  </c:pt>
-                  <c:pt idx="16">
-                    <c:v>17</c:v>
-                  </c:pt>
-                  <c:pt idx="17">
-                    <c:v>18</c:v>
-                  </c:pt>
-                  <c:pt idx="18">
-                    <c:v>19</c:v>
-                  </c:pt>
-                  <c:pt idx="19">
-                    <c:v>20</c:v>
-                  </c:pt>
-                  <c:pt idx="20">
-                    <c:v>21</c:v>
-                  </c:pt>
-                  <c:pt idx="21">
-                    <c:v>22</c:v>
-                  </c:pt>
-                  <c:pt idx="22">
-                    <c:v>23</c:v>
-                  </c:pt>
-                  <c:pt idx="23">
-                    <c:v>24</c:v>
-                  </c:pt>
-                </c:lvl>
-              </c:multiLvlStrCache>
-            </c:multiLvlStrRef>
+                <c:pt idx="0">
+                  <c:v>1</c:v>
+                </c:pt>
+                <c:pt idx="1">
+                  <c:v>2</c:v>
+                </c:pt>
+                <c:pt idx="2">
+                  <c:v>3</c:v>
+                </c:pt>
+                <c:pt idx="3">
+                  <c:v>4</c:v>
+                </c:pt>
+                <c:pt idx="4">
+                  <c:v>5</c:v>
+                </c:pt>
+                <c:pt idx="5">
+                  <c:v>6</c:v>
+                </c:pt>
+                <c:pt idx="6">
+                  <c:v>7</c:v>
+                </c:pt>
+                <c:pt idx="7">
+                  <c:v>8</c:v>
+                </c:pt>
+                <c:pt idx="8">
+                  <c:v>9</c:v>
+                </c:pt>
+                <c:pt idx="9">
+                  <c:v>10</c:v>
+                </c:pt>
+                <c:pt idx="10">
+                  <c:v>11</c:v>
+                </c:pt>
+                <c:pt idx="11">
+                  <c:v>12</c:v>
+                </c:pt>
+                <c:pt idx="12">
+                  <c:v>13</c:v>
+                </c:pt>
+                <c:pt idx="13">
+                  <c:v>14</c:v>
+                </c:pt>
+                <c:pt idx="14">
+                  <c:v>15</c:v>
+                </c:pt>
+                <c:pt idx="15">
+                  <c:v>16</c:v>
+                </c:pt>
+                <c:pt idx="16">
+                  <c:v>17</c:v>
+                </c:pt>
+                <c:pt idx="17">
+                  <c:v>18</c:v>
+                </c:pt>
+                <c:pt idx="18">
+                  <c:v>19</c:v>
+                </c:pt>
+                <c:pt idx="19">
+                  <c:v>20</c:v>
+                </c:pt>
+                <c:pt idx="20">
+                  <c:v>21</c:v>
+                </c:pt>
+                <c:pt idx="21">
+                  <c:v>22</c:v>
+                </c:pt>
+                <c:pt idx="22">
+                  <c:v>23</c:v>
+                </c:pt>
+                <c:pt idx="23">
+                  <c:v>24</c:v>
+                </c:pt>
+              </c:strCache>
+            </c:strRef>
           </c:cat>
           <c:val>
             <c:numRef>
@@ -1748,35 +1588,24 @@
             </c:numRef>
           </c:val>
           <c:smooth val="0"/>
+          <c:extLst>
+            <c:ext xmlns:c16="http://schemas.microsoft.com/office/drawing/2014/chart" uri="{C3380CC4-5D6E-409C-BE32-E72D297353CC}">
+              <c16:uniqueId val="{00000001-9F9F-46E1-BE39-7D2574B7FFFB}"/>
+            </c:ext>
+          </c:extLst>
         </c:ser>
         <c:dLbls>
-          <c:numFmt formatCode="#,##0" sourceLinked="0"/>
-          <c:txPr>
-            <a:bodyPr/>
-            <a:lstStyle/>
-            <a:p>
-              <a:pPr>
-                <a:defRPr b="0" i="0" strike="noStrike" sz="1200" u="none">
-                  <a:solidFill>
-                    <a:srgbClr val="000000"/>
-                  </a:solidFill>
-                  <a:latin typeface="Arial"/>
-                </a:defRPr>
-              </a:pPr>
-            </a:p>
-          </c:txPr>
           <c:showLegendKey val="0"/>
           <c:showVal val="0"/>
           <c:showCatName val="0"/>
           <c:showSerName val="0"/>
           <c:showPercent val="0"/>
           <c:showBubbleSize val="0"/>
-          <c:showLeaderLines val="0"/>
         </c:dLbls>
         <c:marker val="1"/>
+        <c:smooth val="0"/>
         <c:axId val="2094734554"/>
         <c:axId val="2094734552"/>
-        <c:axId val="2094734556"/>
       </c:lineChart>
       <c:catAx>
         <c:axId val="2094734554"/>
@@ -1800,7 +1629,7 @@
                   </a:defRPr>
                 </a:pPr>
                 <a:r>
-                  <a:rPr b="0" i="0" u="none" strike="noStrike">
+                  <a:rPr lang="en-US" b="0" i="0" u="none" strike="noStrike">
                     <a:solidFill>
                       <a:srgbClr val="000000"/>
                     </a:solidFill>
@@ -1811,7 +1640,6 @@
               </a:p>
             </c:rich>
           </c:tx>
-          <c:layout/>
           <c:overlay val="0"/>
         </c:title>
         <c:numFmt formatCode="General" sourceLinked="1"/>
@@ -1846,6 +1674,7 @@
         <c:crosses val="autoZero"/>
         <c:auto val="1"/>
         <c:lblAlgn val="ctr"/>
+        <c:lblOffset val="100"/>
         <c:noMultiLvlLbl val="1"/>
       </c:catAx>
       <c:valAx>
@@ -1881,7 +1710,7 @@
                   </a:defRPr>
                 </a:pPr>
                 <a:r>
-                  <a:rPr b="0" i="0" u="none" strike="noStrike">
+                  <a:rPr lang="en-US" b="0" i="0" u="none" strike="noStrike">
                     <a:solidFill>
                       <a:srgbClr val="000000"/>
                     </a:solidFill>
@@ -1892,7 +1721,6 @@
               </a:p>
             </c:rich>
           </c:tx>
-          <c:layout/>
           <c:overlay val="0"/>
         </c:title>
         <c:numFmt formatCode="General" sourceLinked="0"/>
@@ -1943,6 +1771,7 @@
     </c:legend>
     <c:plotVisOnly val="1"/>
     <c:dispBlanksAs val="span"/>
+    <c:showDLblsOverMax val="1"/>
   </c:chart>
   <c:spPr>
     <a:solidFill>
@@ -1981,234 +1810,10 @@
           <a:chExt cx="0" cy="0"/>
         </a:xfrm>
       </p:grpSpPr>
-      <p:sp>
-        <p:nvSpPr>
-          <p:cNvPr id="2" name="Header Placeholder 1"/>
-          <p:cNvSpPr>
-            <a:spLocks noGrp="1"/>
-          </p:cNvSpPr>
-          <p:nvPr>
-            <p:ph type="hdr" sz="quarter"/>
-          </p:nvPr>
-        </p:nvSpPr>
-        <p:spPr>
-          <a:xfrm>
-            <a:off x="0" y="0"/>
-            <a:ext cx="2971800" cy="458788"/>
-          </a:xfrm>
-          <a:prstGeom prst="rect">
-            <a:avLst/>
-          </a:prstGeom>
-        </p:spPr>
-        <p:txBody>
-          <a:bodyPr vert="horz" lIns="91440" tIns="45720" rIns="91440" bIns="45720" rtlCol="0"/>
-          <a:lstStyle>
-            <a:lvl1pPr algn="l">
-              <a:defRPr sz="1200"/>
-            </a:lvl1pPr>
-          </a:lstStyle>
-          <a:p>
-            <a:endParaRPr lang="en-US"/>
-          </a:p>
-        </p:txBody>
-      </p:sp>
-      <p:sp>
-        <p:nvSpPr>
-          <p:cNvPr id="3" name="Date Placeholder 2"/>
-          <p:cNvSpPr>
-            <a:spLocks noGrp="1"/>
-          </p:cNvSpPr>
-          <p:nvPr>
-            <p:ph type="dt" idx="1"/>
-          </p:nvPr>
-        </p:nvSpPr>
-        <p:spPr>
-          <a:xfrm>
-            <a:off x="3884613" y="0"/>
-            <a:ext cx="2971800" cy="458788"/>
-          </a:xfrm>
-          <a:prstGeom prst="rect">
-            <a:avLst/>
-          </a:prstGeom>
-        </p:spPr>
-        <p:txBody>
-          <a:bodyPr vert="horz" lIns="91440" tIns="45720" rIns="91440" bIns="45720" rtlCol="0"/>
-          <a:lstStyle>
-            <a:lvl1pPr algn="r">
-              <a:defRPr sz="1200"/>
-            </a:lvl1pPr>
-          </a:lstStyle>
-          <a:p>
-            <a:fld id="{5282F153-3F37-0F45-9E97-73ACFA13230C}" type="datetimeFigureOut">
-              <a:rPr lang="en-US"/>
-              <a:t>7/23/19</a:t>
-            </a:fld>
-            <a:endParaRPr lang="en-US"/>
-          </a:p>
-        </p:txBody>
-      </p:sp>
-      <p:sp>
-        <p:nvSpPr>
-          <p:cNvPr id="4" name="Slide Image Placeholder 3"/>
-          <p:cNvSpPr>
-            <a:spLocks noGrp="1" noRot="1" noChangeAspect="1"/>
-          </p:cNvSpPr>
-          <p:nvPr>
-            <p:ph type="sldImg" idx="2"/>
-          </p:nvPr>
-        </p:nvSpPr>
-        <p:spPr>
-          <a:xfrm>
-            <a:off x="685800" y="1143000"/>
-            <a:ext cx="5486400" cy="3086100"/>
-          </a:xfrm>
-          <a:prstGeom prst="rect">
-            <a:avLst/>
-          </a:prstGeom>
-          <a:noFill/>
-          <a:ln w="12700">
-            <a:solidFill>
-              <a:prstClr val="black"/>
-            </a:solidFill>
-          </a:ln>
-        </p:spPr>
-        <p:txBody>
-          <a:bodyPr vert="horz" lIns="91440" tIns="45720" rIns="91440" bIns="45720" rtlCol="0" anchor="ctr"/>
-          <a:lstStyle/>
-          <a:p>
-            <a:endParaRPr lang="en-US"/>
-          </a:p>
-        </p:txBody>
-      </p:sp>
-      <p:sp>
-        <p:nvSpPr>
-          <p:cNvPr id="5" name="Notes Placeholder 4"/>
-          <p:cNvSpPr>
-            <a:spLocks noGrp="1"/>
-          </p:cNvSpPr>
-          <p:nvPr>
-            <p:ph type="body" sz="quarter" idx="3"/>
-          </p:nvPr>
-        </p:nvSpPr>
-        <p:spPr>
-          <a:xfrm>
-            <a:off x="685800" y="4400550"/>
-            <a:ext cx="5486400" cy="3600450"/>
-          </a:xfrm>
-          <a:prstGeom prst="rect">
-            <a:avLst/>
-          </a:prstGeom>
-        </p:spPr>
-        <p:txBody>
-          <a:bodyPr vert="horz" lIns="91440" tIns="45720" rIns="91440" bIns="45720" rtlCol="0"/>
-          <a:lstStyle/>
-          <a:p>
-            <a:pPr lvl="0"/>
-            <a:r>
-              <a:rPr lang="en-US"/>
-              <a:t>Click to edit Master text styles</a:t>
-            </a:r>
-          </a:p>
-          <a:p>
-            <a:pPr lvl="1"/>
-            <a:r>
-              <a:rPr lang="en-US"/>
-              <a:t>Second level</a:t>
-            </a:r>
-          </a:p>
-          <a:p>
-            <a:pPr lvl="2"/>
-            <a:r>
-              <a:rPr lang="en-US"/>
-              <a:t>Third level</a:t>
-            </a:r>
-          </a:p>
-          <a:p>
-            <a:pPr lvl="3"/>
-            <a:r>
-              <a:rPr lang="en-US"/>
-              <a:t>Fourth level</a:t>
-            </a:r>
-          </a:p>
-          <a:p>
-            <a:pPr lvl="4"/>
-            <a:r>
-              <a:rPr lang="en-US"/>
-              <a:t>Fifth level</a:t>
-            </a:r>
-          </a:p>
-        </p:txBody>
-      </p:sp>
-      <p:sp>
-        <p:nvSpPr>
-          <p:cNvPr id="6" name="Footer Placeholder 5"/>
-          <p:cNvSpPr>
-            <a:spLocks noGrp="1"/>
-          </p:cNvSpPr>
-          <p:nvPr>
-            <p:ph type="ftr" sz="quarter" idx="4"/>
-          </p:nvPr>
-        </p:nvSpPr>
-        <p:spPr>
-          <a:xfrm>
-            <a:off x="0" y="8685213"/>
-            <a:ext cx="2971800" cy="458787"/>
-          </a:xfrm>
-          <a:prstGeom prst="rect">
-            <a:avLst/>
-          </a:prstGeom>
-        </p:spPr>
-        <p:txBody>
-          <a:bodyPr vert="horz" lIns="91440" tIns="45720" rIns="91440" bIns="45720" rtlCol="0" anchor="b"/>
-          <a:lstStyle>
-            <a:lvl1pPr algn="l">
-              <a:defRPr sz="1200"/>
-            </a:lvl1pPr>
-          </a:lstStyle>
-          <a:p>
-            <a:endParaRPr lang="en-US"/>
-          </a:p>
-        </p:txBody>
-      </p:sp>
-      <p:sp>
-        <p:nvSpPr>
-          <p:cNvPr id="7" name="Slide Number Placeholder 6"/>
-          <p:cNvSpPr>
-            <a:spLocks noGrp="1"/>
-          </p:cNvSpPr>
-          <p:nvPr>
-            <p:ph type="sldNum" sz="quarter" idx="5"/>
-          </p:nvPr>
-        </p:nvSpPr>
-        <p:spPr>
-          <a:xfrm>
-            <a:off x="3884613" y="8685213"/>
-            <a:ext cx="2971800" cy="458787"/>
-          </a:xfrm>
-          <a:prstGeom prst="rect">
-            <a:avLst/>
-          </a:prstGeom>
-        </p:spPr>
-        <p:txBody>
-          <a:bodyPr vert="horz" lIns="91440" tIns="45720" rIns="91440" bIns="45720" rtlCol="0" anchor="b"/>
-          <a:lstStyle>
-            <a:lvl1pPr algn="r">
-              <a:defRPr sz="1200"/>
-            </a:lvl1pPr>
-          </a:lstStyle>
-          <a:p>
-            <a:fld id="{CE5E9CC1-C706-0F49-92D6-E571CC5EEA8F}" type="slidenum">
-              <a:rPr lang="en-US"/>
-              <a:t>‹#›</a:t>
-            </a:fld>
-            <a:endParaRPr lang="en-US"/>
-          </a:p>
-        </p:txBody>
-      </p:sp>
     </p:spTree>
     <p:extLst>
       <p:ext uri="{BB962C8B-B14F-4D97-AF65-F5344CB8AC3E}">
-        <p14:creationId xmlns:p14="http://schemas.microsoft.com/office/powerpoint/2010/main" val="1024086991"/>
+        <p14:creationId xmlns:p14="http://schemas.microsoft.com/office/powerpoint/2010/main" val="4253423071"/>
       </p:ext>
     </p:extLst>
   </p:cSld>
@@ -2353,10 +1958,39 @@
           <a:lstStyle/>
           <a:p>
             <a:r>
-              <a:rPr lang="en-US" dirty="0"/>
-              <a:t/>
-            </a:r>
-            <a:endParaRPr lang="en-US" dirty="0"/>
+              <a:rPr lang="en-US" sz="1200" b="0" kern="1200" dirty="0">
+                <a:solidFill>
+                  <a:schemeClr val="tx1"/>
+                </a:solidFill>
+                <a:effectLst/>
+                <a:latin typeface="+mn-lt"/>
+                <a:ea typeface="+mn-ea"/>
+                <a:cs typeface="+mn-cs"/>
+              </a:rPr>
+              <a:t>The N-body gravitational simulation is one of the oldest unsolved problems in computational physics — every particle attracts every other, and the math doesn't simplify. My goal was to take that inherently quadratic problem and distribute it across 24 MPI processes on our three-node cluster. What I built is a fully symmetric peer-to-peer decomposition using the leapfrog KDK integrator, and today I'll walk through the design, the scaling results, and what the data actually tells us about where the bottlenecks live.</a:t>
+            </a:r>
+          </a:p>
+          <a:p>
+            <a:br>
+              <a:rPr lang="en-US" sz="1200" b="0" kern="1200" dirty="0">
+                <a:solidFill>
+                  <a:schemeClr val="tx1"/>
+                </a:solidFill>
+                <a:effectLst/>
+                <a:latin typeface="+mn-lt"/>
+                <a:ea typeface="+mn-ea"/>
+                <a:cs typeface="+mn-cs"/>
+              </a:rPr>
+            </a:br>
+            <a:endParaRPr lang="en-US" sz="1200" b="0" kern="1200" dirty="0">
+              <a:solidFill>
+                <a:schemeClr val="tx1"/>
+              </a:solidFill>
+              <a:effectLst/>
+              <a:latin typeface="+mn-lt"/>
+              <a:ea typeface="+mn-ea"/>
+              <a:cs typeface="+mn-cs"/>
+            </a:endParaRPr>
           </a:p>
         </p:txBody>
       </p:sp>
@@ -2441,10 +2075,113 @@
           <a:lstStyle/>
           <a:p>
             <a:r>
-              <a:rPr lang="en-US" dirty="0"/>
-              <a:t/>
-            </a:r>
-            <a:endParaRPr lang="en-US" dirty="0"/>
+              <a:rPr lang="en-US" sz="1200" b="0" kern="1200" dirty="0">
+                <a:solidFill>
+                  <a:schemeClr val="tx1"/>
+                </a:solidFill>
+                <a:effectLst/>
+                <a:latin typeface="+mn-lt"/>
+                <a:ea typeface="+mn-ea"/>
+                <a:cs typeface="+mn-cs"/>
+              </a:rPr>
+              <a:t>The core challenge is straightforward to state: simulate N particles under mutual gravitational attraction. Each particle exerts a force on every other, so naïve all-pairs evaluation costs O(N²) per timestep. At N = 9,600 and 10 steps, a serial run on one core takes just over one second. That sounds fast — but it scales quadratically. Double N, and you quadruple the work.</a:t>
+            </a:r>
+          </a:p>
+          <a:p>
+            <a:br>
+              <a:rPr lang="en-US" sz="1200" b="0" kern="1200" dirty="0">
+                <a:solidFill>
+                  <a:schemeClr val="tx1"/>
+                </a:solidFill>
+                <a:effectLst/>
+                <a:latin typeface="+mn-lt"/>
+                <a:ea typeface="+mn-ea"/>
+                <a:cs typeface="+mn-cs"/>
+              </a:rPr>
+            </a:br>
+            <a:endParaRPr lang="en-US" sz="1200" b="0" kern="1200" dirty="0">
+              <a:solidFill>
+                <a:schemeClr val="tx1"/>
+              </a:solidFill>
+              <a:effectLst/>
+              <a:latin typeface="+mn-lt"/>
+              <a:ea typeface="+mn-ea"/>
+              <a:cs typeface="+mn-cs"/>
+            </a:endParaRPr>
+          </a:p>
+          <a:p>
+            <a:r>
+              <a:rPr lang="en-US" sz="1200" b="0" kern="1200" dirty="0">
+                <a:solidFill>
+                  <a:schemeClr val="tx1"/>
+                </a:solidFill>
+                <a:effectLst/>
+                <a:latin typeface="+mn-lt"/>
+                <a:ea typeface="+mn-ea"/>
+                <a:cs typeface="+mn-cs"/>
+              </a:rPr>
+              <a:t>The force law I implemented is the Plummer-softened form: the standard gravitational force, modified by adding a softening length ε = 0.05 to the denominator. That epsilon term prevents the force from blowing up when two particles get very close — a real numerical issue in direct N-body codes.</a:t>
+            </a:r>
+          </a:p>
+          <a:p>
+            <a:br>
+              <a:rPr lang="en-US" sz="1200" b="0" kern="1200" dirty="0">
+                <a:solidFill>
+                  <a:schemeClr val="tx1"/>
+                </a:solidFill>
+                <a:effectLst/>
+                <a:latin typeface="+mn-lt"/>
+                <a:ea typeface="+mn-ea"/>
+                <a:cs typeface="+mn-cs"/>
+              </a:rPr>
+            </a:br>
+            <a:endParaRPr lang="en-US" sz="1200" b="0" kern="1200" dirty="0">
+              <a:solidFill>
+                <a:schemeClr val="tx1"/>
+              </a:solidFill>
+              <a:effectLst/>
+              <a:latin typeface="+mn-lt"/>
+              <a:ea typeface="+mn-ea"/>
+              <a:cs typeface="+mn-cs"/>
+            </a:endParaRPr>
+          </a:p>
+          <a:p>
+            <a:r>
+              <a:rPr lang="en-US" sz="1200" b="0" kern="1200" dirty="0">
+                <a:solidFill>
+                  <a:schemeClr val="tx1"/>
+                </a:solidFill>
+                <a:effectLst/>
+                <a:latin typeface="+mn-lt"/>
+                <a:ea typeface="+mn-ea"/>
+                <a:cs typeface="+mn-cs"/>
+              </a:rPr>
+              <a:t>The reason I chose MPI over threading is the cluster architecture. Three separate nodes with no shared memory means </a:t>
+            </a:r>
+            <a:r>
+              <a:rPr lang="en-US" sz="1200" b="0" kern="1200" dirty="0" err="1">
+                <a:solidFill>
+                  <a:schemeClr val="tx1"/>
+                </a:solidFill>
+                <a:effectLst/>
+                <a:latin typeface="+mn-lt"/>
+                <a:ea typeface="+mn-ea"/>
+                <a:cs typeface="+mn-cs"/>
+              </a:rPr>
+              <a:t>pthreads</a:t>
+            </a:r>
+            <a:r>
+              <a:rPr lang="en-US" sz="1200" b="0" kern="1200" dirty="0">
+                <a:solidFill>
+                  <a:schemeClr val="tx1"/>
+                </a:solidFill>
+                <a:effectLst/>
+                <a:latin typeface="+mn-lt"/>
+                <a:ea typeface="+mn-ea"/>
+                <a:cs typeface="+mn-cs"/>
+              </a:rPr>
+              <a:t> or OpenMP can only use one node at a time. MPI lets me distribute particles across all 24 cores simultaneously. The trade-off is that I now have to explicitly synchronize positions after every timestep — and that communication cost becomes the central story in the scaling results.</a:t>
+            </a:r>
           </a:p>
         </p:txBody>
       </p:sp>
@@ -2529,10 +2266,233 @@
           <a:lstStyle/>
           <a:p>
             <a:r>
-              <a:rPr lang="en-US" dirty="0"/>
-              <a:t/>
-            </a:r>
-            <a:endParaRPr lang="en-US" dirty="0"/>
+              <a:rPr lang="en-US" sz="1200" b="0" kern="1200" dirty="0">
+                <a:solidFill>
+                  <a:schemeClr val="tx1"/>
+                </a:solidFill>
+                <a:effectLst/>
+                <a:latin typeface="+mn-lt"/>
+                <a:ea typeface="+mn-ea"/>
+                <a:cs typeface="+mn-cs"/>
+              </a:rPr>
+              <a:t>The integration scheme is leapfrog KDK — kick, drift, kick. Each timestep runs five stages: a velocity half-kick, a position drift, three `</a:t>
+            </a:r>
+            <a:r>
+              <a:rPr lang="en-US" sz="1200" b="0" kern="1200" dirty="0" err="1">
+                <a:solidFill>
+                  <a:schemeClr val="tx1"/>
+                </a:solidFill>
+                <a:effectLst/>
+                <a:latin typeface="+mn-lt"/>
+                <a:ea typeface="+mn-ea"/>
+                <a:cs typeface="+mn-cs"/>
+              </a:rPr>
+              <a:t>MPI_Allgatherv</a:t>
+            </a:r>
+            <a:r>
+              <a:rPr lang="en-US" sz="1200" b="0" kern="1200" dirty="0">
+                <a:solidFill>
+                  <a:schemeClr val="tx1"/>
+                </a:solidFill>
+                <a:effectLst/>
+                <a:latin typeface="+mn-lt"/>
+                <a:ea typeface="+mn-ea"/>
+                <a:cs typeface="+mn-cs"/>
+              </a:rPr>
+              <a:t>` calls to synchronize the updated positions across all ranks, a full force </a:t>
+            </a:r>
+            <a:r>
+              <a:rPr lang="en-US" sz="1200" b="0" kern="1200" dirty="0" err="1">
+                <a:solidFill>
+                  <a:schemeClr val="tx1"/>
+                </a:solidFill>
+                <a:effectLst/>
+                <a:latin typeface="+mn-lt"/>
+                <a:ea typeface="+mn-ea"/>
+                <a:cs typeface="+mn-cs"/>
+              </a:rPr>
+              <a:t>recomputation</a:t>
+            </a:r>
+            <a:r>
+              <a:rPr lang="en-US" sz="1200" b="0" kern="1200" dirty="0">
+                <a:solidFill>
+                  <a:schemeClr val="tx1"/>
+                </a:solidFill>
+                <a:effectLst/>
+                <a:latin typeface="+mn-lt"/>
+                <a:ea typeface="+mn-ea"/>
+                <a:cs typeface="+mn-cs"/>
+              </a:rPr>
+              <a:t>, and then a second velocity half-kick to complete the step.</a:t>
+            </a:r>
+          </a:p>
+          <a:p>
+            <a:br>
+              <a:rPr lang="en-US" sz="1200" b="0" kern="1200" dirty="0">
+                <a:solidFill>
+                  <a:schemeClr val="tx1"/>
+                </a:solidFill>
+                <a:effectLst/>
+                <a:latin typeface="+mn-lt"/>
+                <a:ea typeface="+mn-ea"/>
+                <a:cs typeface="+mn-cs"/>
+              </a:rPr>
+            </a:br>
+            <a:endParaRPr lang="en-US" sz="1200" b="0" kern="1200" dirty="0">
+              <a:solidFill>
+                <a:schemeClr val="tx1"/>
+              </a:solidFill>
+              <a:effectLst/>
+              <a:latin typeface="+mn-lt"/>
+              <a:ea typeface="+mn-ea"/>
+              <a:cs typeface="+mn-cs"/>
+            </a:endParaRPr>
+          </a:p>
+          <a:p>
+            <a:r>
+              <a:rPr lang="en-US" sz="1200" b="0" kern="1200" dirty="0">
+                <a:solidFill>
+                  <a:schemeClr val="tx1"/>
+                </a:solidFill>
+                <a:effectLst/>
+                <a:latin typeface="+mn-lt"/>
+                <a:ea typeface="+mn-ea"/>
+                <a:cs typeface="+mn-cs"/>
+              </a:rPr>
+              <a:t>The parallel decomposition is block-based. Each of the P ranks owns a contiguous slice of N/P particles. Rank r owns particles from index r·(N/P) through (r+1)·(N/P) − 1. Every rank computes the full O(N/P × N) force calculation for its local particles — that's the O(N²/P) kernel that actually scales.</a:t>
+            </a:r>
+          </a:p>
+          <a:p>
+            <a:br>
+              <a:rPr lang="en-US" sz="1200" b="0" kern="1200" dirty="0">
+                <a:solidFill>
+                  <a:schemeClr val="tx1"/>
+                </a:solidFill>
+                <a:effectLst/>
+                <a:latin typeface="+mn-lt"/>
+                <a:ea typeface="+mn-ea"/>
+                <a:cs typeface="+mn-cs"/>
+              </a:rPr>
+            </a:br>
+            <a:endParaRPr lang="en-US" sz="1200" b="0" kern="1200" dirty="0">
+              <a:solidFill>
+                <a:schemeClr val="tx1"/>
+              </a:solidFill>
+              <a:effectLst/>
+              <a:latin typeface="+mn-lt"/>
+              <a:ea typeface="+mn-ea"/>
+              <a:cs typeface="+mn-cs"/>
+            </a:endParaRPr>
+          </a:p>
+          <a:p>
+            <a:r>
+              <a:rPr lang="en-US" sz="1200" b="0" kern="1200" dirty="0">
+                <a:solidFill>
+                  <a:schemeClr val="tx1"/>
+                </a:solidFill>
+                <a:effectLst/>
+                <a:latin typeface="+mn-lt"/>
+                <a:ea typeface="+mn-ea"/>
+                <a:cs typeface="+mn-cs"/>
+              </a:rPr>
+              <a:t>The synchronization step is the expensive part. After every drift, each rank updates only its own slice of the global position arrays. Then three `</a:t>
+            </a:r>
+            <a:r>
+              <a:rPr lang="en-US" sz="1200" b="0" kern="1200" dirty="0" err="1">
+                <a:solidFill>
+                  <a:schemeClr val="tx1"/>
+                </a:solidFill>
+                <a:effectLst/>
+                <a:latin typeface="+mn-lt"/>
+                <a:ea typeface="+mn-ea"/>
+                <a:cs typeface="+mn-cs"/>
+              </a:rPr>
+              <a:t>MPI_Allgatherv</a:t>
+            </a:r>
+            <a:r>
+              <a:rPr lang="en-US" sz="1200" b="0" kern="1200" dirty="0">
+                <a:solidFill>
+                  <a:schemeClr val="tx1"/>
+                </a:solidFill>
+                <a:effectLst/>
+                <a:latin typeface="+mn-lt"/>
+                <a:ea typeface="+mn-ea"/>
+                <a:cs typeface="+mn-cs"/>
+              </a:rPr>
+              <a:t>` calls — one each for x, y, and z — broadcast every rank's updated positions to everyone else. That's O(N) data per call, O(N) total bytes per timestep, and three collective synchronization barriers that every process must hit before the force evaluation can proceed.</a:t>
+            </a:r>
+          </a:p>
+          <a:p>
+            <a:br>
+              <a:rPr lang="en-US" sz="1200" b="0" kern="1200" dirty="0">
+                <a:solidFill>
+                  <a:schemeClr val="tx1"/>
+                </a:solidFill>
+                <a:effectLst/>
+                <a:latin typeface="+mn-lt"/>
+                <a:ea typeface="+mn-ea"/>
+                <a:cs typeface="+mn-cs"/>
+              </a:rPr>
+            </a:br>
+            <a:endParaRPr lang="en-US" sz="1200" b="0" kern="1200" dirty="0">
+              <a:solidFill>
+                <a:schemeClr val="tx1"/>
+              </a:solidFill>
+              <a:effectLst/>
+              <a:latin typeface="+mn-lt"/>
+              <a:ea typeface="+mn-ea"/>
+              <a:cs typeface="+mn-cs"/>
+            </a:endParaRPr>
+          </a:p>
+          <a:p>
+            <a:r>
+              <a:rPr lang="en-US" sz="1200" b="0" kern="1200" dirty="0">
+                <a:solidFill>
+                  <a:schemeClr val="tx1"/>
+                </a:solidFill>
+                <a:effectLst/>
+                <a:latin typeface="+mn-lt"/>
+                <a:ea typeface="+mn-ea"/>
+                <a:cs typeface="+mn-cs"/>
+              </a:rPr>
+              <a:t>The force kernel itself uses Plummer softening and caches the inverse cube root — one sqrt per particle pair, shared across all three spatial components. That keeps the flop count tight; the bottleneck is data movement, not arithmetic.</a:t>
+            </a:r>
+          </a:p>
+          <a:p>
+            <a:br>
+              <a:rPr lang="en-US" sz="1200" b="0" kern="1200" dirty="0">
+                <a:solidFill>
+                  <a:schemeClr val="tx1"/>
+                </a:solidFill>
+                <a:effectLst/>
+                <a:latin typeface="+mn-lt"/>
+                <a:ea typeface="+mn-ea"/>
+                <a:cs typeface="+mn-cs"/>
+              </a:rPr>
+            </a:br>
+            <a:endParaRPr lang="en-US" sz="1200" b="0" kern="1200" dirty="0">
+              <a:solidFill>
+                <a:schemeClr val="tx1"/>
+              </a:solidFill>
+              <a:effectLst/>
+              <a:latin typeface="+mn-lt"/>
+              <a:ea typeface="+mn-ea"/>
+              <a:cs typeface="+mn-cs"/>
+            </a:endParaRPr>
+          </a:p>
+          <a:p>
+            <a:r>
+              <a:rPr lang="en-US" sz="1200" b="0" kern="1200" dirty="0">
+                <a:solidFill>
+                  <a:schemeClr val="tx1"/>
+                </a:solidFill>
+                <a:effectLst/>
+                <a:latin typeface="+mn-lt"/>
+                <a:ea typeface="+mn-ea"/>
+                <a:cs typeface="+mn-cs"/>
+              </a:rPr>
+              <a:t>One design choice worth noting: I time only the simulation loop. Initialization — seeding particle positions, broadcasting mass, computing the t = 0 forces — is excluded. The reported wall times reflect pure computation and communication overhead, not setup.</a:t>
+            </a:r>
           </a:p>
         </p:txBody>
       </p:sp>
@@ -2617,10 +2577,161 @@
           <a:lstStyle/>
           <a:p>
             <a:r>
-              <a:rPr lang="en-US" dirty="0"/>
-              <a:t/>
-            </a:r>
-            <a:endParaRPr lang="en-US" dirty="0"/>
+              <a:rPr lang="en-US" sz="1200" b="0" kern="1200" dirty="0">
+                <a:solidFill>
+                  <a:schemeClr val="tx1"/>
+                </a:solidFill>
+                <a:effectLst/>
+                <a:latin typeface="+mn-lt"/>
+                <a:ea typeface="+mn-ea"/>
+                <a:cs typeface="+mn-cs"/>
+              </a:rPr>
+              <a:t>The cluster is three nodes over a 10.0.0.0/24 TCP fabric, scheduled via SLURM with PMI2 bootstrap. I compiled with Intel's `</a:t>
+            </a:r>
+            <a:r>
+              <a:rPr lang="en-US" sz="1200" b="0" kern="1200" dirty="0" err="1">
+                <a:solidFill>
+                  <a:schemeClr val="tx1"/>
+                </a:solidFill>
+                <a:effectLst/>
+                <a:latin typeface="+mn-lt"/>
+                <a:ea typeface="+mn-ea"/>
+                <a:cs typeface="+mn-cs"/>
+              </a:rPr>
+              <a:t>mpiicx</a:t>
+            </a:r>
+            <a:r>
+              <a:rPr lang="en-US" sz="1200" b="0" kern="1200" dirty="0">
+                <a:solidFill>
+                  <a:schemeClr val="tx1"/>
+                </a:solidFill>
+                <a:effectLst/>
+                <a:latin typeface="+mn-lt"/>
+                <a:ea typeface="+mn-ea"/>
+                <a:cs typeface="+mn-cs"/>
+              </a:rPr>
+              <a:t>`, `-O3`, and `-</a:t>
+            </a:r>
+            <a:r>
+              <a:rPr lang="en-US" sz="1200" b="0" kern="1200" dirty="0" err="1">
+                <a:solidFill>
+                  <a:schemeClr val="tx1"/>
+                </a:solidFill>
+                <a:effectLst/>
+                <a:latin typeface="+mn-lt"/>
+                <a:ea typeface="+mn-ea"/>
+                <a:cs typeface="+mn-cs"/>
+              </a:rPr>
+              <a:t>xHost</a:t>
+            </a:r>
+            <a:r>
+              <a:rPr lang="en-US" sz="1200" b="0" kern="1200" dirty="0">
+                <a:solidFill>
+                  <a:schemeClr val="tx1"/>
+                </a:solidFill>
+                <a:effectLst/>
+                <a:latin typeface="+mn-lt"/>
+                <a:ea typeface="+mn-ea"/>
+                <a:cs typeface="+mn-cs"/>
+              </a:rPr>
+              <a:t>` to get full vectorization for the node's ISA.</a:t>
+            </a:r>
+          </a:p>
+          <a:p>
+            <a:br>
+              <a:rPr lang="en-US" sz="1200" b="0" kern="1200" dirty="0">
+                <a:solidFill>
+                  <a:schemeClr val="tx1"/>
+                </a:solidFill>
+                <a:effectLst/>
+                <a:latin typeface="+mn-lt"/>
+                <a:ea typeface="+mn-ea"/>
+                <a:cs typeface="+mn-cs"/>
+              </a:rPr>
+            </a:br>
+            <a:endParaRPr lang="en-US" sz="1200" b="0" kern="1200" dirty="0">
+              <a:solidFill>
+                <a:schemeClr val="tx1"/>
+              </a:solidFill>
+              <a:effectLst/>
+              <a:latin typeface="+mn-lt"/>
+              <a:ea typeface="+mn-ea"/>
+              <a:cs typeface="+mn-cs"/>
+            </a:endParaRPr>
+          </a:p>
+          <a:p>
+            <a:r>
+              <a:rPr lang="en-US" sz="1200" b="0" kern="1200" dirty="0">
+                <a:solidFill>
+                  <a:schemeClr val="tx1"/>
+                </a:solidFill>
+                <a:effectLst/>
+                <a:latin typeface="+mn-lt"/>
+                <a:ea typeface="+mn-ea"/>
+                <a:cs typeface="+mn-cs"/>
+              </a:rPr>
+              <a:t>I ran two studies. Strong scaling: fixed N at 2,400, 4,800, and 9,600 particles, sweeping P from 1 to 24 at 10 timesteps each. Weak scaling: 1,000 particles per process, 50 timesteps, again from P = 1 to P = 24 — so total N grows from 1,000 to 24,000.</a:t>
+            </a:r>
+          </a:p>
+          <a:p>
+            <a:br>
+              <a:rPr lang="en-US" sz="1200" b="0" kern="1200" dirty="0">
+                <a:solidFill>
+                  <a:schemeClr val="tx1"/>
+                </a:solidFill>
+                <a:effectLst/>
+                <a:latin typeface="+mn-lt"/>
+                <a:ea typeface="+mn-ea"/>
+                <a:cs typeface="+mn-cs"/>
+              </a:rPr>
+            </a:br>
+            <a:endParaRPr lang="en-US" sz="1200" b="0" kern="1200" dirty="0">
+              <a:solidFill>
+                <a:schemeClr val="tx1"/>
+              </a:solidFill>
+              <a:effectLst/>
+              <a:latin typeface="+mn-lt"/>
+              <a:ea typeface="+mn-ea"/>
+              <a:cs typeface="+mn-cs"/>
+            </a:endParaRPr>
+          </a:p>
+          <a:p>
+            <a:r>
+              <a:rPr lang="en-US" sz="1200" b="0" kern="1200" dirty="0">
+                <a:solidFill>
+                  <a:schemeClr val="tx1"/>
+                </a:solidFill>
+                <a:effectLst/>
+                <a:latin typeface="+mn-lt"/>
+                <a:ea typeface="+mn-ea"/>
+                <a:cs typeface="+mn-cs"/>
+              </a:rPr>
+              <a:t>Every configuration ran three independent trials. I report median wall time — medians are more robust to OS scheduling jitter than means, especially on a shared cluster. `</a:t>
+            </a:r>
+            <a:r>
+              <a:rPr lang="en-US" sz="1200" b="0" kern="1200" dirty="0" err="1">
+                <a:solidFill>
+                  <a:schemeClr val="tx1"/>
+                </a:solidFill>
+                <a:effectLst/>
+                <a:latin typeface="+mn-lt"/>
+                <a:ea typeface="+mn-ea"/>
+                <a:cs typeface="+mn-cs"/>
+              </a:rPr>
+              <a:t>MPI_Wtime</a:t>
+            </a:r>
+            <a:r>
+              <a:rPr lang="en-US" sz="1200" b="0" kern="1200" dirty="0">
+                <a:solidFill>
+                  <a:schemeClr val="tx1"/>
+                </a:solidFill>
+                <a:effectLst/>
+                <a:latin typeface="+mn-lt"/>
+                <a:ea typeface="+mn-ea"/>
+                <a:cs typeface="+mn-cs"/>
+              </a:rPr>
+              <a:t>()` brackets the loop on each rank; the reported time is the slowest rank's time, which is the true wall-clock bottleneck.</a:t>
+            </a:r>
           </a:p>
         </p:txBody>
       </p:sp>
@@ -2705,10 +2816,209 @@
           <a:lstStyle/>
           <a:p>
             <a:r>
-              <a:rPr lang="en-US" dirty="0"/>
-              <a:t/>
-            </a:r>
-            <a:endParaRPr lang="en-US" dirty="0"/>
+              <a:rPr lang="en-US" sz="1200" b="0" kern="1200" dirty="0">
+                <a:solidFill>
+                  <a:schemeClr val="tx1"/>
+                </a:solidFill>
+                <a:effectLst/>
+                <a:latin typeface="+mn-lt"/>
+                <a:ea typeface="+mn-ea"/>
+                <a:cs typeface="+mn-cs"/>
+              </a:rPr>
+              <a:t>The strong scaling results show three distinct curves, and the separation between them is the most important thing on this slide.</a:t>
+            </a:r>
+          </a:p>
+          <a:p>
+            <a:br>
+              <a:rPr lang="en-US" sz="1200" b="0" kern="1200" dirty="0">
+                <a:solidFill>
+                  <a:schemeClr val="tx1"/>
+                </a:solidFill>
+                <a:effectLst/>
+                <a:latin typeface="+mn-lt"/>
+                <a:ea typeface="+mn-ea"/>
+                <a:cs typeface="+mn-cs"/>
+              </a:rPr>
+            </a:br>
+            <a:endParaRPr lang="en-US" sz="1200" b="0" kern="1200" dirty="0">
+              <a:solidFill>
+                <a:schemeClr val="tx1"/>
+              </a:solidFill>
+              <a:effectLst/>
+              <a:latin typeface="+mn-lt"/>
+              <a:ea typeface="+mn-ea"/>
+              <a:cs typeface="+mn-cs"/>
+            </a:endParaRPr>
+          </a:p>
+          <a:p>
+            <a:r>
+              <a:rPr lang="en-US" sz="1200" b="0" kern="1200" dirty="0">
+                <a:solidFill>
+                  <a:schemeClr val="tx1"/>
+                </a:solidFill>
+                <a:effectLst/>
+                <a:latin typeface="+mn-lt"/>
+                <a:ea typeface="+mn-ea"/>
+                <a:cs typeface="+mn-cs"/>
+              </a:rPr>
+              <a:t>At N = 2,400, the best speedup we see is 1.92× at P = 8. That's barely 2× on 8 cores — terrible efficiency. The problem is that N² = 5.76 million force evaluations per step split across 8 ranks gives each rank about 720K operations. While that sounds like real work, the three `</a:t>
+            </a:r>
+            <a:r>
+              <a:rPr lang="en-US" sz="1200" b="0" kern="1200" dirty="0" err="1">
+                <a:solidFill>
+                  <a:schemeClr val="tx1"/>
+                </a:solidFill>
+                <a:effectLst/>
+                <a:latin typeface="+mn-lt"/>
+                <a:ea typeface="+mn-ea"/>
+                <a:cs typeface="+mn-cs"/>
+              </a:rPr>
+              <a:t>Allgatherv</a:t>
+            </a:r>
+            <a:r>
+              <a:rPr lang="en-US" sz="1200" b="0" kern="1200" dirty="0">
+                <a:solidFill>
+                  <a:schemeClr val="tx1"/>
+                </a:solidFill>
+                <a:effectLst/>
+                <a:latin typeface="+mn-lt"/>
+                <a:ea typeface="+mn-ea"/>
+                <a:cs typeface="+mn-cs"/>
+              </a:rPr>
+              <a:t>` calls synchronize 2,400 doubles each — the communication is not a small fraction of the total time. The compute-to-communication ratio is simply too low.</a:t>
+            </a:r>
+          </a:p>
+          <a:p>
+            <a:br>
+              <a:rPr lang="en-US" sz="1200" b="0" kern="1200" dirty="0">
+                <a:solidFill>
+                  <a:schemeClr val="tx1"/>
+                </a:solidFill>
+                <a:effectLst/>
+                <a:latin typeface="+mn-lt"/>
+                <a:ea typeface="+mn-ea"/>
+                <a:cs typeface="+mn-cs"/>
+              </a:rPr>
+            </a:br>
+            <a:endParaRPr lang="en-US" sz="1200" b="0" kern="1200" dirty="0">
+              <a:solidFill>
+                <a:schemeClr val="tx1"/>
+              </a:solidFill>
+              <a:effectLst/>
+              <a:latin typeface="+mn-lt"/>
+              <a:ea typeface="+mn-ea"/>
+              <a:cs typeface="+mn-cs"/>
+            </a:endParaRPr>
+          </a:p>
+          <a:p>
+            <a:r>
+              <a:rPr lang="en-US" sz="1200" b="0" kern="1200" dirty="0">
+                <a:solidFill>
+                  <a:schemeClr val="tx1"/>
+                </a:solidFill>
+                <a:effectLst/>
+                <a:latin typeface="+mn-lt"/>
+                <a:ea typeface="+mn-ea"/>
+                <a:cs typeface="+mn-cs"/>
+              </a:rPr>
+              <a:t>At N = 4,800, peak speedup climbs to 4.11× at P = 12. The problem size quadrupled; the serial </a:t>
+            </a:r>
+            <a:r>
+              <a:rPr lang="en-US" sz="1200" b="0" kern="1200" dirty="0" err="1">
+                <a:solidFill>
+                  <a:schemeClr val="tx1"/>
+                </a:solidFill>
+                <a:effectLst/>
+                <a:latin typeface="+mn-lt"/>
+                <a:ea typeface="+mn-ea"/>
+                <a:cs typeface="+mn-cs"/>
+              </a:rPr>
+              <a:t>Allgatherv</a:t>
+            </a:r>
+            <a:r>
+              <a:rPr lang="en-US" sz="1200" b="0" kern="1200" dirty="0">
+                <a:solidFill>
+                  <a:schemeClr val="tx1"/>
+                </a:solidFill>
+                <a:effectLst/>
+                <a:latin typeface="+mn-lt"/>
+                <a:ea typeface="+mn-ea"/>
+                <a:cs typeface="+mn-cs"/>
+              </a:rPr>
+              <a:t> cost only doubled. That improved ratio shows up directly in the curve — it scales further before flattening.</a:t>
+            </a:r>
+          </a:p>
+          <a:p>
+            <a:br>
+              <a:rPr lang="en-US" sz="1200" b="0" kern="1200" dirty="0">
+                <a:solidFill>
+                  <a:schemeClr val="tx1"/>
+                </a:solidFill>
+                <a:effectLst/>
+                <a:latin typeface="+mn-lt"/>
+                <a:ea typeface="+mn-ea"/>
+                <a:cs typeface="+mn-cs"/>
+              </a:rPr>
+            </a:br>
+            <a:endParaRPr lang="en-US" sz="1200" b="0" kern="1200" dirty="0">
+              <a:solidFill>
+                <a:schemeClr val="tx1"/>
+              </a:solidFill>
+              <a:effectLst/>
+              <a:latin typeface="+mn-lt"/>
+              <a:ea typeface="+mn-ea"/>
+              <a:cs typeface="+mn-cs"/>
+            </a:endParaRPr>
+          </a:p>
+          <a:p>
+            <a:r>
+              <a:rPr lang="en-US" sz="1200" b="0" kern="1200" dirty="0">
+                <a:solidFill>
+                  <a:schemeClr val="tx1"/>
+                </a:solidFill>
+                <a:effectLst/>
+                <a:latin typeface="+mn-lt"/>
+                <a:ea typeface="+mn-ea"/>
+                <a:cs typeface="+mn-cs"/>
+              </a:rPr>
+              <a:t>At N = 9,600, we hit 6.57× at P = 12. Largest N, best efficiency — every doubling of N improves the compute-to-communication ratio because compute grows as O(N²) while communication grows as O(N).</a:t>
+            </a:r>
+          </a:p>
+          <a:p>
+            <a:br>
+              <a:rPr lang="en-US" sz="1200" b="0" kern="1200" dirty="0">
+                <a:solidFill>
+                  <a:schemeClr val="tx1"/>
+                </a:solidFill>
+                <a:effectLst/>
+                <a:latin typeface="+mn-lt"/>
+                <a:ea typeface="+mn-ea"/>
+                <a:cs typeface="+mn-cs"/>
+              </a:rPr>
+            </a:br>
+            <a:endParaRPr lang="en-US" sz="1200" b="0" kern="1200" dirty="0">
+              <a:solidFill>
+                <a:schemeClr val="tx1"/>
+              </a:solidFill>
+              <a:effectLst/>
+              <a:latin typeface="+mn-lt"/>
+              <a:ea typeface="+mn-ea"/>
+              <a:cs typeface="+mn-cs"/>
+            </a:endParaRPr>
+          </a:p>
+          <a:p>
+            <a:r>
+              <a:rPr lang="en-US" sz="1200" b="0" kern="1200" dirty="0">
+                <a:solidFill>
+                  <a:schemeClr val="tx1"/>
+                </a:solidFill>
+                <a:effectLst/>
+                <a:latin typeface="+mn-lt"/>
+                <a:ea typeface="+mn-ea"/>
+                <a:cs typeface="+mn-cs"/>
+              </a:rPr>
+              <a:t>All three curves flatten somewhere around P = 10 to 12 and don't meaningfully improve after that. That plateau is the signal that communication overhead has become the dominant cost. Adding more processes beyond that point splits the force computation into smaller pieces, but the synchronization cost per step stays roughly constant — so we get diminishing returns, fast.</a:t>
+            </a:r>
           </a:p>
         </p:txBody>
       </p:sp>
@@ -2793,10 +3103,149 @@
           <a:lstStyle/>
           <a:p>
             <a:r>
-              <a:rPr lang="en-US" dirty="0"/>
-              <a:t/>
-            </a:r>
-            <a:endParaRPr lang="en-US" dirty="0"/>
+              <a:rPr lang="en-US" sz="1200" b="0" kern="1200" dirty="0">
+                <a:solidFill>
+                  <a:schemeClr val="tx1"/>
+                </a:solidFill>
+                <a:effectLst/>
+                <a:latin typeface="+mn-lt"/>
+                <a:ea typeface="+mn-ea"/>
+                <a:cs typeface="+mn-cs"/>
+              </a:rPr>
+              <a:t>The weak scaling story requires a bit of framing before you look at the data. Unlike an embarrassingly parallel problem where ideal weak scaling gives constant time, the all-pairs N-body algorithm is O(N²). Fixing N/P = 1,000 means total N grows linearly with P, but total work grows as N² — so each process's local force evaluation still grows as O(N) even at constant per-process particle count. The expected behavior is linear growth in wall time, not constant. I've plotted the O(P) theoretical baseline on the figure.</a:t>
+            </a:r>
+          </a:p>
+          <a:p>
+            <a:br>
+              <a:rPr lang="en-US" sz="1200" b="0" kern="1200" dirty="0">
+                <a:solidFill>
+                  <a:schemeClr val="tx1"/>
+                </a:solidFill>
+                <a:effectLst/>
+                <a:latin typeface="+mn-lt"/>
+                <a:ea typeface="+mn-ea"/>
+                <a:cs typeface="+mn-cs"/>
+              </a:rPr>
+            </a:br>
+            <a:endParaRPr lang="en-US" sz="1200" b="0" kern="1200" dirty="0">
+              <a:solidFill>
+                <a:schemeClr val="tx1"/>
+              </a:solidFill>
+              <a:effectLst/>
+              <a:latin typeface="+mn-lt"/>
+              <a:ea typeface="+mn-ea"/>
+              <a:cs typeface="+mn-cs"/>
+            </a:endParaRPr>
+          </a:p>
+          <a:p>
+            <a:r>
+              <a:rPr lang="en-US" sz="1200" b="0" kern="1200" dirty="0">
+                <a:solidFill>
+                  <a:schemeClr val="tx1"/>
+                </a:solidFill>
+                <a:effectLst/>
+                <a:latin typeface="+mn-lt"/>
+                <a:ea typeface="+mn-ea"/>
+                <a:cs typeface="+mn-cs"/>
+              </a:rPr>
+              <a:t>The measured curve tracks reasonably close to that O(P) baseline — which is actually the correct result for this algorithm. The interesting deviations are the anomalies.</a:t>
+            </a:r>
+          </a:p>
+          <a:p>
+            <a:br>
+              <a:rPr lang="en-US" sz="1200" b="0" kern="1200" dirty="0">
+                <a:solidFill>
+                  <a:schemeClr val="tx1"/>
+                </a:solidFill>
+                <a:effectLst/>
+                <a:latin typeface="+mn-lt"/>
+                <a:ea typeface="+mn-ea"/>
+                <a:cs typeface="+mn-cs"/>
+              </a:rPr>
+            </a:br>
+            <a:endParaRPr lang="en-US" sz="1200" b="0" kern="1200" dirty="0">
+              <a:solidFill>
+                <a:schemeClr val="tx1"/>
+              </a:solidFill>
+              <a:effectLst/>
+              <a:latin typeface="+mn-lt"/>
+              <a:ea typeface="+mn-ea"/>
+              <a:cs typeface="+mn-cs"/>
+            </a:endParaRPr>
+          </a:p>
+          <a:p>
+            <a:r>
+              <a:rPr lang="en-US" sz="1200" b="0" kern="1200" dirty="0">
+                <a:solidFill>
+                  <a:schemeClr val="tx1"/>
+                </a:solidFill>
+                <a:effectLst/>
+                <a:latin typeface="+mn-lt"/>
+                <a:ea typeface="+mn-ea"/>
+                <a:cs typeface="+mn-cs"/>
+              </a:rPr>
+              <a:t>The P = 16 spike is the sharpest feature in the dataset: wall time jumps from about 1.0 seconds at P = 15 to 1.70 seconds at P = 16, then drops back to 1.13 seconds at P = 17. That spike aligns precisely with when the SLURM job first spans all three nodes. At P = 16, the </a:t>
+            </a:r>
+            <a:r>
+              <a:rPr lang="en-US" sz="1200" b="0" kern="1200" dirty="0" err="1">
+                <a:solidFill>
+                  <a:schemeClr val="tx1"/>
+                </a:solidFill>
+                <a:effectLst/>
+                <a:latin typeface="+mn-lt"/>
+                <a:ea typeface="+mn-ea"/>
+                <a:cs typeface="+mn-cs"/>
+              </a:rPr>
+              <a:t>Allgatherv</a:t>
+            </a:r>
+            <a:r>
+              <a:rPr lang="en-US" sz="1200" b="0" kern="1200" dirty="0">
+                <a:solidFill>
+                  <a:schemeClr val="tx1"/>
+                </a:solidFill>
+                <a:effectLst/>
+                <a:latin typeface="+mn-lt"/>
+                <a:ea typeface="+mn-ea"/>
+                <a:cs typeface="+mn-cs"/>
+              </a:rPr>
+              <a:t> broadcast crosses two inter-node TCP links simultaneously; the buffer saturation doubles effective latency. At P = 17, SLURM rebalances the process layout and the bottleneck partially resolves.</a:t>
+            </a:r>
+          </a:p>
+          <a:p>
+            <a:br>
+              <a:rPr lang="en-US" sz="1200" b="0" kern="1200" dirty="0">
+                <a:solidFill>
+                  <a:schemeClr val="tx1"/>
+                </a:solidFill>
+                <a:effectLst/>
+                <a:latin typeface="+mn-lt"/>
+                <a:ea typeface="+mn-ea"/>
+                <a:cs typeface="+mn-cs"/>
+              </a:rPr>
+            </a:br>
+            <a:endParaRPr lang="en-US" sz="1200" b="0" kern="1200" dirty="0">
+              <a:solidFill>
+                <a:schemeClr val="tx1"/>
+              </a:solidFill>
+              <a:effectLst/>
+              <a:latin typeface="+mn-lt"/>
+              <a:ea typeface="+mn-ea"/>
+              <a:cs typeface="+mn-cs"/>
+            </a:endParaRPr>
+          </a:p>
+          <a:p>
+            <a:r>
+              <a:rPr lang="en-US" sz="1200" b="0" kern="1200" dirty="0">
+                <a:solidFill>
+                  <a:schemeClr val="tx1"/>
+                </a:solidFill>
+                <a:effectLst/>
+                <a:latin typeface="+mn-lt"/>
+                <a:ea typeface="+mn-ea"/>
+                <a:cs typeface="+mn-cs"/>
+              </a:rPr>
+              <a:t>The P = 11 dip is the opposite effect — SLURM packing ranks within a single socket reduces NUMA cross-traffic, temporarily improving latency. It disappears at P = 12 when ranks spill across sockets.</a:t>
+            </a:r>
           </a:p>
         </p:txBody>
       </p:sp>
@@ -2881,10 +3330,149 @@
           <a:lstStyle/>
           <a:p>
             <a:r>
-              <a:rPr lang="en-US" dirty="0"/>
-              <a:t/>
-            </a:r>
-            <a:endParaRPr lang="en-US" dirty="0"/>
+              <a:rPr lang="en-US" sz="1200" b="0" kern="1200" dirty="0">
+                <a:solidFill>
+                  <a:schemeClr val="tx1"/>
+                </a:solidFill>
+                <a:effectLst/>
+                <a:latin typeface="+mn-lt"/>
+                <a:ea typeface="+mn-ea"/>
+                <a:cs typeface="+mn-cs"/>
+              </a:rPr>
+              <a:t>The Amdahl's law analysis puts a number on what the scaling curves are showing qualitatively.</a:t>
+            </a:r>
+          </a:p>
+          <a:p>
+            <a:br>
+              <a:rPr lang="en-US" sz="1200" b="0" kern="1200" dirty="0">
+                <a:solidFill>
+                  <a:schemeClr val="tx1"/>
+                </a:solidFill>
+                <a:effectLst/>
+                <a:latin typeface="+mn-lt"/>
+                <a:ea typeface="+mn-ea"/>
+                <a:cs typeface="+mn-cs"/>
+              </a:rPr>
+            </a:br>
+            <a:endParaRPr lang="en-US" sz="1200" b="0" kern="1200" dirty="0">
+              <a:solidFill>
+                <a:schemeClr val="tx1"/>
+              </a:solidFill>
+              <a:effectLst/>
+              <a:latin typeface="+mn-lt"/>
+              <a:ea typeface="+mn-ea"/>
+              <a:cs typeface="+mn-cs"/>
+            </a:endParaRPr>
+          </a:p>
+          <a:p>
+            <a:r>
+              <a:rPr lang="en-US" sz="1200" b="0" kern="1200" dirty="0">
+                <a:solidFill>
+                  <a:schemeClr val="tx1"/>
+                </a:solidFill>
+                <a:effectLst/>
+                <a:latin typeface="+mn-lt"/>
+                <a:ea typeface="+mn-ea"/>
+                <a:cs typeface="+mn-cs"/>
+              </a:rPr>
+              <a:t>I fit S(P) = 1 / (f + (1 − f)/P) to each strong scaling curve using a linearized least-squares method. The extracted serial fractions are 68% for N = 2,400, 28% for N = 4,800, and 15% for N = 9,600.</a:t>
+            </a:r>
+          </a:p>
+          <a:p>
+            <a:br>
+              <a:rPr lang="en-US" sz="1200" b="0" kern="1200" dirty="0">
+                <a:solidFill>
+                  <a:schemeClr val="tx1"/>
+                </a:solidFill>
+                <a:effectLst/>
+                <a:latin typeface="+mn-lt"/>
+                <a:ea typeface="+mn-ea"/>
+                <a:cs typeface="+mn-cs"/>
+              </a:rPr>
+            </a:br>
+            <a:endParaRPr lang="en-US" sz="1200" b="0" kern="1200" dirty="0">
+              <a:solidFill>
+                <a:schemeClr val="tx1"/>
+              </a:solidFill>
+              <a:effectLst/>
+              <a:latin typeface="+mn-lt"/>
+              <a:ea typeface="+mn-ea"/>
+              <a:cs typeface="+mn-cs"/>
+            </a:endParaRPr>
+          </a:p>
+          <a:p>
+            <a:r>
+              <a:rPr lang="en-US" sz="1200" b="0" kern="1200" dirty="0">
+                <a:solidFill>
+                  <a:schemeClr val="tx1"/>
+                </a:solidFill>
+                <a:effectLst/>
+                <a:latin typeface="+mn-lt"/>
+                <a:ea typeface="+mn-ea"/>
+                <a:cs typeface="+mn-cs"/>
+              </a:rPr>
+              <a:t>Those numbers might seem large, but they make complete physical sense. The "serial fraction" in this context isn't code that runs on one process — it's the fraction of per-step time consumed by the collective communication that every process must wait on before proceeding. Three `</a:t>
+            </a:r>
+            <a:r>
+              <a:rPr lang="en-US" sz="1200" b="0" kern="1200" dirty="0" err="1">
+                <a:solidFill>
+                  <a:schemeClr val="tx1"/>
+                </a:solidFill>
+                <a:effectLst/>
+                <a:latin typeface="+mn-lt"/>
+                <a:ea typeface="+mn-ea"/>
+                <a:cs typeface="+mn-cs"/>
+              </a:rPr>
+              <a:t>Allgatherv</a:t>
+            </a:r>
+            <a:r>
+              <a:rPr lang="en-US" sz="1200" b="0" kern="1200" dirty="0">
+                <a:solidFill>
+                  <a:schemeClr val="tx1"/>
+                </a:solidFill>
+                <a:effectLst/>
+                <a:latin typeface="+mn-lt"/>
+                <a:ea typeface="+mn-ea"/>
+                <a:cs typeface="+mn-cs"/>
+              </a:rPr>
+              <a:t>` calls synchronize O(N) data regardless of P. The force computation scales as O(N²/P). As N grows, the O(N²/P) term in the denominator grows faster than the O(N) communication term — so the serial fraction, defined as the communication fraction, shrinks.</a:t>
+            </a:r>
+          </a:p>
+          <a:p>
+            <a:br>
+              <a:rPr lang="en-US" sz="1200" b="0" kern="1200" dirty="0">
+                <a:solidFill>
+                  <a:schemeClr val="tx1"/>
+                </a:solidFill>
+                <a:effectLst/>
+                <a:latin typeface="+mn-lt"/>
+                <a:ea typeface="+mn-ea"/>
+                <a:cs typeface="+mn-cs"/>
+              </a:rPr>
+            </a:br>
+            <a:endParaRPr lang="en-US" sz="1200" b="0" kern="1200" dirty="0">
+              <a:solidFill>
+                <a:schemeClr val="tx1"/>
+              </a:solidFill>
+              <a:effectLst/>
+              <a:latin typeface="+mn-lt"/>
+              <a:ea typeface="+mn-ea"/>
+              <a:cs typeface="+mn-cs"/>
+            </a:endParaRPr>
+          </a:p>
+          <a:p>
+            <a:r>
+              <a:rPr lang="en-US" sz="1200" b="0" kern="1200" dirty="0">
+                <a:solidFill>
+                  <a:schemeClr val="tx1"/>
+                </a:solidFill>
+                <a:effectLst/>
+                <a:latin typeface="+mn-lt"/>
+                <a:ea typeface="+mn-ea"/>
+                <a:cs typeface="+mn-cs"/>
+              </a:rPr>
+              <a:t>The theoretical maxima follow directly: 1.5× for N = 2,400, 3.6× for N = 4,800, 6.7× for N = 9,600. The actual observed peaks of 1.92×, 4.11×, and 6.57× match or slightly exceed those bounds — the fit isn't perfect, but the trend is exact. Larger N always reduces the serial fraction and pushes the ceiling higher.</a:t>
+            </a:r>
           </a:p>
         </p:txBody>
       </p:sp>
@@ -2969,10 +3557,281 @@
           <a:lstStyle/>
           <a:p>
             <a:r>
-              <a:rPr lang="en-US" dirty="0"/>
-              <a:t/>
-            </a:r>
-            <a:endParaRPr lang="en-US" dirty="0"/>
+              <a:rPr lang="en-US" sz="1200" b="0" kern="1200" dirty="0">
+                <a:solidFill>
+                  <a:schemeClr val="tx1"/>
+                </a:solidFill>
+                <a:effectLst/>
+                <a:latin typeface="+mn-lt"/>
+                <a:ea typeface="+mn-ea"/>
+                <a:cs typeface="+mn-cs"/>
+              </a:rPr>
+              <a:t>Four takeaways.</a:t>
+            </a:r>
+          </a:p>
+          <a:p>
+            <a:br>
+              <a:rPr lang="en-US" sz="1200" b="0" kern="1200" dirty="0">
+                <a:solidFill>
+                  <a:schemeClr val="tx1"/>
+                </a:solidFill>
+                <a:effectLst/>
+                <a:latin typeface="+mn-lt"/>
+                <a:ea typeface="+mn-ea"/>
+                <a:cs typeface="+mn-cs"/>
+              </a:rPr>
+            </a:br>
+            <a:endParaRPr lang="en-US" sz="1200" b="0" kern="1200" dirty="0">
+              <a:solidFill>
+                <a:schemeClr val="tx1"/>
+              </a:solidFill>
+              <a:effectLst/>
+              <a:latin typeface="+mn-lt"/>
+              <a:ea typeface="+mn-ea"/>
+              <a:cs typeface="+mn-cs"/>
+            </a:endParaRPr>
+          </a:p>
+          <a:p>
+            <a:r>
+              <a:rPr lang="en-US" sz="1200" b="0" kern="1200" dirty="0">
+                <a:solidFill>
+                  <a:schemeClr val="tx1"/>
+                </a:solidFill>
+                <a:effectLst/>
+                <a:latin typeface="+mn-lt"/>
+                <a:ea typeface="+mn-ea"/>
+                <a:cs typeface="+mn-cs"/>
+              </a:rPr>
+              <a:t>Strong scaling saturates at P ≈ 12 for all problem sizes. The larger N is, the better the peak speedup before saturation — 6.57× at N = 9,600 versus 1.92× at N = 2,400.</a:t>
+            </a:r>
+          </a:p>
+          <a:p>
+            <a:br>
+              <a:rPr lang="en-US" sz="1200" b="0" kern="1200" dirty="0">
+                <a:solidFill>
+                  <a:schemeClr val="tx1"/>
+                </a:solidFill>
+                <a:effectLst/>
+                <a:latin typeface="+mn-lt"/>
+                <a:ea typeface="+mn-ea"/>
+                <a:cs typeface="+mn-cs"/>
+              </a:rPr>
+            </a:br>
+            <a:endParaRPr lang="en-US" sz="1200" b="0" kern="1200" dirty="0">
+              <a:solidFill>
+                <a:schemeClr val="tx1"/>
+              </a:solidFill>
+              <a:effectLst/>
+              <a:latin typeface="+mn-lt"/>
+              <a:ea typeface="+mn-ea"/>
+              <a:cs typeface="+mn-cs"/>
+            </a:endParaRPr>
+          </a:p>
+          <a:p>
+            <a:r>
+              <a:rPr lang="en-US" sz="1200" b="0" kern="1200" dirty="0">
+                <a:solidFill>
+                  <a:schemeClr val="tx1"/>
+                </a:solidFill>
+                <a:effectLst/>
+                <a:latin typeface="+mn-lt"/>
+                <a:ea typeface="+mn-ea"/>
+                <a:cs typeface="+mn-cs"/>
+              </a:rPr>
+              <a:t>Weak scaling grows super-linearly with P, which is the expected behavior for an O(N²) algorithm, not a failure of the implementation.</a:t>
+            </a:r>
+          </a:p>
+          <a:p>
+            <a:br>
+              <a:rPr lang="en-US" sz="1200" b="0" kern="1200" dirty="0">
+                <a:solidFill>
+                  <a:schemeClr val="tx1"/>
+                </a:solidFill>
+                <a:effectLst/>
+                <a:latin typeface="+mn-lt"/>
+                <a:ea typeface="+mn-ea"/>
+                <a:cs typeface="+mn-cs"/>
+              </a:rPr>
+            </a:br>
+            <a:endParaRPr lang="en-US" sz="1200" b="0" kern="1200" dirty="0">
+              <a:solidFill>
+                <a:schemeClr val="tx1"/>
+              </a:solidFill>
+              <a:effectLst/>
+              <a:latin typeface="+mn-lt"/>
+              <a:ea typeface="+mn-ea"/>
+              <a:cs typeface="+mn-cs"/>
+            </a:endParaRPr>
+          </a:p>
+          <a:p>
+            <a:r>
+              <a:rPr lang="en-US" sz="1200" b="0" kern="1200" dirty="0">
+                <a:solidFill>
+                  <a:schemeClr val="tx1"/>
+                </a:solidFill>
+                <a:effectLst/>
+                <a:latin typeface="+mn-lt"/>
+                <a:ea typeface="+mn-ea"/>
+                <a:cs typeface="+mn-cs"/>
+              </a:rPr>
+              <a:t>Amdahl's law serial fraction drops from 68% to 15% as N quadruples — direct evidence that the three-</a:t>
+            </a:r>
+            <a:r>
+              <a:rPr lang="en-US" sz="1200" b="0" kern="1200" dirty="0" err="1">
+                <a:solidFill>
+                  <a:schemeClr val="tx1"/>
+                </a:solidFill>
+                <a:effectLst/>
+                <a:latin typeface="+mn-lt"/>
+                <a:ea typeface="+mn-ea"/>
+                <a:cs typeface="+mn-cs"/>
+              </a:rPr>
+              <a:t>Allgatherv</a:t>
+            </a:r>
+            <a:r>
+              <a:rPr lang="en-US" sz="1200" b="0" kern="1200" dirty="0">
+                <a:solidFill>
+                  <a:schemeClr val="tx1"/>
+                </a:solidFill>
+                <a:effectLst/>
+                <a:latin typeface="+mn-lt"/>
+                <a:ea typeface="+mn-ea"/>
+                <a:cs typeface="+mn-cs"/>
+              </a:rPr>
+              <a:t> communication cost is being amortized over more compute work.</a:t>
+            </a:r>
+          </a:p>
+          <a:p>
+            <a:br>
+              <a:rPr lang="en-US" sz="1200" b="0" kern="1200" dirty="0">
+                <a:solidFill>
+                  <a:schemeClr val="tx1"/>
+                </a:solidFill>
+                <a:effectLst/>
+                <a:latin typeface="+mn-lt"/>
+                <a:ea typeface="+mn-ea"/>
+                <a:cs typeface="+mn-cs"/>
+              </a:rPr>
+            </a:br>
+            <a:endParaRPr lang="en-US" sz="1200" b="0" kern="1200" dirty="0">
+              <a:solidFill>
+                <a:schemeClr val="tx1"/>
+              </a:solidFill>
+              <a:effectLst/>
+              <a:latin typeface="+mn-lt"/>
+              <a:ea typeface="+mn-ea"/>
+              <a:cs typeface="+mn-cs"/>
+            </a:endParaRPr>
+          </a:p>
+          <a:p>
+            <a:r>
+              <a:rPr lang="en-US" sz="1200" b="0" kern="1200" dirty="0">
+                <a:solidFill>
+                  <a:schemeClr val="tx1"/>
+                </a:solidFill>
+                <a:effectLst/>
+                <a:latin typeface="+mn-lt"/>
+                <a:ea typeface="+mn-ea"/>
+                <a:cs typeface="+mn-cs"/>
+              </a:rPr>
+              <a:t>The P = 16 anomaly is real and reproducible: TCP buffer saturation at the full three-node boundary, not an algorithmic issue.</a:t>
+            </a:r>
+          </a:p>
+          <a:p>
+            <a:br>
+              <a:rPr lang="en-US" sz="1200" b="0" kern="1200" dirty="0">
+                <a:solidFill>
+                  <a:schemeClr val="tx1"/>
+                </a:solidFill>
+                <a:effectLst/>
+                <a:latin typeface="+mn-lt"/>
+                <a:ea typeface="+mn-ea"/>
+                <a:cs typeface="+mn-cs"/>
+              </a:rPr>
+            </a:br>
+            <a:endParaRPr lang="en-US" sz="1200" b="0" kern="1200" dirty="0">
+              <a:solidFill>
+                <a:schemeClr val="tx1"/>
+              </a:solidFill>
+              <a:effectLst/>
+              <a:latin typeface="+mn-lt"/>
+              <a:ea typeface="+mn-ea"/>
+              <a:cs typeface="+mn-cs"/>
+            </a:endParaRPr>
+          </a:p>
+          <a:p>
+            <a:r>
+              <a:rPr lang="en-US" sz="1200" b="0" kern="1200" dirty="0">
+                <a:solidFill>
+                  <a:schemeClr val="tx1"/>
+                </a:solidFill>
+                <a:effectLst/>
+                <a:latin typeface="+mn-lt"/>
+                <a:ea typeface="+mn-ea"/>
+                <a:cs typeface="+mn-cs"/>
+              </a:rPr>
+              <a:t>The natural next step is replacing the three </a:t>
+            </a:r>
+            <a:r>
+              <a:rPr lang="en-US" sz="1200" b="0" kern="1200" dirty="0" err="1">
+                <a:solidFill>
+                  <a:schemeClr val="tx1"/>
+                </a:solidFill>
+                <a:effectLst/>
+                <a:latin typeface="+mn-lt"/>
+                <a:ea typeface="+mn-ea"/>
+                <a:cs typeface="+mn-cs"/>
+              </a:rPr>
+              <a:t>Allgatherv</a:t>
+            </a:r>
+            <a:r>
+              <a:rPr lang="en-US" sz="1200" b="0" kern="1200" dirty="0">
+                <a:solidFill>
+                  <a:schemeClr val="tx1"/>
+                </a:solidFill>
+                <a:effectLst/>
+                <a:latin typeface="+mn-lt"/>
+                <a:ea typeface="+mn-ea"/>
+                <a:cs typeface="+mn-cs"/>
+              </a:rPr>
+              <a:t> calls with a ring-pass ghost exchange. That would cut per-step communication from O(N) — broadcasting all positions to everyone — down to O(N/P), where each rank only needs positions from its immediate neighbors in the ring. That single change would push the compute-to-communication ratio substantially higher and should unlock meaningful speedup beyond P = 12.</a:t>
+            </a:r>
+          </a:p>
+          <a:p>
+            <a:br>
+              <a:rPr lang="en-US" sz="1200" b="0" kern="1200" dirty="0">
+                <a:solidFill>
+                  <a:schemeClr val="tx1"/>
+                </a:solidFill>
+                <a:effectLst/>
+                <a:latin typeface="+mn-lt"/>
+                <a:ea typeface="+mn-ea"/>
+                <a:cs typeface="+mn-cs"/>
+              </a:rPr>
+            </a:br>
+            <a:endParaRPr lang="en-US" sz="1200" b="0" kern="1200" dirty="0">
+              <a:solidFill>
+                <a:schemeClr val="tx1"/>
+              </a:solidFill>
+              <a:effectLst/>
+              <a:latin typeface="+mn-lt"/>
+              <a:ea typeface="+mn-ea"/>
+              <a:cs typeface="+mn-cs"/>
+            </a:endParaRPr>
+          </a:p>
+          <a:p>
+            <a:r>
+              <a:rPr lang="en-US" sz="1200" b="0" kern="1200" dirty="0">
+                <a:solidFill>
+                  <a:schemeClr val="tx1"/>
+                </a:solidFill>
+                <a:effectLst/>
+                <a:latin typeface="+mn-lt"/>
+                <a:ea typeface="+mn-ea"/>
+                <a:cs typeface="+mn-cs"/>
+              </a:rPr>
+              <a:t>Thanks — I'm happy to take questions.</a:t>
+            </a:r>
           </a:p>
         </p:txBody>
       </p:sp>
@@ -3045,6 +3904,11 @@
 <file path=ppt/slideMasters/slideMaster1.xml><?xml version="1.0" encoding="utf-8"?>
 <p:sldMaster xmlns:a="http://schemas.openxmlformats.org/drawingml/2006/main" xmlns:r="http://schemas.openxmlformats.org/officeDocument/2006/relationships" xmlns:p="http://schemas.openxmlformats.org/presentationml/2006/main">
   <p:cSld>
+    <p:bg>
+      <p:bgRef idx="1001">
+        <a:schemeClr val="bg1"/>
+      </p:bgRef>
+    </p:bg>
     <p:spTree>
       <p:nvGrpSpPr>
         <p:cNvPr id="1" name=""/>
@@ -3327,6 +4191,7 @@
         <a:solidFill>
           <a:srgbClr val="0D1B2A"/>
         </a:solidFill>
+        <a:effectLst/>
       </p:bgPr>
     </p:bg>
     <p:spTree>
@@ -3367,6 +4232,13 @@
             <a:prstDash val="solid"/>
           </a:ln>
         </p:spPr>
+        <p:txBody>
+          <a:bodyPr/>
+          <a:lstStyle/>
+          <a:p>
+            <a:endParaRPr lang="en-US"/>
+          </a:p>
+        </p:txBody>
       </p:sp>
       <p:sp>
         <p:nvSpPr>
@@ -3392,6 +4264,13 @@
             <a:prstDash val="solid"/>
           </a:ln>
         </p:spPr>
+        <p:txBody>
+          <a:bodyPr/>
+          <a:lstStyle/>
+          <a:p>
+            <a:endParaRPr lang="en-US"/>
+          </a:p>
+        </p:txBody>
       </p:sp>
       <p:sp>
         <p:nvSpPr>
@@ -3417,6 +4296,13 @@
             <a:prstDash val="solid"/>
           </a:ln>
         </p:spPr>
+        <p:txBody>
+          <a:bodyPr/>
+          <a:lstStyle/>
+          <a:p>
+            <a:endParaRPr lang="en-US"/>
+          </a:p>
+        </p:txBody>
       </p:sp>
       <p:sp>
         <p:nvSpPr>
@@ -3442,6 +4328,13 @@
             <a:prstDash val="solid"/>
           </a:ln>
         </p:spPr>
+        <p:txBody>
+          <a:bodyPr/>
+          <a:lstStyle/>
+          <a:p>
+            <a:endParaRPr lang="en-US"/>
+          </a:p>
+        </p:txBody>
       </p:sp>
       <p:sp>
         <p:nvSpPr>
@@ -3467,6 +4360,13 @@
             <a:prstDash val="solid"/>
           </a:ln>
         </p:spPr>
+        <p:txBody>
+          <a:bodyPr/>
+          <a:lstStyle/>
+          <a:p>
+            <a:endParaRPr lang="en-US"/>
+          </a:p>
+        </p:txBody>
       </p:sp>
       <p:sp>
         <p:nvSpPr>
@@ -3492,6 +4392,13 @@
             <a:prstDash val="solid"/>
           </a:ln>
         </p:spPr>
+        <p:txBody>
+          <a:bodyPr/>
+          <a:lstStyle/>
+          <a:p>
+            <a:endParaRPr lang="en-US"/>
+          </a:p>
+        </p:txBody>
       </p:sp>
       <p:sp>
         <p:nvSpPr>
@@ -3517,6 +4424,13 @@
             <a:prstDash val="solid"/>
           </a:ln>
         </p:spPr>
+        <p:txBody>
+          <a:bodyPr/>
+          <a:lstStyle/>
+          <a:p>
+            <a:endParaRPr lang="en-US"/>
+          </a:p>
+        </p:txBody>
       </p:sp>
       <p:sp>
         <p:nvSpPr>
@@ -3542,6 +4456,13 @@
             <a:prstDash val="solid"/>
           </a:ln>
         </p:spPr>
+        <p:txBody>
+          <a:bodyPr/>
+          <a:lstStyle/>
+          <a:p>
+            <a:endParaRPr lang="en-US"/>
+          </a:p>
+        </p:txBody>
       </p:sp>
       <p:sp>
         <p:nvSpPr>
@@ -3567,6 +4488,13 @@
             <a:prstDash val="solid"/>
           </a:ln>
         </p:spPr>
+        <p:txBody>
+          <a:bodyPr/>
+          <a:lstStyle/>
+          <a:p>
+            <a:endParaRPr lang="en-US"/>
+          </a:p>
+        </p:txBody>
       </p:sp>
       <p:sp>
         <p:nvSpPr>
@@ -3592,6 +4520,13 @@
             <a:prstDash val="solid"/>
           </a:ln>
         </p:spPr>
+        <p:txBody>
+          <a:bodyPr/>
+          <a:lstStyle/>
+          <a:p>
+            <a:endParaRPr lang="en-US"/>
+          </a:p>
+        </p:txBody>
       </p:sp>
       <p:sp>
         <p:nvSpPr>
@@ -3617,6 +4552,13 @@
             <a:prstDash val="solid"/>
           </a:ln>
         </p:spPr>
+        <p:txBody>
+          <a:bodyPr/>
+          <a:lstStyle/>
+          <a:p>
+            <a:endParaRPr lang="en-US"/>
+          </a:p>
+        </p:txBody>
       </p:sp>
       <p:sp>
         <p:nvSpPr>
@@ -3642,6 +4584,13 @@
             <a:prstDash val="solid"/>
           </a:ln>
         </p:spPr>
+        <p:txBody>
+          <a:bodyPr/>
+          <a:lstStyle/>
+          <a:p>
+            <a:endParaRPr lang="en-US"/>
+          </a:p>
+        </p:txBody>
       </p:sp>
       <p:sp>
         <p:nvSpPr>
@@ -3667,6 +4616,13 @@
             <a:prstDash val="solid"/>
           </a:ln>
         </p:spPr>
+        <p:txBody>
+          <a:bodyPr/>
+          <a:lstStyle/>
+          <a:p>
+            <a:endParaRPr lang="en-US"/>
+          </a:p>
+        </p:txBody>
       </p:sp>
       <p:sp>
         <p:nvSpPr>
@@ -3692,6 +4648,13 @@
             <a:prstDash val="solid"/>
           </a:ln>
         </p:spPr>
+        <p:txBody>
+          <a:bodyPr/>
+          <a:lstStyle/>
+          <a:p>
+            <a:endParaRPr lang="en-US"/>
+          </a:p>
+        </p:txBody>
       </p:sp>
       <p:sp>
         <p:nvSpPr>
@@ -3717,6 +4680,13 @@
             <a:prstDash val="solid"/>
           </a:ln>
         </p:spPr>
+        <p:txBody>
+          <a:bodyPr/>
+          <a:lstStyle/>
+          <a:p>
+            <a:endParaRPr lang="en-US"/>
+          </a:p>
+        </p:txBody>
       </p:sp>
       <p:sp>
         <p:nvSpPr>
@@ -3742,6 +4712,13 @@
             <a:prstDash val="solid"/>
           </a:ln>
         </p:spPr>
+        <p:txBody>
+          <a:bodyPr/>
+          <a:lstStyle/>
+          <a:p>
+            <a:endParaRPr lang="en-US"/>
+          </a:p>
+        </p:txBody>
       </p:sp>
       <p:sp>
         <p:nvSpPr>
@@ -3767,6 +4744,13 @@
             <a:prstDash val="solid"/>
           </a:ln>
         </p:spPr>
+        <p:txBody>
+          <a:bodyPr/>
+          <a:lstStyle/>
+          <a:p>
+            <a:endParaRPr lang="en-US"/>
+          </a:p>
+        </p:txBody>
       </p:sp>
       <p:sp>
         <p:nvSpPr>
@@ -3789,6 +4773,13 @@
             <a:prstDash val="dash"/>
           </a:ln>
         </p:spPr>
+        <p:txBody>
+          <a:bodyPr/>
+          <a:lstStyle/>
+          <a:p>
+            <a:endParaRPr lang="en-US"/>
+          </a:p>
+        </p:txBody>
       </p:sp>
       <p:sp>
         <p:nvSpPr>
@@ -3814,6 +4805,13 @@
             <a:prstDash val="solid"/>
           </a:ln>
         </p:spPr>
+        <p:txBody>
+          <a:bodyPr/>
+          <a:lstStyle/>
+          <a:p>
+            <a:endParaRPr lang="en-US"/>
+          </a:p>
+        </p:txBody>
       </p:sp>
       <p:sp>
         <p:nvSpPr>
@@ -3839,6 +4837,13 @@
             <a:prstDash val="solid"/>
           </a:ln>
         </p:spPr>
+        <p:txBody>
+          <a:bodyPr/>
+          <a:lstStyle/>
+          <a:p>
+            <a:endParaRPr lang="en-US"/>
+          </a:p>
+        </p:txBody>
       </p:sp>
       <p:sp>
         <p:nvSpPr>
@@ -3861,7 +4866,7 @@
           <a:bodyPr wrap="square" lIns="0" tIns="0" rIns="0" bIns="0" rtlCol="0" anchor="ctr"/>
           <a:lstStyle/>
           <a:p>
-            <a:pPr algn="l" indent="0" marL="0">
+            <a:pPr marL="0" indent="0" algn="l">
               <a:buNone/>
             </a:pPr>
             <a:r>
@@ -3900,7 +4905,7 @@
           <a:bodyPr wrap="square" lIns="0" tIns="0" rIns="0" bIns="0" rtlCol="0" anchor="ctr"/>
           <a:lstStyle/>
           <a:p>
-            <a:pPr algn="l" indent="0" marL="0">
+            <a:pPr marL="0" indent="0" algn="l">
               <a:buNone/>
             </a:pPr>
             <a:r>
@@ -3942,6 +4947,13 @@
             <a:prstDash val="solid"/>
           </a:ln>
         </p:spPr>
+        <p:txBody>
+          <a:bodyPr/>
+          <a:lstStyle/>
+          <a:p>
+            <a:endParaRPr lang="en-US"/>
+          </a:p>
+        </p:txBody>
       </p:sp>
       <p:sp>
         <p:nvSpPr>
@@ -3964,7 +4976,7 @@
           <a:bodyPr wrap="square" rtlCol="0" anchor="ctr"/>
           <a:lstStyle/>
           <a:p>
-            <a:pPr algn="l" indent="0" marL="0">
+            <a:pPr marL="0" indent="0" algn="l">
               <a:lnSpc>
                 <a:spcPct val="130000"/>
               </a:lnSpc>
@@ -3984,7 +4996,7 @@
             <a:endParaRPr lang="en-US" sz="1400" dirty="0"/>
           </a:p>
           <a:p>
-            <a:pPr algn="l" indent="0" marL="0">
+            <a:pPr marL="0" indent="0" algn="l">
               <a:lnSpc>
                 <a:spcPct val="130000"/>
               </a:lnSpc>
@@ -4005,7 +5017,7 @@
             <a:endParaRPr lang="en-US" sz="1400" dirty="0"/>
           </a:p>
           <a:p>
-            <a:pPr algn="l" indent="0" marL="0">
+            <a:pPr marL="0" indent="0" algn="l">
               <a:lnSpc>
                 <a:spcPct val="130000"/>
               </a:lnSpc>
@@ -4052,6 +5064,13 @@
             <a:prstDash val="solid"/>
           </a:ln>
         </p:spPr>
+        <p:txBody>
+          <a:bodyPr/>
+          <a:lstStyle/>
+          <a:p>
+            <a:endParaRPr lang="en-US"/>
+          </a:p>
+        </p:txBody>
       </p:sp>
       <p:sp>
         <p:nvSpPr>
@@ -4074,7 +5093,7 @@
           <a:bodyPr wrap="square" rtlCol="0" anchor="ctr"/>
           <a:lstStyle/>
           <a:p>
-            <a:pPr algn="ctr" indent="0" marL="0">
+            <a:pPr marL="0" indent="0" algn="ctr">
               <a:buNone/>
             </a:pPr>
             <a:r>
@@ -4118,6 +5137,13 @@
             <a:prstDash val="solid"/>
           </a:ln>
         </p:spPr>
+        <p:txBody>
+          <a:bodyPr/>
+          <a:lstStyle/>
+          <a:p>
+            <a:endParaRPr lang="en-US"/>
+          </a:p>
+        </p:txBody>
       </p:sp>
       <p:sp>
         <p:nvSpPr>
@@ -4140,7 +5166,7 @@
           <a:bodyPr wrap="square" rtlCol="0" anchor="ctr"/>
           <a:lstStyle/>
           <a:p>
-            <a:pPr algn="ctr" indent="0" marL="0">
+            <a:pPr marL="0" indent="0" algn="ctr">
               <a:buNone/>
             </a:pPr>
             <a:r>
@@ -4184,6 +5210,13 @@
             <a:prstDash val="solid"/>
           </a:ln>
         </p:spPr>
+        <p:txBody>
+          <a:bodyPr/>
+          <a:lstStyle/>
+          <a:p>
+            <a:endParaRPr lang="en-US"/>
+          </a:p>
+        </p:txBody>
       </p:sp>
       <p:sp>
         <p:nvSpPr>
@@ -4206,7 +5239,7 @@
           <a:bodyPr wrap="square" rtlCol="0" anchor="ctr"/>
           <a:lstStyle/>
           <a:p>
-            <a:pPr algn="ctr" indent="0" marL="0">
+            <a:pPr marL="0" indent="0" algn="ctr">
               <a:buNone/>
             </a:pPr>
             <a:r>
@@ -4250,6 +5283,13 @@
             <a:prstDash val="solid"/>
           </a:ln>
         </p:spPr>
+        <p:txBody>
+          <a:bodyPr/>
+          <a:lstStyle/>
+          <a:p>
+            <a:endParaRPr lang="en-US"/>
+          </a:p>
+        </p:txBody>
       </p:sp>
       <p:sp>
         <p:nvSpPr>
@@ -4272,7 +5312,7 @@
           <a:bodyPr wrap="square" rtlCol="0" anchor="ctr"/>
           <a:lstStyle/>
           <a:p>
-            <a:pPr algn="ctr" indent="0" marL="0">
+            <a:pPr marL="0" indent="0" algn="ctr">
               <a:buNone/>
             </a:pPr>
             <a:r>
@@ -4316,6 +5356,13 @@
             <a:prstDash val="solid"/>
           </a:ln>
         </p:spPr>
+        <p:txBody>
+          <a:bodyPr/>
+          <a:lstStyle/>
+          <a:p>
+            <a:endParaRPr lang="en-US"/>
+          </a:p>
+        </p:txBody>
       </p:sp>
       <p:sp>
         <p:nvSpPr>
@@ -4338,7 +5385,7 @@
           <a:bodyPr wrap="square" rtlCol="0" anchor="ctr"/>
           <a:lstStyle/>
           <a:p>
-            <a:pPr algn="ctr" indent="0" marL="0">
+            <a:pPr marL="0" indent="0" algn="ctr">
               <a:buNone/>
             </a:pPr>
             <a:r>
@@ -4357,6 +5404,11 @@
         </p:txBody>
       </p:sp>
     </p:spTree>
+    <p:extLst>
+      <p:ext uri="{BB962C8B-B14F-4D97-AF65-F5344CB8AC3E}">
+        <p14:creationId xmlns:p14="http://schemas.microsoft.com/office/powerpoint/2010/main" val="1048751694"/>
+      </p:ext>
+    </p:extLst>
   </p:cSld>
   <p:clrMapOvr>
     <a:masterClrMapping/>
@@ -4372,6 +5424,7 @@
         <a:solidFill>
           <a:srgbClr val="FFFFFF"/>
         </a:solidFill>
+        <a:effectLst/>
       </p:bgPr>
     </p:bg>
     <p:spTree>
@@ -4412,6 +5465,13 @@
             <a:prstDash val="solid"/>
           </a:ln>
         </p:spPr>
+        <p:txBody>
+          <a:bodyPr/>
+          <a:lstStyle/>
+          <a:p>
+            <a:endParaRPr lang="en-US"/>
+          </a:p>
+        </p:txBody>
       </p:sp>
       <p:sp>
         <p:nvSpPr>
@@ -4434,11 +5494,11 @@
           <a:bodyPr wrap="square" rtlCol="0" anchor="ctr"/>
           <a:lstStyle/>
           <a:p>
-            <a:pPr algn="l" indent="0" marL="0">
+            <a:pPr marL="0" indent="0" algn="l">
               <a:buNone/>
             </a:pPr>
             <a:r>
-              <a:rPr lang="en-US" sz="1300" b="1" spc="400" kern="0" dirty="0">
+              <a:rPr lang="en-US" sz="1300" b="1" kern="0" spc="400" dirty="0">
                 <a:solidFill>
                   <a:srgbClr val="4CC9F0"/>
                 </a:solidFill>
@@ -4473,7 +5533,7 @@
           <a:bodyPr wrap="square" lIns="0" tIns="0" rIns="0" bIns="0" rtlCol="0" anchor="ctr"/>
           <a:lstStyle/>
           <a:p>
-            <a:pPr algn="l" indent="0" marL="0">
+            <a:pPr marL="0" indent="0" algn="l">
               <a:buNone/>
             </a:pPr>
             <a:r>
@@ -4515,13 +5575,20 @@
             <a:prstDash val="solid"/>
           </a:ln>
           <a:effectLst>
-            <a:outerShdw sx="100000" sy="100000" kx="0" ky="0" algn="bl" rotWithShape="0" blurRad="101600" dist="38100" dir="8100000">
+            <a:outerShdw blurRad="101600" dist="38100" dir="8100000" algn="bl" rotWithShape="0">
               <a:srgbClr val="000000">
                 <a:alpha val="10000"/>
               </a:srgbClr>
             </a:outerShdw>
           </a:effectLst>
         </p:spPr>
+        <p:txBody>
+          <a:bodyPr/>
+          <a:lstStyle/>
+          <a:p>
+            <a:endParaRPr lang="en-US"/>
+          </a:p>
+        </p:txBody>
       </p:sp>
       <p:sp>
         <p:nvSpPr>
@@ -4547,6 +5614,13 @@
             <a:prstDash val="solid"/>
           </a:ln>
         </p:spPr>
+        <p:txBody>
+          <a:bodyPr/>
+          <a:lstStyle/>
+          <a:p>
+            <a:endParaRPr lang="en-US"/>
+          </a:p>
+        </p:txBody>
       </p:sp>
       <p:sp>
         <p:nvSpPr>
@@ -4569,7 +5643,7 @@
           <a:bodyPr wrap="square" lIns="0" tIns="0" rIns="0" bIns="0" rtlCol="0" anchor="ctr"/>
           <a:lstStyle/>
           <a:p>
-            <a:pPr algn="l" indent="0" marL="0">
+            <a:pPr marL="0" indent="0" algn="l">
               <a:buNone/>
             </a:pPr>
             <a:r>
@@ -4608,7 +5682,7 @@
           <a:bodyPr wrap="square" lIns="0" tIns="0" rIns="0" bIns="0" rtlCol="0" anchor="ctr"/>
           <a:lstStyle/>
           <a:p>
-            <a:pPr algn="l" indent="0" marL="0">
+            <a:pPr marL="0" indent="0" algn="l">
               <a:buNone/>
             </a:pPr>
             <a:r>
@@ -4650,13 +5724,20 @@
             <a:prstDash val="solid"/>
           </a:ln>
           <a:effectLst>
-            <a:outerShdw sx="100000" sy="100000" kx="0" ky="0" algn="bl" rotWithShape="0" blurRad="101600" dist="38100" dir="8100000">
+            <a:outerShdw blurRad="101600" dist="38100" dir="8100000" algn="bl" rotWithShape="0">
               <a:srgbClr val="000000">
                 <a:alpha val="10000"/>
               </a:srgbClr>
             </a:outerShdw>
           </a:effectLst>
         </p:spPr>
+        <p:txBody>
+          <a:bodyPr/>
+          <a:lstStyle/>
+          <a:p>
+            <a:endParaRPr lang="en-US"/>
+          </a:p>
+        </p:txBody>
       </p:sp>
       <p:sp>
         <p:nvSpPr>
@@ -4682,6 +5763,13 @@
             <a:prstDash val="solid"/>
           </a:ln>
         </p:spPr>
+        <p:txBody>
+          <a:bodyPr/>
+          <a:lstStyle/>
+          <a:p>
+            <a:endParaRPr lang="en-US"/>
+          </a:p>
+        </p:txBody>
       </p:sp>
       <p:sp>
         <p:nvSpPr>
@@ -4704,7 +5792,7 @@
           <a:bodyPr wrap="square" lIns="0" tIns="0" rIns="0" bIns="0" rtlCol="0" anchor="ctr"/>
           <a:lstStyle/>
           <a:p>
-            <a:pPr algn="l" indent="0" marL="0">
+            <a:pPr marL="0" indent="0" algn="l">
               <a:buNone/>
             </a:pPr>
             <a:r>
@@ -4743,7 +5831,7 @@
           <a:bodyPr wrap="square" lIns="0" tIns="0" rIns="0" bIns="0" rtlCol="0" anchor="ctr"/>
           <a:lstStyle/>
           <a:p>
-            <a:pPr algn="l" indent="0" marL="0">
+            <a:pPr marL="0" indent="0" algn="l">
               <a:buNone/>
             </a:pPr>
             <a:r>
@@ -4785,13 +5873,20 @@
             <a:prstDash val="solid"/>
           </a:ln>
           <a:effectLst>
-            <a:outerShdw sx="100000" sy="100000" kx="0" ky="0" algn="bl" rotWithShape="0" blurRad="101600" dist="38100" dir="8100000">
+            <a:outerShdw blurRad="101600" dist="38100" dir="8100000" algn="bl" rotWithShape="0">
               <a:srgbClr val="000000">
                 <a:alpha val="10000"/>
               </a:srgbClr>
             </a:outerShdw>
           </a:effectLst>
         </p:spPr>
+        <p:txBody>
+          <a:bodyPr/>
+          <a:lstStyle/>
+          <a:p>
+            <a:endParaRPr lang="en-US"/>
+          </a:p>
+        </p:txBody>
       </p:sp>
       <p:sp>
         <p:nvSpPr>
@@ -4817,6 +5912,13 @@
             <a:prstDash val="solid"/>
           </a:ln>
         </p:spPr>
+        <p:txBody>
+          <a:bodyPr/>
+          <a:lstStyle/>
+          <a:p>
+            <a:endParaRPr lang="en-US"/>
+          </a:p>
+        </p:txBody>
       </p:sp>
       <p:sp>
         <p:nvSpPr>
@@ -4839,7 +5941,7 @@
           <a:bodyPr wrap="square" lIns="0" tIns="0" rIns="0" bIns="0" rtlCol="0" anchor="ctr"/>
           <a:lstStyle/>
           <a:p>
-            <a:pPr algn="l" indent="0" marL="0">
+            <a:pPr marL="0" indent="0" algn="l">
               <a:buNone/>
             </a:pPr>
             <a:r>
@@ -4878,7 +5980,7 @@
           <a:bodyPr wrap="square" lIns="0" tIns="0" rIns="0" bIns="0" rtlCol="0" anchor="ctr"/>
           <a:lstStyle/>
           <a:p>
-            <a:pPr algn="l" indent="0" marL="0">
+            <a:pPr marL="0" indent="0" algn="l">
               <a:buNone/>
             </a:pPr>
             <a:r>
@@ -4920,13 +6022,20 @@
             <a:prstDash val="solid"/>
           </a:ln>
           <a:effectLst>
-            <a:outerShdw sx="100000" sy="100000" kx="0" ky="0" algn="bl" rotWithShape="0" blurRad="101600" dist="38100" dir="8100000">
+            <a:outerShdw blurRad="101600" dist="38100" dir="8100000" algn="bl" rotWithShape="0">
               <a:srgbClr val="000000">
                 <a:alpha val="10000"/>
               </a:srgbClr>
             </a:outerShdw>
           </a:effectLst>
         </p:spPr>
+        <p:txBody>
+          <a:bodyPr/>
+          <a:lstStyle/>
+          <a:p>
+            <a:endParaRPr lang="en-US"/>
+          </a:p>
+        </p:txBody>
       </p:sp>
       <p:sp>
         <p:nvSpPr>
@@ -4949,7 +6058,7 @@
           <a:bodyPr wrap="square" rtlCol="0" anchor="ctr"/>
           <a:lstStyle/>
           <a:p>
-            <a:pPr algn="ctr" indent="0" marL="0">
+            <a:pPr marL="0" indent="0" algn="ctr">
               <a:buNone/>
             </a:pPr>
             <a:r>
@@ -4988,7 +6097,7 @@
           <a:bodyPr wrap="square" rtlCol="0" anchor="ctr"/>
           <a:lstStyle/>
           <a:p>
-            <a:pPr algn="ctr" indent="0" marL="0">
+            <a:pPr marL="0" indent="0" algn="ctr">
               <a:buNone/>
             </a:pPr>
             <a:r>
@@ -5027,7 +6136,7 @@
           <a:bodyPr wrap="square" rtlCol="0" anchor="ctr"/>
           <a:lstStyle/>
           <a:p>
-            <a:pPr algn="ctr" indent="0" marL="0">
+            <a:pPr marL="0" indent="0" algn="ctr">
               <a:buNone/>
             </a:pPr>
             <a:r>
@@ -5066,7 +6175,7 @@
           <a:bodyPr wrap="square" rtlCol="0" anchor="ctr"/>
           <a:lstStyle/>
           <a:p>
-            <a:pPr algn="ctr" indent="0" marL="0">
+            <a:pPr marL="0" indent="0" algn="ctr">
               <a:buNone/>
             </a:pPr>
             <a:r>
@@ -5105,7 +6214,7 @@
           <a:bodyPr wrap="square" rtlCol="0" anchor="ctr"/>
           <a:lstStyle/>
           <a:p>
-            <a:pPr algn="ctr" indent="0" marL="0">
+            <a:pPr marL="0" indent="0" algn="ctr">
               <a:buNone/>
             </a:pPr>
             <a:r>
@@ -5147,13 +6256,20 @@
             <a:prstDash val="solid"/>
           </a:ln>
           <a:effectLst>
-            <a:outerShdw sx="100000" sy="100000" kx="0" ky="0" algn="bl" rotWithShape="0" blurRad="101600" dist="38100" dir="8100000">
+            <a:outerShdw blurRad="101600" dist="38100" dir="8100000" algn="bl" rotWithShape="0">
               <a:srgbClr val="000000">
                 <a:alpha val="10000"/>
               </a:srgbClr>
             </a:outerShdw>
           </a:effectLst>
         </p:spPr>
+        <p:txBody>
+          <a:bodyPr/>
+          <a:lstStyle/>
+          <a:p>
+            <a:endParaRPr lang="en-US"/>
+          </a:p>
+        </p:txBody>
       </p:sp>
       <p:sp>
         <p:nvSpPr>
@@ -5176,7 +6292,7 @@
           <a:bodyPr wrap="square" rtlCol="0" anchor="ctr"/>
           <a:lstStyle/>
           <a:p>
-            <a:pPr algn="ctr" indent="0" marL="0">
+            <a:pPr marL="0" indent="0" algn="ctr">
               <a:buNone/>
             </a:pPr>
             <a:r>
@@ -5215,7 +6331,7 @@
           <a:bodyPr wrap="square" rtlCol="0" anchor="ctr"/>
           <a:lstStyle/>
           <a:p>
-            <a:pPr algn="ctr" indent="0" marL="0">
+            <a:pPr marL="0" indent="0" algn="ctr">
               <a:buNone/>
             </a:pPr>
             <a:r>
@@ -5257,13 +6373,20 @@
             <a:prstDash val="solid"/>
           </a:ln>
           <a:effectLst>
-            <a:outerShdw sx="100000" sy="100000" kx="0" ky="0" algn="bl" rotWithShape="0" blurRad="101600" dist="38100" dir="8100000">
+            <a:outerShdw blurRad="101600" dist="38100" dir="8100000" algn="bl" rotWithShape="0">
               <a:srgbClr val="000000">
                 <a:alpha val="10000"/>
               </a:srgbClr>
             </a:outerShdw>
           </a:effectLst>
         </p:spPr>
+        <p:txBody>
+          <a:bodyPr/>
+          <a:lstStyle/>
+          <a:p>
+            <a:endParaRPr lang="en-US"/>
+          </a:p>
+        </p:txBody>
       </p:sp>
       <p:sp>
         <p:nvSpPr>
@@ -5286,7 +6409,7 @@
           <a:bodyPr wrap="square" rtlCol="0" anchor="ctr"/>
           <a:lstStyle/>
           <a:p>
-            <a:pPr algn="ctr" indent="0" marL="0">
+            <a:pPr marL="0" indent="0" algn="ctr">
               <a:buNone/>
             </a:pPr>
             <a:r>
@@ -5325,7 +6448,7 @@
           <a:bodyPr wrap="square" rtlCol="0" anchor="ctr"/>
           <a:lstStyle/>
           <a:p>
-            <a:pPr algn="ctr" indent="0" marL="0">
+            <a:pPr marL="0" indent="0" algn="ctr">
               <a:buNone/>
             </a:pPr>
             <a:r>
@@ -5367,13 +6490,20 @@
             <a:prstDash val="solid"/>
           </a:ln>
           <a:effectLst>
-            <a:outerShdw sx="100000" sy="100000" kx="0" ky="0" algn="bl" rotWithShape="0" blurRad="101600" dist="38100" dir="8100000">
+            <a:outerShdw blurRad="101600" dist="38100" dir="8100000" algn="bl" rotWithShape="0">
               <a:srgbClr val="000000">
                 <a:alpha val="10000"/>
               </a:srgbClr>
             </a:outerShdw>
           </a:effectLst>
         </p:spPr>
+        <p:txBody>
+          <a:bodyPr/>
+          <a:lstStyle/>
+          <a:p>
+            <a:endParaRPr lang="en-US"/>
+          </a:p>
+        </p:txBody>
       </p:sp>
       <p:sp>
         <p:nvSpPr>
@@ -5396,7 +6526,7 @@
           <a:bodyPr wrap="square" rtlCol="0" anchor="ctr"/>
           <a:lstStyle/>
           <a:p>
-            <a:pPr algn="ctr" indent="0" marL="0">
+            <a:pPr marL="0" indent="0" algn="ctr">
               <a:buNone/>
             </a:pPr>
             <a:r>
@@ -5435,7 +6565,7 @@
           <a:bodyPr wrap="square" rtlCol="0" anchor="ctr"/>
           <a:lstStyle/>
           <a:p>
-            <a:pPr algn="ctr" indent="0" marL="0">
+            <a:pPr marL="0" indent="0" algn="ctr">
               <a:buNone/>
             </a:pPr>
             <a:r>
@@ -5454,6 +6584,11 @@
         </p:txBody>
       </p:sp>
     </p:spTree>
+    <p:extLst>
+      <p:ext uri="{BB962C8B-B14F-4D97-AF65-F5344CB8AC3E}">
+        <p14:creationId xmlns:p14="http://schemas.microsoft.com/office/powerpoint/2010/main" val="3808228704"/>
+      </p:ext>
+    </p:extLst>
   </p:cSld>
   <p:clrMapOvr>
     <a:masterClrMapping/>
@@ -5469,6 +6604,7 @@
         <a:solidFill>
           <a:srgbClr val="FFFFFF"/>
         </a:solidFill>
+        <a:effectLst/>
       </p:bgPr>
     </p:bg>
     <p:spTree>
@@ -5509,6 +6645,13 @@
             <a:prstDash val="solid"/>
           </a:ln>
         </p:spPr>
+        <p:txBody>
+          <a:bodyPr/>
+          <a:lstStyle/>
+          <a:p>
+            <a:endParaRPr lang="en-US"/>
+          </a:p>
+        </p:txBody>
       </p:sp>
       <p:sp>
         <p:nvSpPr>
@@ -5531,11 +6674,11 @@
           <a:bodyPr wrap="square" rtlCol="0" anchor="ctr"/>
           <a:lstStyle/>
           <a:p>
-            <a:pPr indent="0" marL="0">
+            <a:pPr marL="0" indent="0">
               <a:buNone/>
             </a:pPr>
             <a:r>
-              <a:rPr lang="en-US" sz="1300" b="1" spc="400" kern="0" dirty="0">
+              <a:rPr lang="en-US" sz="1300" b="1" kern="0" spc="400" dirty="0">
                 <a:solidFill>
                   <a:srgbClr val="4CC9F0"/>
                 </a:solidFill>
@@ -5570,7 +6713,7 @@
           <a:bodyPr wrap="square" lIns="0" tIns="0" rIns="0" bIns="0" rtlCol="0" anchor="ctr"/>
           <a:lstStyle/>
           <a:p>
-            <a:pPr algn="l" indent="0" marL="0">
+            <a:pPr marL="0" indent="0" algn="l">
               <a:buNone/>
             </a:pPr>
             <a:r>
@@ -5609,7 +6752,7 @@
           <a:bodyPr wrap="square" lIns="0" tIns="0" rIns="0" bIns="0" rtlCol="0" anchor="ctr"/>
           <a:lstStyle/>
           <a:p>
-            <a:pPr indent="0" marL="0">
+            <a:pPr marL="0" indent="0">
               <a:buNone/>
             </a:pPr>
             <a:r>
@@ -5651,6 +6794,13 @@
             <a:prstDash val="solid"/>
           </a:ln>
         </p:spPr>
+        <p:txBody>
+          <a:bodyPr/>
+          <a:lstStyle/>
+          <a:p>
+            <a:endParaRPr lang="en-US"/>
+          </a:p>
+        </p:txBody>
       </p:sp>
       <p:sp>
         <p:nvSpPr>
@@ -5673,7 +6823,7 @@
           <a:bodyPr wrap="square" rtlCol="0" anchor="ctr"/>
           <a:lstStyle/>
           <a:p>
-            <a:pPr algn="ctr" indent="0" marL="0">
+            <a:pPr marL="0" indent="0" algn="ctr">
               <a:buNone/>
             </a:pPr>
             <a:r>
@@ -5712,7 +6862,7 @@
           <a:bodyPr wrap="square" lIns="0" tIns="0" rIns="0" bIns="0" rtlCol="0" anchor="ctr"/>
           <a:lstStyle/>
           <a:p>
-            <a:pPr algn="l" indent="0" marL="0">
+            <a:pPr marL="0" indent="0" algn="l">
               <a:buNone/>
             </a:pPr>
             <a:r>
@@ -5751,7 +6901,7 @@
           <a:bodyPr wrap="square" lIns="0" tIns="0" rIns="0" bIns="0" rtlCol="0" anchor="ctr"/>
           <a:lstStyle/>
           <a:p>
-            <a:pPr algn="l" indent="0" marL="0">
+            <a:pPr marL="0" indent="0" algn="l">
               <a:buNone/>
             </a:pPr>
             <a:r>
@@ -5791,6 +6941,13 @@
             <a:prstDash val="solid"/>
           </a:ln>
         </p:spPr>
+        <p:txBody>
+          <a:bodyPr/>
+          <a:lstStyle/>
+          <a:p>
+            <a:endParaRPr lang="en-US"/>
+          </a:p>
+        </p:txBody>
       </p:sp>
       <p:sp>
         <p:nvSpPr>
@@ -5816,6 +6973,13 @@
             <a:prstDash val="solid"/>
           </a:ln>
         </p:spPr>
+        <p:txBody>
+          <a:bodyPr/>
+          <a:lstStyle/>
+          <a:p>
+            <a:endParaRPr lang="en-US"/>
+          </a:p>
+        </p:txBody>
       </p:sp>
       <p:sp>
         <p:nvSpPr>
@@ -5838,7 +7002,7 @@
           <a:bodyPr wrap="square" rtlCol="0" anchor="ctr"/>
           <a:lstStyle/>
           <a:p>
-            <a:pPr algn="ctr" indent="0" marL="0">
+            <a:pPr marL="0" indent="0" algn="ctr">
               <a:buNone/>
             </a:pPr>
             <a:r>
@@ -5877,7 +7041,7 @@
           <a:bodyPr wrap="square" lIns="0" tIns="0" rIns="0" bIns="0" rtlCol="0" anchor="ctr"/>
           <a:lstStyle/>
           <a:p>
-            <a:pPr algn="l" indent="0" marL="0">
+            <a:pPr marL="0" indent="0" algn="l">
               <a:buNone/>
             </a:pPr>
             <a:r>
@@ -5916,7 +7080,7 @@
           <a:bodyPr wrap="square" lIns="0" tIns="0" rIns="0" bIns="0" rtlCol="0" anchor="ctr"/>
           <a:lstStyle/>
           <a:p>
-            <a:pPr algn="l" indent="0" marL="0">
+            <a:pPr marL="0" indent="0" algn="l">
               <a:buNone/>
             </a:pPr>
             <a:r>
@@ -5956,6 +7120,13 @@
             <a:prstDash val="solid"/>
           </a:ln>
         </p:spPr>
+        <p:txBody>
+          <a:bodyPr/>
+          <a:lstStyle/>
+          <a:p>
+            <a:endParaRPr lang="en-US"/>
+          </a:p>
+        </p:txBody>
       </p:sp>
       <p:sp>
         <p:nvSpPr>
@@ -5981,6 +7152,13 @@
             <a:prstDash val="solid"/>
           </a:ln>
         </p:spPr>
+        <p:txBody>
+          <a:bodyPr/>
+          <a:lstStyle/>
+          <a:p>
+            <a:endParaRPr lang="en-US"/>
+          </a:p>
+        </p:txBody>
       </p:sp>
       <p:sp>
         <p:nvSpPr>
@@ -6003,7 +7181,7 @@
           <a:bodyPr wrap="square" rtlCol="0" anchor="ctr"/>
           <a:lstStyle/>
           <a:p>
-            <a:pPr algn="ctr" indent="0" marL="0">
+            <a:pPr marL="0" indent="0" algn="ctr">
               <a:buNone/>
             </a:pPr>
             <a:r>
@@ -6042,7 +7220,7 @@
           <a:bodyPr wrap="square" lIns="0" tIns="0" rIns="0" bIns="0" rtlCol="0" anchor="ctr"/>
           <a:lstStyle/>
           <a:p>
-            <a:pPr algn="l" indent="0" marL="0">
+            <a:pPr marL="0" indent="0" algn="l">
               <a:buNone/>
             </a:pPr>
             <a:r>
@@ -6081,7 +7259,7 @@
           <a:bodyPr wrap="square" lIns="0" tIns="0" rIns="0" bIns="0" rtlCol="0" anchor="ctr"/>
           <a:lstStyle/>
           <a:p>
-            <a:pPr algn="l" indent="0" marL="0">
+            <a:pPr marL="0" indent="0" algn="l">
               <a:buNone/>
             </a:pPr>
             <a:r>
@@ -6121,6 +7299,13 @@
             <a:prstDash val="solid"/>
           </a:ln>
         </p:spPr>
+        <p:txBody>
+          <a:bodyPr/>
+          <a:lstStyle/>
+          <a:p>
+            <a:endParaRPr lang="en-US"/>
+          </a:p>
+        </p:txBody>
       </p:sp>
       <p:sp>
         <p:nvSpPr>
@@ -6146,6 +7331,13 @@
             <a:prstDash val="solid"/>
           </a:ln>
         </p:spPr>
+        <p:txBody>
+          <a:bodyPr/>
+          <a:lstStyle/>
+          <a:p>
+            <a:endParaRPr lang="en-US"/>
+          </a:p>
+        </p:txBody>
       </p:sp>
       <p:sp>
         <p:nvSpPr>
@@ -6168,7 +7360,7 @@
           <a:bodyPr wrap="square" rtlCol="0" anchor="ctr"/>
           <a:lstStyle/>
           <a:p>
-            <a:pPr algn="ctr" indent="0" marL="0">
+            <a:pPr marL="0" indent="0" algn="ctr">
               <a:buNone/>
             </a:pPr>
             <a:r>
@@ -6207,7 +7399,7 @@
           <a:bodyPr wrap="square" lIns="0" tIns="0" rIns="0" bIns="0" rtlCol="0" anchor="ctr"/>
           <a:lstStyle/>
           <a:p>
-            <a:pPr algn="l" indent="0" marL="0">
+            <a:pPr marL="0" indent="0" algn="l">
               <a:buNone/>
             </a:pPr>
             <a:r>
@@ -6246,7 +7438,7 @@
           <a:bodyPr wrap="square" lIns="0" tIns="0" rIns="0" bIns="0" rtlCol="0" anchor="ctr"/>
           <a:lstStyle/>
           <a:p>
-            <a:pPr algn="l" indent="0" marL="0">
+            <a:pPr marL="0" indent="0" algn="l">
               <a:buNone/>
             </a:pPr>
             <a:r>
@@ -6286,6 +7478,13 @@
             <a:prstDash val="solid"/>
           </a:ln>
         </p:spPr>
+        <p:txBody>
+          <a:bodyPr/>
+          <a:lstStyle/>
+          <a:p>
+            <a:endParaRPr lang="en-US"/>
+          </a:p>
+        </p:txBody>
       </p:sp>
       <p:sp>
         <p:nvSpPr>
@@ -6311,6 +7510,13 @@
             <a:prstDash val="solid"/>
           </a:ln>
         </p:spPr>
+        <p:txBody>
+          <a:bodyPr/>
+          <a:lstStyle/>
+          <a:p>
+            <a:endParaRPr lang="en-US"/>
+          </a:p>
+        </p:txBody>
       </p:sp>
       <p:sp>
         <p:nvSpPr>
@@ -6333,7 +7539,7 @@
           <a:bodyPr wrap="square" rtlCol="0" anchor="ctr"/>
           <a:lstStyle/>
           <a:p>
-            <a:pPr algn="ctr" indent="0" marL="0">
+            <a:pPr marL="0" indent="0" algn="ctr">
               <a:buNone/>
             </a:pPr>
             <a:r>
@@ -6372,7 +7578,7 @@
           <a:bodyPr wrap="square" lIns="0" tIns="0" rIns="0" bIns="0" rtlCol="0" anchor="ctr"/>
           <a:lstStyle/>
           <a:p>
-            <a:pPr algn="l" indent="0" marL="0">
+            <a:pPr marL="0" indent="0" algn="l">
               <a:buNone/>
             </a:pPr>
             <a:r>
@@ -6411,7 +7617,7 @@
           <a:bodyPr wrap="square" lIns="0" tIns="0" rIns="0" bIns="0" rtlCol="0" anchor="ctr"/>
           <a:lstStyle/>
           <a:p>
-            <a:pPr algn="l" indent="0" marL="0">
+            <a:pPr marL="0" indent="0" algn="l">
               <a:buNone/>
             </a:pPr>
             <a:r>
@@ -6450,7 +7656,7 @@
           <a:bodyPr wrap="square" lIns="0" tIns="0" rIns="0" bIns="0" rtlCol="0" anchor="ctr"/>
           <a:lstStyle/>
           <a:p>
-            <a:pPr indent="0" marL="0">
+            <a:pPr marL="0" indent="0">
               <a:buNone/>
             </a:pPr>
             <a:r>
@@ -6492,6 +7698,13 @@
             <a:prstDash val="solid"/>
           </a:ln>
         </p:spPr>
+        <p:txBody>
+          <a:bodyPr/>
+          <a:lstStyle/>
+          <a:p>
+            <a:endParaRPr lang="en-US"/>
+          </a:p>
+        </p:txBody>
       </p:sp>
       <p:sp>
         <p:nvSpPr>
@@ -6514,7 +7727,7 @@
           <a:bodyPr wrap="square" rtlCol="0" anchor="ctr"/>
           <a:lstStyle/>
           <a:p>
-            <a:pPr algn="ctr" indent="0" marL="0">
+            <a:pPr marL="0" indent="0" algn="ctr">
               <a:buNone/>
             </a:pPr>
             <a:r>
@@ -6556,6 +7769,13 @@
             <a:prstDash val="solid"/>
           </a:ln>
         </p:spPr>
+        <p:txBody>
+          <a:bodyPr/>
+          <a:lstStyle/>
+          <a:p>
+            <a:endParaRPr lang="en-US"/>
+          </a:p>
+        </p:txBody>
       </p:sp>
       <p:sp>
         <p:nvSpPr>
@@ -6578,7 +7798,7 @@
           <a:bodyPr wrap="square" rtlCol="0" anchor="ctr"/>
           <a:lstStyle/>
           <a:p>
-            <a:pPr algn="ctr" indent="0" marL="0">
+            <a:pPr marL="0" indent="0" algn="ctr">
               <a:buNone/>
             </a:pPr>
             <a:r>
@@ -6617,7 +7837,7 @@
           <a:bodyPr wrap="square" rtlCol="0" anchor="ctr"/>
           <a:lstStyle/>
           <a:p>
-            <a:pPr algn="l" indent="0" marL="0">
+            <a:pPr marL="0" indent="0" algn="l">
               <a:buNone/>
             </a:pPr>
             <a:r>
@@ -6659,6 +7879,13 @@
             <a:prstDash val="solid"/>
           </a:ln>
         </p:spPr>
+        <p:txBody>
+          <a:bodyPr/>
+          <a:lstStyle/>
+          <a:p>
+            <a:endParaRPr lang="en-US"/>
+          </a:p>
+        </p:txBody>
       </p:sp>
       <p:sp>
         <p:nvSpPr>
@@ -6681,7 +7908,7 @@
           <a:bodyPr wrap="square" rtlCol="0" anchor="ctr"/>
           <a:lstStyle/>
           <a:p>
-            <a:pPr algn="ctr" indent="0" marL="0">
+            <a:pPr marL="0" indent="0" algn="ctr">
               <a:buNone/>
             </a:pPr>
             <a:r>
@@ -6723,6 +7950,13 @@
             <a:prstDash val="solid"/>
           </a:ln>
         </p:spPr>
+        <p:txBody>
+          <a:bodyPr/>
+          <a:lstStyle/>
+          <a:p>
+            <a:endParaRPr lang="en-US"/>
+          </a:p>
+        </p:txBody>
       </p:sp>
       <p:sp>
         <p:nvSpPr>
@@ -6745,7 +7979,7 @@
           <a:bodyPr wrap="square" rtlCol="0" anchor="ctr"/>
           <a:lstStyle/>
           <a:p>
-            <a:pPr algn="ctr" indent="0" marL="0">
+            <a:pPr marL="0" indent="0" algn="ctr">
               <a:buNone/>
             </a:pPr>
             <a:r>
@@ -6784,7 +8018,7 @@
           <a:bodyPr wrap="square" rtlCol="0" anchor="ctr"/>
           <a:lstStyle/>
           <a:p>
-            <a:pPr algn="l" indent="0" marL="0">
+            <a:pPr marL="0" indent="0" algn="l">
               <a:buNone/>
             </a:pPr>
             <a:r>
@@ -6826,6 +8060,13 @@
             <a:prstDash val="solid"/>
           </a:ln>
         </p:spPr>
+        <p:txBody>
+          <a:bodyPr/>
+          <a:lstStyle/>
+          <a:p>
+            <a:endParaRPr lang="en-US"/>
+          </a:p>
+        </p:txBody>
       </p:sp>
       <p:sp>
         <p:nvSpPr>
@@ -6848,7 +8089,7 @@
           <a:bodyPr wrap="square" rtlCol="0" anchor="ctr"/>
           <a:lstStyle/>
           <a:p>
-            <a:pPr algn="ctr" indent="0" marL="0">
+            <a:pPr marL="0" indent="0" algn="ctr">
               <a:buNone/>
             </a:pPr>
             <a:r>
@@ -6890,6 +8131,13 @@
             <a:prstDash val="solid"/>
           </a:ln>
         </p:spPr>
+        <p:txBody>
+          <a:bodyPr/>
+          <a:lstStyle/>
+          <a:p>
+            <a:endParaRPr lang="en-US"/>
+          </a:p>
+        </p:txBody>
       </p:sp>
       <p:sp>
         <p:nvSpPr>
@@ -6912,7 +8160,7 @@
           <a:bodyPr wrap="square" rtlCol="0" anchor="ctr"/>
           <a:lstStyle/>
           <a:p>
-            <a:pPr algn="ctr" indent="0" marL="0">
+            <a:pPr marL="0" indent="0" algn="ctr">
               <a:buNone/>
             </a:pPr>
             <a:r>
@@ -6951,7 +8199,7 @@
           <a:bodyPr wrap="square" rtlCol="0" anchor="ctr"/>
           <a:lstStyle/>
           <a:p>
-            <a:pPr algn="l" indent="0" marL="0">
+            <a:pPr marL="0" indent="0" algn="l">
               <a:buNone/>
             </a:pPr>
             <a:r>
@@ -6993,6 +8241,13 @@
             <a:prstDash val="solid"/>
           </a:ln>
         </p:spPr>
+        <p:txBody>
+          <a:bodyPr/>
+          <a:lstStyle/>
+          <a:p>
+            <a:endParaRPr lang="en-US"/>
+          </a:p>
+        </p:txBody>
       </p:sp>
       <p:sp>
         <p:nvSpPr>
@@ -7015,7 +8270,7 @@
           <a:bodyPr wrap="square" rtlCol="0" anchor="ctr"/>
           <a:lstStyle/>
           <a:p>
-            <a:pPr algn="ctr" indent="0" marL="0">
+            <a:pPr marL="0" indent="0" algn="ctr">
               <a:buNone/>
             </a:pPr>
             <a:r>
@@ -7057,6 +8312,13 @@
             <a:prstDash val="solid"/>
           </a:ln>
         </p:spPr>
+        <p:txBody>
+          <a:bodyPr/>
+          <a:lstStyle/>
+          <a:p>
+            <a:endParaRPr lang="en-US"/>
+          </a:p>
+        </p:txBody>
       </p:sp>
       <p:sp>
         <p:nvSpPr>
@@ -7079,7 +8341,7 @@
           <a:bodyPr wrap="square" rtlCol="0" anchor="ctr"/>
           <a:lstStyle/>
           <a:p>
-            <a:pPr algn="ctr" indent="0" marL="0">
+            <a:pPr marL="0" indent="0" algn="ctr">
               <a:buNone/>
             </a:pPr>
             <a:r>
@@ -7118,7 +8380,7 @@
           <a:bodyPr wrap="square" rtlCol="0" anchor="ctr"/>
           <a:lstStyle/>
           <a:p>
-            <a:pPr algn="l" indent="0" marL="0">
+            <a:pPr marL="0" indent="0" algn="l">
               <a:buNone/>
             </a:pPr>
             <a:r>
@@ -7160,13 +8422,20 @@
             <a:prstDash val="solid"/>
           </a:ln>
           <a:effectLst>
-            <a:outerShdw sx="100000" sy="100000" kx="0" ky="0" algn="bl" rotWithShape="0" blurRad="101600" dist="38100" dir="8100000">
+            <a:outerShdw blurRad="101600" dist="38100" dir="8100000" algn="bl" rotWithShape="0">
               <a:srgbClr val="000000">
                 <a:alpha val="10000"/>
               </a:srgbClr>
             </a:outerShdw>
           </a:effectLst>
         </p:spPr>
+        <p:txBody>
+          <a:bodyPr/>
+          <a:lstStyle/>
+          <a:p>
+            <a:endParaRPr lang="en-US"/>
+          </a:p>
+        </p:txBody>
       </p:sp>
       <p:sp>
         <p:nvSpPr>
@@ -7189,7 +8458,7 @@
           <a:bodyPr wrap="square" rtlCol="0" anchor="ctr"/>
           <a:lstStyle/>
           <a:p>
-            <a:pPr algn="l" indent="0" marL="0">
+            <a:pPr marL="0" indent="0" algn="l">
               <a:buNone/>
             </a:pPr>
             <a:r>
@@ -7207,7 +8476,7 @@
             <a:endParaRPr lang="en-US" sz="1050" dirty="0"/>
           </a:p>
           <a:p>
-            <a:pPr algn="l" indent="0" marL="0">
+            <a:pPr marL="0" indent="0" algn="l">
               <a:buNone/>
             </a:pPr>
             <a:r>
@@ -7226,6 +8495,11 @@
         </p:txBody>
       </p:sp>
     </p:spTree>
+    <p:extLst>
+      <p:ext uri="{BB962C8B-B14F-4D97-AF65-F5344CB8AC3E}">
+        <p14:creationId xmlns:p14="http://schemas.microsoft.com/office/powerpoint/2010/main" val="1639565578"/>
+      </p:ext>
+    </p:extLst>
   </p:cSld>
   <p:clrMapOvr>
     <a:masterClrMapping/>
@@ -7241,6 +8515,7 @@
         <a:solidFill>
           <a:srgbClr val="FFFFFF"/>
         </a:solidFill>
+        <a:effectLst/>
       </p:bgPr>
     </p:bg>
     <p:spTree>
@@ -7281,6 +8556,13 @@
             <a:prstDash val="solid"/>
           </a:ln>
         </p:spPr>
+        <p:txBody>
+          <a:bodyPr/>
+          <a:lstStyle/>
+          <a:p>
+            <a:endParaRPr lang="en-US"/>
+          </a:p>
+        </p:txBody>
       </p:sp>
       <p:sp>
         <p:nvSpPr>
@@ -7303,11 +8585,11 @@
           <a:bodyPr wrap="square" rtlCol="0" anchor="ctr"/>
           <a:lstStyle/>
           <a:p>
-            <a:pPr indent="0" marL="0">
+            <a:pPr marL="0" indent="0">
               <a:buNone/>
             </a:pPr>
             <a:r>
-              <a:rPr lang="en-US" sz="1300" b="1" spc="400" kern="0" dirty="0">
+              <a:rPr lang="en-US" sz="1300" b="1" kern="0" spc="400" dirty="0">
                 <a:solidFill>
                   <a:srgbClr val="4CC9F0"/>
                 </a:solidFill>
@@ -7342,7 +8624,7 @@
           <a:bodyPr wrap="square" lIns="0" tIns="0" rIns="0" bIns="0" rtlCol="0" anchor="ctr"/>
           <a:lstStyle/>
           <a:p>
-            <a:pPr algn="l" indent="0" marL="0">
+            <a:pPr marL="0" indent="0" algn="l">
               <a:buNone/>
             </a:pPr>
             <a:r>
@@ -7384,13 +8666,20 @@
             <a:prstDash val="solid"/>
           </a:ln>
           <a:effectLst>
-            <a:outerShdw sx="100000" sy="100000" kx="0" ky="0" algn="bl" rotWithShape="0" blurRad="101600" dist="38100" dir="8100000">
+            <a:outerShdw blurRad="101600" dist="38100" dir="8100000" algn="bl" rotWithShape="0">
               <a:srgbClr val="000000">
                 <a:alpha val="10000"/>
               </a:srgbClr>
             </a:outerShdw>
           </a:effectLst>
         </p:spPr>
+        <p:txBody>
+          <a:bodyPr/>
+          <a:lstStyle/>
+          <a:p>
+            <a:endParaRPr lang="en-US"/>
+          </a:p>
+        </p:txBody>
       </p:sp>
       <p:sp>
         <p:nvSpPr>
@@ -7416,6 +8705,13 @@
             <a:prstDash val="solid"/>
           </a:ln>
         </p:spPr>
+        <p:txBody>
+          <a:bodyPr/>
+          <a:lstStyle/>
+          <a:p>
+            <a:endParaRPr lang="en-US"/>
+          </a:p>
+        </p:txBody>
       </p:sp>
       <p:sp>
         <p:nvSpPr>
@@ -7438,7 +8734,7 @@
           <a:bodyPr wrap="square" lIns="0" tIns="0" rIns="0" bIns="0" rtlCol="0" anchor="ctr"/>
           <a:lstStyle/>
           <a:p>
-            <a:pPr algn="l" indent="0" marL="0">
+            <a:pPr marL="0" indent="0" algn="l">
               <a:buNone/>
             </a:pPr>
             <a:r>
@@ -7477,7 +8773,7 @@
           <a:bodyPr wrap="square" lIns="0" tIns="0" rIns="0" bIns="0" rtlCol="0" anchor="ctr"/>
           <a:lstStyle/>
           <a:p>
-            <a:pPr algn="l" indent="0" marL="0">
+            <a:pPr marL="0" indent="0" algn="l">
               <a:buNone/>
             </a:pPr>
             <a:r>
@@ -7519,13 +8815,20 @@
             <a:prstDash val="solid"/>
           </a:ln>
           <a:effectLst>
-            <a:outerShdw sx="100000" sy="100000" kx="0" ky="0" algn="bl" rotWithShape="0" blurRad="101600" dist="38100" dir="8100000">
+            <a:outerShdw blurRad="101600" dist="38100" dir="8100000" algn="bl" rotWithShape="0">
               <a:srgbClr val="000000">
                 <a:alpha val="10000"/>
               </a:srgbClr>
             </a:outerShdw>
           </a:effectLst>
         </p:spPr>
+        <p:txBody>
+          <a:bodyPr/>
+          <a:lstStyle/>
+          <a:p>
+            <a:endParaRPr lang="en-US"/>
+          </a:p>
+        </p:txBody>
       </p:sp>
       <p:sp>
         <p:nvSpPr>
@@ -7551,6 +8854,13 @@
             <a:prstDash val="solid"/>
           </a:ln>
         </p:spPr>
+        <p:txBody>
+          <a:bodyPr/>
+          <a:lstStyle/>
+          <a:p>
+            <a:endParaRPr lang="en-US"/>
+          </a:p>
+        </p:txBody>
       </p:sp>
       <p:sp>
         <p:nvSpPr>
@@ -7573,7 +8883,7 @@
           <a:bodyPr wrap="square" lIns="0" tIns="0" rIns="0" bIns="0" rtlCol="0" anchor="ctr"/>
           <a:lstStyle/>
           <a:p>
-            <a:pPr algn="l" indent="0" marL="0">
+            <a:pPr marL="0" indent="0" algn="l">
               <a:buNone/>
             </a:pPr>
             <a:r>
@@ -7612,7 +8922,7 @@
           <a:bodyPr wrap="square" lIns="0" tIns="0" rIns="0" bIns="0" rtlCol="0" anchor="ctr"/>
           <a:lstStyle/>
           <a:p>
-            <a:pPr algn="l" indent="0" marL="0">
+            <a:pPr marL="0" indent="0" algn="l">
               <a:buNone/>
             </a:pPr>
             <a:r>
@@ -7654,13 +8964,20 @@
             <a:prstDash val="solid"/>
           </a:ln>
           <a:effectLst>
-            <a:outerShdw sx="100000" sy="100000" kx="0" ky="0" algn="bl" rotWithShape="0" blurRad="101600" dist="38100" dir="8100000">
+            <a:outerShdw blurRad="101600" dist="38100" dir="8100000" algn="bl" rotWithShape="0">
               <a:srgbClr val="000000">
                 <a:alpha val="10000"/>
               </a:srgbClr>
             </a:outerShdw>
           </a:effectLst>
         </p:spPr>
+        <p:txBody>
+          <a:bodyPr/>
+          <a:lstStyle/>
+          <a:p>
+            <a:endParaRPr lang="en-US"/>
+          </a:p>
+        </p:txBody>
       </p:sp>
       <p:sp>
         <p:nvSpPr>
@@ -7686,6 +9003,13 @@
             <a:prstDash val="solid"/>
           </a:ln>
         </p:spPr>
+        <p:txBody>
+          <a:bodyPr/>
+          <a:lstStyle/>
+          <a:p>
+            <a:endParaRPr lang="en-US"/>
+          </a:p>
+        </p:txBody>
       </p:sp>
       <p:sp>
         <p:nvSpPr>
@@ -7708,7 +9032,7 @@
           <a:bodyPr wrap="square" lIns="0" tIns="0" rIns="0" bIns="0" rtlCol="0" anchor="ctr"/>
           <a:lstStyle/>
           <a:p>
-            <a:pPr algn="l" indent="0" marL="0">
+            <a:pPr marL="0" indent="0" algn="l">
               <a:buNone/>
             </a:pPr>
             <a:r>
@@ -7747,7 +9071,7 @@
           <a:bodyPr wrap="square" lIns="0" tIns="0" rIns="0" bIns="0" rtlCol="0" anchor="ctr"/>
           <a:lstStyle/>
           <a:p>
-            <a:pPr algn="l" indent="0" marL="0">
+            <a:pPr marL="0" indent="0" algn="l">
               <a:buNone/>
             </a:pPr>
             <a:r>
@@ -7789,13 +9113,20 @@
             <a:prstDash val="solid"/>
           </a:ln>
           <a:effectLst>
-            <a:outerShdw sx="100000" sy="100000" kx="0" ky="0" algn="bl" rotWithShape="0" blurRad="101600" dist="38100" dir="8100000">
+            <a:outerShdw blurRad="101600" dist="38100" dir="8100000" algn="bl" rotWithShape="0">
               <a:srgbClr val="000000">
                 <a:alpha val="10000"/>
               </a:srgbClr>
             </a:outerShdw>
           </a:effectLst>
         </p:spPr>
+        <p:txBody>
+          <a:bodyPr/>
+          <a:lstStyle/>
+          <a:p>
+            <a:endParaRPr lang="en-US"/>
+          </a:p>
+        </p:txBody>
       </p:sp>
       <p:sp>
         <p:nvSpPr>
@@ -7821,6 +9152,13 @@
             <a:prstDash val="solid"/>
           </a:ln>
         </p:spPr>
+        <p:txBody>
+          <a:bodyPr/>
+          <a:lstStyle/>
+          <a:p>
+            <a:endParaRPr lang="en-US"/>
+          </a:p>
+        </p:txBody>
       </p:sp>
       <p:sp>
         <p:nvSpPr>
@@ -7843,7 +9181,7 @@
           <a:bodyPr wrap="square" lIns="0" tIns="0" rIns="0" bIns="0" rtlCol="0" anchor="ctr"/>
           <a:lstStyle/>
           <a:p>
-            <a:pPr algn="l" indent="0" marL="0">
+            <a:pPr marL="0" indent="0" algn="l">
               <a:buNone/>
             </a:pPr>
             <a:r>
@@ -7882,7 +9220,7 @@
           <a:bodyPr wrap="square" lIns="0" tIns="0" rIns="0" bIns="0" rtlCol="0" anchor="ctr"/>
           <a:lstStyle/>
           <a:p>
-            <a:pPr algn="l" indent="0" marL="0">
+            <a:pPr marL="0" indent="0" algn="l">
               <a:buNone/>
             </a:pPr>
             <a:r>
@@ -7924,13 +9262,20 @@
             <a:prstDash val="solid"/>
           </a:ln>
           <a:effectLst>
-            <a:outerShdw sx="100000" sy="100000" kx="0" ky="0" algn="bl" rotWithShape="0" blurRad="101600" dist="38100" dir="8100000">
+            <a:outerShdw blurRad="101600" dist="38100" dir="8100000" algn="bl" rotWithShape="0">
               <a:srgbClr val="000000">
                 <a:alpha val="10000"/>
               </a:srgbClr>
             </a:outerShdw>
           </a:effectLst>
         </p:spPr>
+        <p:txBody>
+          <a:bodyPr/>
+          <a:lstStyle/>
+          <a:p>
+            <a:endParaRPr lang="en-US"/>
+          </a:p>
+        </p:txBody>
       </p:sp>
       <p:sp>
         <p:nvSpPr>
@@ -7956,6 +9301,13 @@
             <a:prstDash val="solid"/>
           </a:ln>
         </p:spPr>
+        <p:txBody>
+          <a:bodyPr/>
+          <a:lstStyle/>
+          <a:p>
+            <a:endParaRPr lang="en-US"/>
+          </a:p>
+        </p:txBody>
       </p:sp>
       <p:sp>
         <p:nvSpPr>
@@ -7978,7 +9330,7 @@
           <a:bodyPr wrap="square" lIns="0" tIns="0" rIns="0" bIns="0" rtlCol="0" anchor="ctr"/>
           <a:lstStyle/>
           <a:p>
-            <a:pPr algn="l" indent="0" marL="0">
+            <a:pPr marL="0" indent="0" algn="l">
               <a:buNone/>
             </a:pPr>
             <a:r>
@@ -8017,7 +9369,7 @@
           <a:bodyPr wrap="square" lIns="0" tIns="0" rIns="0" bIns="0" rtlCol="0" anchor="ctr"/>
           <a:lstStyle/>
           <a:p>
-            <a:pPr algn="l" indent="0" marL="0">
+            <a:pPr marL="0" indent="0" algn="l">
               <a:buNone/>
             </a:pPr>
             <a:r>
@@ -8059,13 +9411,20 @@
             <a:prstDash val="solid"/>
           </a:ln>
           <a:effectLst>
-            <a:outerShdw sx="100000" sy="100000" kx="0" ky="0" algn="bl" rotWithShape="0" blurRad="101600" dist="38100" dir="8100000">
+            <a:outerShdw blurRad="101600" dist="38100" dir="8100000" algn="bl" rotWithShape="0">
               <a:srgbClr val="000000">
                 <a:alpha val="10000"/>
               </a:srgbClr>
             </a:outerShdw>
           </a:effectLst>
         </p:spPr>
+        <p:txBody>
+          <a:bodyPr/>
+          <a:lstStyle/>
+          <a:p>
+            <a:endParaRPr lang="en-US"/>
+          </a:p>
+        </p:txBody>
       </p:sp>
       <p:sp>
         <p:nvSpPr>
@@ -8091,6 +9450,13 @@
             <a:prstDash val="solid"/>
           </a:ln>
         </p:spPr>
+        <p:txBody>
+          <a:bodyPr/>
+          <a:lstStyle/>
+          <a:p>
+            <a:endParaRPr lang="en-US"/>
+          </a:p>
+        </p:txBody>
       </p:sp>
       <p:sp>
         <p:nvSpPr>
@@ -8113,7 +9479,7 @@
           <a:bodyPr wrap="square" lIns="0" tIns="0" rIns="0" bIns="0" rtlCol="0" anchor="ctr"/>
           <a:lstStyle/>
           <a:p>
-            <a:pPr algn="l" indent="0" marL="0">
+            <a:pPr marL="0" indent="0" algn="l">
               <a:buNone/>
             </a:pPr>
             <a:r>
@@ -8152,7 +9518,7 @@
           <a:bodyPr wrap="square" lIns="0" tIns="0" rIns="0" bIns="0" rtlCol="0" anchor="ctr"/>
           <a:lstStyle/>
           <a:p>
-            <a:pPr algn="l" indent="0" marL="0">
+            <a:pPr marL="0" indent="0" algn="l">
               <a:buNone/>
             </a:pPr>
             <a:r>
@@ -8191,7 +9557,7 @@
           <a:bodyPr wrap="square" lIns="0" tIns="0" rIns="0" bIns="0" rtlCol="0" anchor="ctr"/>
           <a:lstStyle/>
           <a:p>
-            <a:pPr indent="0" marL="0">
+            <a:pPr marL="0" indent="0">
               <a:buNone/>
             </a:pPr>
             <a:r>
@@ -8211,31 +9577,49 @@
       </p:sp>
       <p:graphicFrame>
         <p:nvGraphicFramePr>
-          <p:cNvPr id="5" name="Table 0"/>
+          <p:cNvPr id="30" name="Table 0"/>
           <p:cNvGraphicFramePr>
             <a:graphicFrameLocks noGrp="1"/>
           </p:cNvGraphicFramePr>
-          <p:nvPr>
-            <p:extLst>
-              <p:ext uri="{D42A27DB-BD31-4B8C-83A1-F6EECF244321}">
-                <p14:modId xmlns:p14="http://schemas.microsoft.com/office/powerpoint/2010/main" val="1579011935"/>
-              </p:ext>
-            </p:extLst>
-          </p:nvPr>
+          <p:nvPr/>
         </p:nvGraphicFramePr>
         <p:xfrm>
           <a:off x="4754880" y="1691640"/>
-          <a:ext cx="4023360" cy="1920240"/>
+          <a:ext cx="3749040" cy="1737360"/>
         </p:xfrm>
         <a:graphic>
           <a:graphicData uri="http://schemas.openxmlformats.org/drawingml/2006/table">
             <a:tbl>
               <a:tblPr/>
               <a:tblGrid>
-                <a:gridCol w="914400"/>
-                <a:gridCol w="1097280"/>
-                <a:gridCol w="731520"/>
-                <a:gridCol w="1005840"/>
+                <a:gridCol w="914400">
+                  <a:extLst>
+                    <a:ext uri="{9D8B030D-6E8A-4147-A177-3AD203B41FA5}">
+                      <a16:colId xmlns:a16="http://schemas.microsoft.com/office/drawing/2014/main" val="20000"/>
+                    </a:ext>
+                  </a:extLst>
+                </a:gridCol>
+                <a:gridCol w="1097280">
+                  <a:extLst>
+                    <a:ext uri="{9D8B030D-6E8A-4147-A177-3AD203B41FA5}">
+                      <a16:colId xmlns:a16="http://schemas.microsoft.com/office/drawing/2014/main" val="20001"/>
+                    </a:ext>
+                  </a:extLst>
+                </a:gridCol>
+                <a:gridCol w="731520">
+                  <a:extLst>
+                    <a:ext uri="{9D8B030D-6E8A-4147-A177-3AD203B41FA5}">
+                      <a16:colId xmlns:a16="http://schemas.microsoft.com/office/drawing/2014/main" val="20002"/>
+                    </a:ext>
+                  </a:extLst>
+                </a:gridCol>
+                <a:gridCol w="1005840">
+                  <a:extLst>
+                    <a:ext uri="{9D8B030D-6E8A-4147-A177-3AD203B41FA5}">
+                      <a16:colId xmlns:a16="http://schemas.microsoft.com/office/drawing/2014/main" val="20003"/>
+                    </a:ext>
+                  </a:extLst>
+                </a:gridCol>
               </a:tblGrid>
               <a:tr h="347472">
                 <a:tc>
@@ -8243,7 +9627,7 @@
                     <a:bodyPr/>
                     <a:lstStyle/>
                     <a:p>
-                      <a:pPr algn="ctr" indent="0" marL="0">
+                      <a:pPr marL="0" indent="0" algn="ctr">
                         <a:buNone/>
                       </a:pPr>
                       <a:r>
@@ -8264,7 +9648,7 @@
                       </a:endParaRPr>
                     </a:p>
                   </a:txBody>
-                  <a:tcPr marL="91440" marR="91440" marT="45720" marB="45720" anchor="ctr">
+                  <a:tcPr anchor="ctr">
                     <a:lnL w="6350" cap="flat" cmpd="sng" algn="ctr">
                       <a:solidFill>
                         <a:srgbClr val="D0DEFF"/>
@@ -8311,7 +9695,7 @@
                     <a:bodyPr/>
                     <a:lstStyle/>
                     <a:p>
-                      <a:pPr algn="ctr" indent="0" marL="0">
+                      <a:pPr marL="0" indent="0" algn="ctr">
                         <a:buNone/>
                       </a:pPr>
                       <a:r>
@@ -8332,7 +9716,7 @@
                       </a:endParaRPr>
                     </a:p>
                   </a:txBody>
-                  <a:tcPr marL="91440" marR="91440" marT="45720" marB="45720" anchor="ctr">
+                  <a:tcPr anchor="ctr">
                     <a:lnL w="6350" cap="flat" cmpd="sng" algn="ctr">
                       <a:solidFill>
                         <a:srgbClr val="D0DEFF"/>
@@ -8379,7 +9763,7 @@
                     <a:bodyPr/>
                     <a:lstStyle/>
                     <a:p>
-                      <a:pPr algn="ctr" indent="0" marL="0">
+                      <a:pPr marL="0" indent="0" algn="ctr">
                         <a:buNone/>
                       </a:pPr>
                       <a:r>
@@ -8400,7 +9784,7 @@
                       </a:endParaRPr>
                     </a:p>
                   </a:txBody>
-                  <a:tcPr marL="91440" marR="91440" marT="45720" marB="45720" anchor="ctr">
+                  <a:tcPr anchor="ctr">
                     <a:lnL w="6350" cap="flat" cmpd="sng" algn="ctr">
                       <a:solidFill>
                         <a:srgbClr val="D0DEFF"/>
@@ -8447,7 +9831,7 @@
                     <a:bodyPr/>
                     <a:lstStyle/>
                     <a:p>
-                      <a:pPr algn="ctr" indent="0" marL="0">
+                      <a:pPr marL="0" indent="0" algn="ctr">
                         <a:buNone/>
                       </a:pPr>
                       <a:r>
@@ -8468,7 +9852,7 @@
                       </a:endParaRPr>
                     </a:p>
                   </a:txBody>
-                  <a:tcPr marL="91440" marR="91440" marT="45720" marB="45720" anchor="ctr">
+                  <a:tcPr anchor="ctr">
                     <a:lnL w="6350" cap="flat" cmpd="sng" algn="ctr">
                       <a:solidFill>
                         <a:srgbClr val="D0DEFF"/>
@@ -8510,6 +9894,11 @@
                     </a:solidFill>
                   </a:tcPr>
                 </a:tc>
+                <a:extLst>
+                  <a:ext uri="{0D108BD9-81ED-4DB2-BD59-A6C34878D82A}">
+                    <a16:rowId xmlns:a16="http://schemas.microsoft.com/office/drawing/2014/main" val="10000"/>
+                  </a:ext>
+                </a:extLst>
               </a:tr>
               <a:tr h="347472">
                 <a:tc>
@@ -8517,7 +9906,7 @@
                     <a:bodyPr/>
                     <a:lstStyle/>
                     <a:p>
-                      <a:pPr algn="ctr" indent="0" marL="0">
+                      <a:pPr marL="0" indent="0" algn="ctr">
                         <a:buNone/>
                       </a:pPr>
                       <a:r>
@@ -8538,7 +9927,7 @@
                       </a:endParaRPr>
                     </a:p>
                   </a:txBody>
-                  <a:tcPr marL="91440" marR="91440" marT="45720" marB="45720" anchor="ctr">
+                  <a:tcPr anchor="ctr">
                     <a:lnL w="6350" cap="flat" cmpd="sng" algn="ctr">
                       <a:solidFill>
                         <a:srgbClr val="D0DEFF"/>
@@ -8585,7 +9974,7 @@
                     <a:bodyPr/>
                     <a:lstStyle/>
                     <a:p>
-                      <a:pPr algn="ctr" indent="0" marL="0">
+                      <a:pPr marL="0" indent="0" algn="ctr">
                         <a:buNone/>
                       </a:pPr>
                       <a:r>
@@ -8606,7 +9995,7 @@
                       </a:endParaRPr>
                     </a:p>
                   </a:txBody>
-                  <a:tcPr marL="91440" marR="91440" marT="45720" marB="45720" anchor="ctr">
+                  <a:tcPr anchor="ctr">
                     <a:lnL w="6350" cap="flat" cmpd="sng" algn="ctr">
                       <a:solidFill>
                         <a:srgbClr val="D0DEFF"/>
@@ -8653,7 +10042,7 @@
                     <a:bodyPr/>
                     <a:lstStyle/>
                     <a:p>
-                      <a:pPr algn="ctr" indent="0" marL="0">
+                      <a:pPr marL="0" indent="0" algn="ctr">
                         <a:buNone/>
                       </a:pPr>
                       <a:r>
@@ -8674,7 +10063,7 @@
                       </a:endParaRPr>
                     </a:p>
                   </a:txBody>
-                  <a:tcPr marL="91440" marR="91440" marT="45720" marB="45720" anchor="ctr">
+                  <a:tcPr anchor="ctr">
                     <a:lnL w="6350" cap="flat" cmpd="sng" algn="ctr">
                       <a:solidFill>
                         <a:srgbClr val="D0DEFF"/>
@@ -8721,7 +10110,7 @@
                     <a:bodyPr/>
                     <a:lstStyle/>
                     <a:p>
-                      <a:pPr algn="ctr" indent="0" marL="0">
+                      <a:pPr marL="0" indent="0" algn="ctr">
                         <a:buNone/>
                       </a:pPr>
                       <a:r>
@@ -8742,7 +10131,7 @@
                       </a:endParaRPr>
                     </a:p>
                   </a:txBody>
-                  <a:tcPr marL="91440" marR="91440" marT="45720" marB="45720" anchor="ctr">
+                  <a:tcPr anchor="ctr">
                     <a:lnL w="6350" cap="flat" cmpd="sng" algn="ctr">
                       <a:solidFill>
                         <a:srgbClr val="D0DEFF"/>
@@ -8784,6 +10173,11 @@
                     </a:solidFill>
                   </a:tcPr>
                 </a:tc>
+                <a:extLst>
+                  <a:ext uri="{0D108BD9-81ED-4DB2-BD59-A6C34878D82A}">
+                    <a16:rowId xmlns:a16="http://schemas.microsoft.com/office/drawing/2014/main" val="10001"/>
+                  </a:ext>
+                </a:extLst>
               </a:tr>
               <a:tr h="347472">
                 <a:tc>
@@ -8791,7 +10185,7 @@
                     <a:bodyPr/>
                     <a:lstStyle/>
                     <a:p>
-                      <a:pPr algn="ctr" indent="0" marL="0">
+                      <a:pPr marL="0" indent="0" algn="ctr">
                         <a:buNone/>
                       </a:pPr>
                       <a:r>
@@ -8812,7 +10206,7 @@
                       </a:endParaRPr>
                     </a:p>
                   </a:txBody>
-                  <a:tcPr marL="91440" marR="91440" marT="45720" marB="45720" anchor="ctr">
+                  <a:tcPr anchor="ctr">
                     <a:lnL w="6350" cap="flat" cmpd="sng" algn="ctr">
                       <a:solidFill>
                         <a:srgbClr val="D0DEFF"/>
@@ -8859,7 +10253,7 @@
                     <a:bodyPr/>
                     <a:lstStyle/>
                     <a:p>
-                      <a:pPr algn="ctr" indent="0" marL="0">
+                      <a:pPr marL="0" indent="0" algn="ctr">
                         <a:buNone/>
                       </a:pPr>
                       <a:r>
@@ -8880,7 +10274,7 @@
                       </a:endParaRPr>
                     </a:p>
                   </a:txBody>
-                  <a:tcPr marL="91440" marR="91440" marT="45720" marB="45720" anchor="ctr">
+                  <a:tcPr anchor="ctr">
                     <a:lnL w="6350" cap="flat" cmpd="sng" algn="ctr">
                       <a:solidFill>
                         <a:srgbClr val="D0DEFF"/>
@@ -8927,7 +10321,7 @@
                     <a:bodyPr/>
                     <a:lstStyle/>
                     <a:p>
-                      <a:pPr algn="ctr" indent="0" marL="0">
+                      <a:pPr marL="0" indent="0" algn="ctr">
                         <a:buNone/>
                       </a:pPr>
                       <a:r>
@@ -8948,7 +10342,7 @@
                       </a:endParaRPr>
                     </a:p>
                   </a:txBody>
-                  <a:tcPr marL="91440" marR="91440" marT="45720" marB="45720" anchor="ctr">
+                  <a:tcPr anchor="ctr">
                     <a:lnL w="6350" cap="flat" cmpd="sng" algn="ctr">
                       <a:solidFill>
                         <a:srgbClr val="D0DEFF"/>
@@ -8995,7 +10389,7 @@
                     <a:bodyPr/>
                     <a:lstStyle/>
                     <a:p>
-                      <a:pPr algn="ctr" indent="0" marL="0">
+                      <a:pPr marL="0" indent="0" algn="ctr">
                         <a:buNone/>
                       </a:pPr>
                       <a:r>
@@ -9016,7 +10410,7 @@
                       </a:endParaRPr>
                     </a:p>
                   </a:txBody>
-                  <a:tcPr marL="91440" marR="91440" marT="45720" marB="45720" anchor="ctr">
+                  <a:tcPr anchor="ctr">
                     <a:lnL w="6350" cap="flat" cmpd="sng" algn="ctr">
                       <a:solidFill>
                         <a:srgbClr val="D0DEFF"/>
@@ -9058,6 +10452,11 @@
                     </a:solidFill>
                   </a:tcPr>
                 </a:tc>
+                <a:extLst>
+                  <a:ext uri="{0D108BD9-81ED-4DB2-BD59-A6C34878D82A}">
+                    <a16:rowId xmlns:a16="http://schemas.microsoft.com/office/drawing/2014/main" val="10002"/>
+                  </a:ext>
+                </a:extLst>
               </a:tr>
               <a:tr h="347472">
                 <a:tc>
@@ -9065,7 +10464,7 @@
                     <a:bodyPr/>
                     <a:lstStyle/>
                     <a:p>
-                      <a:pPr algn="ctr" indent="0" marL="0">
+                      <a:pPr marL="0" indent="0" algn="ctr">
                         <a:buNone/>
                       </a:pPr>
                       <a:r>
@@ -9086,7 +10485,7 @@
                       </a:endParaRPr>
                     </a:p>
                   </a:txBody>
-                  <a:tcPr marL="91440" marR="91440" marT="45720" marB="45720" anchor="ctr">
+                  <a:tcPr anchor="ctr">
                     <a:lnL w="6350" cap="flat" cmpd="sng" algn="ctr">
                       <a:solidFill>
                         <a:srgbClr val="D0DEFF"/>
@@ -9133,7 +10532,7 @@
                     <a:bodyPr/>
                     <a:lstStyle/>
                     <a:p>
-                      <a:pPr algn="ctr" indent="0" marL="0">
+                      <a:pPr marL="0" indent="0" algn="ctr">
                         <a:buNone/>
                       </a:pPr>
                       <a:r>
@@ -9154,7 +10553,7 @@
                       </a:endParaRPr>
                     </a:p>
                   </a:txBody>
-                  <a:tcPr marL="91440" marR="91440" marT="45720" marB="45720" anchor="ctr">
+                  <a:tcPr anchor="ctr">
                     <a:lnL w="6350" cap="flat" cmpd="sng" algn="ctr">
                       <a:solidFill>
                         <a:srgbClr val="D0DEFF"/>
@@ -9201,7 +10600,7 @@
                     <a:bodyPr/>
                     <a:lstStyle/>
                     <a:p>
-                      <a:pPr algn="ctr" indent="0" marL="0">
+                      <a:pPr marL="0" indent="0" algn="ctr">
                         <a:buNone/>
                       </a:pPr>
                       <a:r>
@@ -9222,7 +10621,7 @@
                       </a:endParaRPr>
                     </a:p>
                   </a:txBody>
-                  <a:tcPr marL="91440" marR="91440" marT="45720" marB="45720" anchor="ctr">
+                  <a:tcPr anchor="ctr">
                     <a:lnL w="6350" cap="flat" cmpd="sng" algn="ctr">
                       <a:solidFill>
                         <a:srgbClr val="D0DEFF"/>
@@ -9269,7 +10668,7 @@
                     <a:bodyPr/>
                     <a:lstStyle/>
                     <a:p>
-                      <a:pPr algn="ctr" indent="0" marL="0">
+                      <a:pPr marL="0" indent="0" algn="ctr">
                         <a:buNone/>
                       </a:pPr>
                       <a:r>
@@ -9290,7 +10689,7 @@
                       </a:endParaRPr>
                     </a:p>
                   </a:txBody>
-                  <a:tcPr marL="91440" marR="91440" marT="45720" marB="45720" anchor="ctr">
+                  <a:tcPr anchor="ctr">
                     <a:lnL w="6350" cap="flat" cmpd="sng" algn="ctr">
                       <a:solidFill>
                         <a:srgbClr val="D0DEFF"/>
@@ -9332,6 +10731,11 @@
                     </a:solidFill>
                   </a:tcPr>
                 </a:tc>
+                <a:extLst>
+                  <a:ext uri="{0D108BD9-81ED-4DB2-BD59-A6C34878D82A}">
+                    <a16:rowId xmlns:a16="http://schemas.microsoft.com/office/drawing/2014/main" val="10003"/>
+                  </a:ext>
+                </a:extLst>
               </a:tr>
               <a:tr h="347472">
                 <a:tc>
@@ -9339,7 +10743,7 @@
                     <a:bodyPr/>
                     <a:lstStyle/>
                     <a:p>
-                      <a:pPr algn="ctr" indent="0" marL="0">
+                      <a:pPr marL="0" indent="0" algn="ctr">
                         <a:buNone/>
                       </a:pPr>
                       <a:r>
@@ -9360,7 +10764,7 @@
                       </a:endParaRPr>
                     </a:p>
                   </a:txBody>
-                  <a:tcPr marL="91440" marR="91440" marT="45720" marB="45720" anchor="ctr">
+                  <a:tcPr anchor="ctr">
                     <a:lnL w="6350" cap="flat" cmpd="sng" algn="ctr">
                       <a:solidFill>
                         <a:srgbClr val="D0DEFF"/>
@@ -9407,7 +10811,7 @@
                     <a:bodyPr/>
                     <a:lstStyle/>
                     <a:p>
-                      <a:pPr algn="ctr" indent="0" marL="0">
+                      <a:pPr marL="0" indent="0" algn="ctr">
                         <a:buNone/>
                       </a:pPr>
                       <a:r>
@@ -9428,7 +10832,7 @@
                       </a:endParaRPr>
                     </a:p>
                   </a:txBody>
-                  <a:tcPr marL="91440" marR="91440" marT="45720" marB="45720" anchor="ctr">
+                  <a:tcPr anchor="ctr">
                     <a:lnL w="6350" cap="flat" cmpd="sng" algn="ctr">
                       <a:solidFill>
                         <a:srgbClr val="D0DEFF"/>
@@ -9475,7 +10879,7 @@
                     <a:bodyPr/>
                     <a:lstStyle/>
                     <a:p>
-                      <a:pPr algn="ctr" indent="0" marL="0">
+                      <a:pPr marL="0" indent="0" algn="ctr">
                         <a:buNone/>
                       </a:pPr>
                       <a:r>
@@ -9496,7 +10900,7 @@
                       </a:endParaRPr>
                     </a:p>
                   </a:txBody>
-                  <a:tcPr marL="91440" marR="91440" marT="45720" marB="45720" anchor="ctr">
+                  <a:tcPr anchor="ctr">
                     <a:lnL w="6350" cap="flat" cmpd="sng" algn="ctr">
                       <a:solidFill>
                         <a:srgbClr val="D0DEFF"/>
@@ -9543,7 +10947,7 @@
                     <a:bodyPr/>
                     <a:lstStyle/>
                     <a:p>
-                      <a:pPr algn="ctr" indent="0" marL="0">
+                      <a:pPr marL="0" indent="0" algn="ctr">
                         <a:buNone/>
                       </a:pPr>
                       <a:r>
@@ -9564,7 +10968,7 @@
                       </a:endParaRPr>
                     </a:p>
                   </a:txBody>
-                  <a:tcPr marL="91440" marR="91440" marT="45720" marB="45720" anchor="ctr">
+                  <a:tcPr anchor="ctr">
                     <a:lnL w="6350" cap="flat" cmpd="sng" algn="ctr">
                       <a:solidFill>
                         <a:srgbClr val="D0DEFF"/>
@@ -9606,6 +11010,11 @@
                     </a:solidFill>
                   </a:tcPr>
                 </a:tc>
+                <a:extLst>
+                  <a:ext uri="{0D108BD9-81ED-4DB2-BD59-A6C34878D82A}">
+                    <a16:rowId xmlns:a16="http://schemas.microsoft.com/office/drawing/2014/main" val="10004"/>
+                  </a:ext>
+                </a:extLst>
               </a:tr>
             </a:tbl>
           </a:graphicData>
@@ -9635,13 +11044,20 @@
             <a:prstDash val="solid"/>
           </a:ln>
           <a:effectLst>
-            <a:outerShdw sx="100000" sy="100000" kx="0" ky="0" algn="bl" rotWithShape="0" blurRad="101600" dist="38100" dir="8100000">
+            <a:outerShdw blurRad="101600" dist="38100" dir="8100000" algn="bl" rotWithShape="0">
               <a:srgbClr val="000000">
                 <a:alpha val="10000"/>
               </a:srgbClr>
             </a:outerShdw>
           </a:effectLst>
         </p:spPr>
+        <p:txBody>
+          <a:bodyPr/>
+          <a:lstStyle/>
+          <a:p>
+            <a:endParaRPr lang="en-US"/>
+          </a:p>
+        </p:txBody>
       </p:sp>
       <p:sp>
         <p:nvSpPr>
@@ -9664,7 +11080,7 @@
           <a:bodyPr wrap="square" rtlCol="0" anchor="ctr"/>
           <a:lstStyle/>
           <a:p>
-            <a:pPr algn="l" indent="0" marL="0">
+            <a:pPr marL="0" indent="0" algn="l">
               <a:buNone/>
             </a:pPr>
             <a:r>
@@ -9682,7 +11098,7 @@
             <a:endParaRPr lang="en-US" sz="1000" dirty="0"/>
           </a:p>
           <a:p>
-            <a:pPr algn="l" indent="0" marL="0">
+            <a:pPr marL="0" indent="0" algn="l">
               <a:buNone/>
             </a:pPr>
             <a:r>
@@ -9699,7 +11115,7 @@
             <a:endParaRPr lang="en-US" sz="1000" dirty="0"/>
           </a:p>
           <a:p>
-            <a:pPr algn="l" indent="0" marL="0">
+            <a:pPr marL="0" indent="0" algn="l">
               <a:buNone/>
             </a:pPr>
             <a:r>
@@ -9716,7 +11132,7 @@
             <a:endParaRPr lang="en-US" sz="1000" dirty="0"/>
           </a:p>
           <a:p>
-            <a:pPr algn="l" indent="0" marL="0">
+            <a:pPr marL="0" indent="0" algn="l">
               <a:buNone/>
             </a:pPr>
             <a:r>
@@ -9735,6 +11151,11 @@
         </p:txBody>
       </p:sp>
     </p:spTree>
+    <p:extLst>
+      <p:ext uri="{BB962C8B-B14F-4D97-AF65-F5344CB8AC3E}">
+        <p14:creationId xmlns:p14="http://schemas.microsoft.com/office/powerpoint/2010/main" val="257966233"/>
+      </p:ext>
+    </p:extLst>
   </p:cSld>
   <p:clrMapOvr>
     <a:masterClrMapping/>
@@ -9750,6 +11171,7 @@
         <a:solidFill>
           <a:srgbClr val="FFFFFF"/>
         </a:solidFill>
+        <a:effectLst/>
       </p:bgPr>
     </p:bg>
     <p:spTree>
@@ -9790,6 +11212,13 @@
             <a:prstDash val="solid"/>
           </a:ln>
         </p:spPr>
+        <p:txBody>
+          <a:bodyPr/>
+          <a:lstStyle/>
+          <a:p>
+            <a:endParaRPr lang="en-US"/>
+          </a:p>
+        </p:txBody>
       </p:sp>
       <p:sp>
         <p:nvSpPr>
@@ -9812,11 +11241,11 @@
           <a:bodyPr wrap="square" rtlCol="0" anchor="ctr"/>
           <a:lstStyle/>
           <a:p>
-            <a:pPr indent="0" marL="0">
+            <a:pPr marL="0" indent="0">
               <a:buNone/>
             </a:pPr>
             <a:r>
-              <a:rPr lang="en-US" sz="1300" b="1" spc="400" kern="0" dirty="0">
+              <a:rPr lang="en-US" sz="1300" b="1" kern="0" spc="400" dirty="0">
                 <a:solidFill>
                   <a:srgbClr val="4CC9F0"/>
                 </a:solidFill>
@@ -9851,7 +11280,7 @@
           <a:bodyPr wrap="square" lIns="0" tIns="0" rIns="0" bIns="0" rtlCol="0" anchor="ctr"/>
           <a:lstStyle/>
           <a:p>
-            <a:pPr algn="l" indent="0" marL="0">
+            <a:pPr marL="0" indent="0" algn="l">
               <a:buNone/>
             </a:pPr>
             <a:r>
@@ -9871,7 +11300,7 @@
       </p:sp>
       <p:graphicFrame>
         <p:nvGraphicFramePr>
-          <p:cNvPr id="5" name="Chart 0" descr=""/>
+          <p:cNvPr id="5" name="Chart 0"/>
           <p:cNvGraphicFramePr/>
           <p:nvPr/>
         </p:nvGraphicFramePr>
@@ -9879,9 +11308,9 @@
           <a:off x="274320" y="1143000"/>
           <a:ext cx="5669280" cy="3749040"/>
         </p:xfrm>
-        <a:graphic xmlns:a="http://schemas.openxmlformats.org/drawingml/2006/main">
+        <a:graphic>
           <a:graphicData uri="http://schemas.openxmlformats.org/drawingml/2006/chart">
-            <c:chart xmlns:c="http://schemas.openxmlformats.org/drawingml/2006/chart" r:id="rId1"/>
+            <c:chart xmlns:c="http://schemas.openxmlformats.org/drawingml/2006/chart" xmlns:r="http://schemas.openxmlformats.org/officeDocument/2006/relationships" r:id="rId3"/>
           </a:graphicData>
         </a:graphic>
       </p:graphicFrame>
@@ -9909,13 +11338,20 @@
             <a:prstDash val="solid"/>
           </a:ln>
           <a:effectLst>
-            <a:outerShdw sx="100000" sy="100000" kx="0" ky="0" algn="bl" rotWithShape="0" blurRad="101600" dist="38100" dir="8100000">
+            <a:outerShdw blurRad="101600" dist="38100" dir="8100000" algn="bl" rotWithShape="0">
               <a:srgbClr val="000000">
                 <a:alpha val="10000"/>
               </a:srgbClr>
             </a:outerShdw>
           </a:effectLst>
         </p:spPr>
+        <p:txBody>
+          <a:bodyPr/>
+          <a:lstStyle/>
+          <a:p>
+            <a:endParaRPr lang="en-US"/>
+          </a:p>
+        </p:txBody>
       </p:sp>
       <p:sp>
         <p:nvSpPr>
@@ -9941,6 +11377,13 @@
             <a:prstDash val="solid"/>
           </a:ln>
         </p:spPr>
+        <p:txBody>
+          <a:bodyPr/>
+          <a:lstStyle/>
+          <a:p>
+            <a:endParaRPr lang="en-US"/>
+          </a:p>
+        </p:txBody>
       </p:sp>
       <p:sp>
         <p:nvSpPr>
@@ -9963,7 +11406,7 @@
           <a:bodyPr wrap="square" lIns="0" tIns="0" rIns="0" bIns="0" rtlCol="0" anchor="ctr"/>
           <a:lstStyle/>
           <a:p>
-            <a:pPr indent="0" marL="0">
+            <a:pPr marL="0" indent="0">
               <a:buNone/>
             </a:pPr>
             <a:r>
@@ -10002,7 +11445,7 @@
           <a:bodyPr wrap="square" lIns="0" tIns="0" rIns="0" bIns="0" rtlCol="0" anchor="ctr"/>
           <a:lstStyle/>
           <a:p>
-            <a:pPr indent="0" marL="0">
+            <a:pPr marL="0" indent="0">
               <a:buNone/>
             </a:pPr>
             <a:r>
@@ -10041,7 +11484,7 @@
           <a:bodyPr wrap="square" lIns="0" tIns="0" rIns="0" bIns="0" rtlCol="0" anchor="ctr"/>
           <a:lstStyle/>
           <a:p>
-            <a:pPr indent="0" marL="0">
+            <a:pPr marL="0" indent="0">
               <a:buNone/>
             </a:pPr>
             <a:r>
@@ -10058,7 +11501,7 @@
             <a:endParaRPr lang="en-US" sz="950" dirty="0"/>
           </a:p>
           <a:p>
-            <a:pPr indent="0" marL="0">
+            <a:pPr marL="0" indent="0">
               <a:buNone/>
             </a:pPr>
             <a:r>
@@ -10100,13 +11543,20 @@
             <a:prstDash val="solid"/>
           </a:ln>
           <a:effectLst>
-            <a:outerShdw sx="100000" sy="100000" kx="0" ky="0" algn="bl" rotWithShape="0" blurRad="101600" dist="38100" dir="8100000">
+            <a:outerShdw blurRad="101600" dist="38100" dir="8100000" algn="bl" rotWithShape="0">
               <a:srgbClr val="000000">
                 <a:alpha val="10000"/>
               </a:srgbClr>
             </a:outerShdw>
           </a:effectLst>
         </p:spPr>
+        <p:txBody>
+          <a:bodyPr/>
+          <a:lstStyle/>
+          <a:p>
+            <a:endParaRPr lang="en-US"/>
+          </a:p>
+        </p:txBody>
       </p:sp>
       <p:sp>
         <p:nvSpPr>
@@ -10132,6 +11582,13 @@
             <a:prstDash val="solid"/>
           </a:ln>
         </p:spPr>
+        <p:txBody>
+          <a:bodyPr/>
+          <a:lstStyle/>
+          <a:p>
+            <a:endParaRPr lang="en-US"/>
+          </a:p>
+        </p:txBody>
       </p:sp>
       <p:sp>
         <p:nvSpPr>
@@ -10154,7 +11611,7 @@
           <a:bodyPr wrap="square" lIns="0" tIns="0" rIns="0" bIns="0" rtlCol="0" anchor="ctr"/>
           <a:lstStyle/>
           <a:p>
-            <a:pPr indent="0" marL="0">
+            <a:pPr marL="0" indent="0">
               <a:buNone/>
             </a:pPr>
             <a:r>
@@ -10193,7 +11650,7 @@
           <a:bodyPr wrap="square" lIns="0" tIns="0" rIns="0" bIns="0" rtlCol="0" anchor="ctr"/>
           <a:lstStyle/>
           <a:p>
-            <a:pPr indent="0" marL="0">
+            <a:pPr marL="0" indent="0">
               <a:buNone/>
             </a:pPr>
             <a:r>
@@ -10232,7 +11689,7 @@
           <a:bodyPr wrap="square" lIns="0" tIns="0" rIns="0" bIns="0" rtlCol="0" anchor="ctr"/>
           <a:lstStyle/>
           <a:p>
-            <a:pPr indent="0" marL="0">
+            <a:pPr marL="0" indent="0">
               <a:buNone/>
             </a:pPr>
             <a:r>
@@ -10249,7 +11706,7 @@
             <a:endParaRPr lang="en-US" sz="950" dirty="0"/>
           </a:p>
           <a:p>
-            <a:pPr indent="0" marL="0">
+            <a:pPr marL="0" indent="0">
               <a:buNone/>
             </a:pPr>
             <a:r>
@@ -10291,13 +11748,20 @@
             <a:prstDash val="solid"/>
           </a:ln>
           <a:effectLst>
-            <a:outerShdw sx="100000" sy="100000" kx="0" ky="0" algn="bl" rotWithShape="0" blurRad="101600" dist="38100" dir="8100000">
+            <a:outerShdw blurRad="101600" dist="38100" dir="8100000" algn="bl" rotWithShape="0">
               <a:srgbClr val="000000">
                 <a:alpha val="10000"/>
               </a:srgbClr>
             </a:outerShdw>
           </a:effectLst>
         </p:spPr>
+        <p:txBody>
+          <a:bodyPr/>
+          <a:lstStyle/>
+          <a:p>
+            <a:endParaRPr lang="en-US"/>
+          </a:p>
+        </p:txBody>
       </p:sp>
       <p:sp>
         <p:nvSpPr>
@@ -10323,6 +11787,13 @@
             <a:prstDash val="solid"/>
           </a:ln>
         </p:spPr>
+        <p:txBody>
+          <a:bodyPr/>
+          <a:lstStyle/>
+          <a:p>
+            <a:endParaRPr lang="en-US"/>
+          </a:p>
+        </p:txBody>
       </p:sp>
       <p:sp>
         <p:nvSpPr>
@@ -10345,7 +11816,7 @@
           <a:bodyPr wrap="square" lIns="0" tIns="0" rIns="0" bIns="0" rtlCol="0" anchor="ctr"/>
           <a:lstStyle/>
           <a:p>
-            <a:pPr indent="0" marL="0">
+            <a:pPr marL="0" indent="0">
               <a:buNone/>
             </a:pPr>
             <a:r>
@@ -10384,7 +11855,7 @@
           <a:bodyPr wrap="square" lIns="0" tIns="0" rIns="0" bIns="0" rtlCol="0" anchor="ctr"/>
           <a:lstStyle/>
           <a:p>
-            <a:pPr indent="0" marL="0">
+            <a:pPr marL="0" indent="0">
               <a:buNone/>
             </a:pPr>
             <a:r>
@@ -10423,7 +11894,7 @@
           <a:bodyPr wrap="square" lIns="0" tIns="0" rIns="0" bIns="0" rtlCol="0" anchor="ctr"/>
           <a:lstStyle/>
           <a:p>
-            <a:pPr indent="0" marL="0">
+            <a:pPr marL="0" indent="0">
               <a:buNone/>
             </a:pPr>
             <a:r>
@@ -10440,7 +11911,7 @@
             <a:endParaRPr lang="en-US" sz="950" dirty="0"/>
           </a:p>
           <a:p>
-            <a:pPr indent="0" marL="0">
+            <a:pPr marL="0" indent="0">
               <a:buNone/>
             </a:pPr>
             <a:r>
@@ -10482,6 +11953,13 @@
             <a:prstDash val="solid"/>
           </a:ln>
         </p:spPr>
+        <p:txBody>
+          <a:bodyPr/>
+          <a:lstStyle/>
+          <a:p>
+            <a:endParaRPr lang="en-US"/>
+          </a:p>
+        </p:txBody>
       </p:sp>
       <p:sp>
         <p:nvSpPr>
@@ -10504,7 +11982,7 @@
           <a:bodyPr wrap="square" rtlCol="0" anchor="ctr"/>
           <a:lstStyle/>
           <a:p>
-            <a:pPr indent="0" marL="0">
+            <a:pPr marL="0" indent="0">
               <a:buNone/>
             </a:pPr>
             <a:r>
@@ -10523,6 +12001,11 @@
         </p:txBody>
       </p:sp>
     </p:spTree>
+    <p:extLst>
+      <p:ext uri="{BB962C8B-B14F-4D97-AF65-F5344CB8AC3E}">
+        <p14:creationId xmlns:p14="http://schemas.microsoft.com/office/powerpoint/2010/main" val="4263428555"/>
+      </p:ext>
+    </p:extLst>
   </p:cSld>
   <p:clrMapOvr>
     <a:masterClrMapping/>
@@ -10538,6 +12021,7 @@
         <a:solidFill>
           <a:srgbClr val="FFFFFF"/>
         </a:solidFill>
+        <a:effectLst/>
       </p:bgPr>
     </p:bg>
     <p:spTree>
@@ -10578,6 +12062,13 @@
             <a:prstDash val="solid"/>
           </a:ln>
         </p:spPr>
+        <p:txBody>
+          <a:bodyPr/>
+          <a:lstStyle/>
+          <a:p>
+            <a:endParaRPr lang="en-US"/>
+          </a:p>
+        </p:txBody>
       </p:sp>
       <p:sp>
         <p:nvSpPr>
@@ -10600,11 +12091,11 @@
           <a:bodyPr wrap="square" rtlCol="0" anchor="ctr"/>
           <a:lstStyle/>
           <a:p>
-            <a:pPr indent="0" marL="0">
+            <a:pPr marL="0" indent="0">
               <a:buNone/>
             </a:pPr>
             <a:r>
-              <a:rPr lang="en-US" sz="1300" b="1" spc="400" kern="0" dirty="0">
+              <a:rPr lang="en-US" sz="1300" b="1" kern="0" spc="400" dirty="0">
                 <a:solidFill>
                   <a:srgbClr val="4CC9F0"/>
                 </a:solidFill>
@@ -10639,7 +12130,7 @@
           <a:bodyPr wrap="square" lIns="0" tIns="0" rIns="0" bIns="0" rtlCol="0" anchor="ctr"/>
           <a:lstStyle/>
           <a:p>
-            <a:pPr algn="l" indent="0" marL="0">
+            <a:pPr marL="0" indent="0" algn="l">
               <a:buNone/>
             </a:pPr>
             <a:r>
@@ -10659,7 +12150,7 @@
       </p:sp>
       <p:graphicFrame>
         <p:nvGraphicFramePr>
-          <p:cNvPr id="5" name="Chart 0" descr=""/>
+          <p:cNvPr id="5" name="Chart 0"/>
           <p:cNvGraphicFramePr/>
           <p:nvPr/>
         </p:nvGraphicFramePr>
@@ -10667,9 +12158,9 @@
           <a:off x="274320" y="1143000"/>
           <a:ext cx="5669280" cy="3749040"/>
         </p:xfrm>
-        <a:graphic xmlns:a="http://schemas.openxmlformats.org/drawingml/2006/main">
+        <a:graphic>
           <a:graphicData uri="http://schemas.openxmlformats.org/drawingml/2006/chart">
-            <c:chart xmlns:c="http://schemas.openxmlformats.org/drawingml/2006/chart" r:id="rId1"/>
+            <c:chart xmlns:c="http://schemas.openxmlformats.org/drawingml/2006/chart" xmlns:r="http://schemas.openxmlformats.org/officeDocument/2006/relationships" r:id="rId3"/>
           </a:graphicData>
         </a:graphic>
       </p:graphicFrame>
@@ -10697,13 +12188,20 @@
             <a:prstDash val="solid"/>
           </a:ln>
           <a:effectLst>
-            <a:outerShdw sx="100000" sy="100000" kx="0" ky="0" algn="bl" rotWithShape="0" blurRad="101600" dist="38100" dir="8100000">
+            <a:outerShdw blurRad="101600" dist="38100" dir="8100000" algn="bl" rotWithShape="0">
               <a:srgbClr val="000000">
                 <a:alpha val="10000"/>
               </a:srgbClr>
             </a:outerShdw>
           </a:effectLst>
         </p:spPr>
+        <p:txBody>
+          <a:bodyPr/>
+          <a:lstStyle/>
+          <a:p>
+            <a:endParaRPr lang="en-US"/>
+          </a:p>
+        </p:txBody>
       </p:sp>
       <p:sp>
         <p:nvSpPr>
@@ -10729,6 +12227,13 @@
             <a:prstDash val="solid"/>
           </a:ln>
         </p:spPr>
+        <p:txBody>
+          <a:bodyPr/>
+          <a:lstStyle/>
+          <a:p>
+            <a:endParaRPr lang="en-US"/>
+          </a:p>
+        </p:txBody>
       </p:sp>
       <p:sp>
         <p:nvSpPr>
@@ -10751,7 +12256,7 @@
           <a:bodyPr wrap="square" lIns="0" tIns="0" rIns="0" bIns="0" rtlCol="0" anchor="ctr"/>
           <a:lstStyle/>
           <a:p>
-            <a:pPr indent="0" marL="0">
+            <a:pPr marL="0" indent="0">
               <a:buNone/>
             </a:pPr>
             <a:r>
@@ -10790,7 +12295,7 @@
           <a:bodyPr wrap="square" lIns="0" tIns="0" rIns="0" bIns="0" rtlCol="0" anchor="ctr"/>
           <a:lstStyle/>
           <a:p>
-            <a:pPr indent="0" marL="0">
+            <a:pPr marL="0" indent="0">
               <a:buNone/>
             </a:pPr>
             <a:r>
@@ -10832,13 +12337,20 @@
             <a:prstDash val="solid"/>
           </a:ln>
           <a:effectLst>
-            <a:outerShdw sx="100000" sy="100000" kx="0" ky="0" algn="bl" rotWithShape="0" blurRad="101600" dist="38100" dir="8100000">
+            <a:outerShdw blurRad="101600" dist="38100" dir="8100000" algn="bl" rotWithShape="0">
               <a:srgbClr val="000000">
                 <a:alpha val="10000"/>
               </a:srgbClr>
             </a:outerShdw>
           </a:effectLst>
         </p:spPr>
+        <p:txBody>
+          <a:bodyPr/>
+          <a:lstStyle/>
+          <a:p>
+            <a:endParaRPr lang="en-US"/>
+          </a:p>
+        </p:txBody>
       </p:sp>
       <p:sp>
         <p:nvSpPr>
@@ -10864,6 +12376,13 @@
             <a:prstDash val="solid"/>
           </a:ln>
         </p:spPr>
+        <p:txBody>
+          <a:bodyPr/>
+          <a:lstStyle/>
+          <a:p>
+            <a:endParaRPr lang="en-US"/>
+          </a:p>
+        </p:txBody>
       </p:sp>
       <p:sp>
         <p:nvSpPr>
@@ -10886,7 +12405,7 @@
           <a:bodyPr wrap="square" lIns="0" tIns="0" rIns="0" bIns="0" rtlCol="0" anchor="ctr"/>
           <a:lstStyle/>
           <a:p>
-            <a:pPr indent="0" marL="0">
+            <a:pPr marL="0" indent="0">
               <a:buNone/>
             </a:pPr>
             <a:r>
@@ -10925,7 +12444,7 @@
           <a:bodyPr wrap="square" lIns="0" tIns="0" rIns="0" bIns="0" rtlCol="0" anchor="ctr"/>
           <a:lstStyle/>
           <a:p>
-            <a:pPr indent="0" marL="0">
+            <a:pPr marL="0" indent="0">
               <a:buNone/>
             </a:pPr>
             <a:r>
@@ -10967,13 +12486,20 @@
             <a:prstDash val="solid"/>
           </a:ln>
           <a:effectLst>
-            <a:outerShdw sx="100000" sy="100000" kx="0" ky="0" algn="bl" rotWithShape="0" blurRad="101600" dist="38100" dir="8100000">
+            <a:outerShdw blurRad="101600" dist="38100" dir="8100000" algn="bl" rotWithShape="0">
               <a:srgbClr val="000000">
                 <a:alpha val="10000"/>
               </a:srgbClr>
             </a:outerShdw>
           </a:effectLst>
         </p:spPr>
+        <p:txBody>
+          <a:bodyPr/>
+          <a:lstStyle/>
+          <a:p>
+            <a:endParaRPr lang="en-US"/>
+          </a:p>
+        </p:txBody>
       </p:sp>
       <p:sp>
         <p:nvSpPr>
@@ -10999,6 +12525,13 @@
             <a:prstDash val="solid"/>
           </a:ln>
         </p:spPr>
+        <p:txBody>
+          <a:bodyPr/>
+          <a:lstStyle/>
+          <a:p>
+            <a:endParaRPr lang="en-US"/>
+          </a:p>
+        </p:txBody>
       </p:sp>
       <p:sp>
         <p:nvSpPr>
@@ -11021,7 +12554,7 @@
           <a:bodyPr wrap="square" lIns="0" tIns="0" rIns="0" bIns="0" rtlCol="0" anchor="ctr"/>
           <a:lstStyle/>
           <a:p>
-            <a:pPr indent="0" marL="0">
+            <a:pPr marL="0" indent="0">
               <a:buNone/>
             </a:pPr>
             <a:r>
@@ -11060,7 +12593,7 @@
           <a:bodyPr wrap="square" lIns="0" tIns="0" rIns="0" bIns="0" rtlCol="0" anchor="ctr"/>
           <a:lstStyle/>
           <a:p>
-            <a:pPr indent="0" marL="0">
+            <a:pPr marL="0" indent="0">
               <a:buNone/>
             </a:pPr>
             <a:r>
@@ -11079,6 +12612,11 @@
         </p:txBody>
       </p:sp>
     </p:spTree>
+    <p:extLst>
+      <p:ext uri="{BB962C8B-B14F-4D97-AF65-F5344CB8AC3E}">
+        <p14:creationId xmlns:p14="http://schemas.microsoft.com/office/powerpoint/2010/main" val="1344517668"/>
+      </p:ext>
+    </p:extLst>
   </p:cSld>
   <p:clrMapOvr>
     <a:masterClrMapping/>
@@ -11094,6 +12632,7 @@
         <a:solidFill>
           <a:srgbClr val="FFFFFF"/>
         </a:solidFill>
+        <a:effectLst/>
       </p:bgPr>
     </p:bg>
     <p:spTree>
@@ -11134,6 +12673,13 @@
             <a:prstDash val="solid"/>
           </a:ln>
         </p:spPr>
+        <p:txBody>
+          <a:bodyPr/>
+          <a:lstStyle/>
+          <a:p>
+            <a:endParaRPr lang="en-US"/>
+          </a:p>
+        </p:txBody>
       </p:sp>
       <p:sp>
         <p:nvSpPr>
@@ -11156,11 +12702,11 @@
           <a:bodyPr wrap="square" rtlCol="0" anchor="ctr"/>
           <a:lstStyle/>
           <a:p>
-            <a:pPr indent="0" marL="0">
+            <a:pPr marL="0" indent="0">
               <a:buNone/>
             </a:pPr>
             <a:r>
-              <a:rPr lang="en-US" sz="1300" b="1" spc="400" kern="0" dirty="0">
+              <a:rPr lang="en-US" sz="1300" b="1" kern="0" spc="400" dirty="0">
                 <a:solidFill>
                   <a:srgbClr val="4CC9F0"/>
                 </a:solidFill>
@@ -11195,7 +12741,7 @@
           <a:bodyPr wrap="square" lIns="0" tIns="0" rIns="0" bIns="0" rtlCol="0" anchor="ctr"/>
           <a:lstStyle/>
           <a:p>
-            <a:pPr algn="l" indent="0" marL="0">
+            <a:pPr marL="0" indent="0" algn="l">
               <a:buNone/>
             </a:pPr>
             <a:r>
@@ -11237,13 +12783,20 @@
             <a:prstDash val="solid"/>
           </a:ln>
           <a:effectLst>
-            <a:outerShdw sx="100000" sy="100000" kx="0" ky="0" algn="bl" rotWithShape="0" blurRad="101600" dist="38100" dir="8100000">
+            <a:outerShdw blurRad="101600" dist="38100" dir="8100000" algn="bl" rotWithShape="0">
               <a:srgbClr val="000000">
                 <a:alpha val="10000"/>
               </a:srgbClr>
             </a:outerShdw>
           </a:effectLst>
         </p:spPr>
+        <p:txBody>
+          <a:bodyPr/>
+          <a:lstStyle/>
+          <a:p>
+            <a:endParaRPr lang="en-US"/>
+          </a:p>
+        </p:txBody>
       </p:sp>
       <p:sp>
         <p:nvSpPr>
@@ -11266,7 +12819,7 @@
           <a:bodyPr wrap="square" rtlCol="0" anchor="ctr"/>
           <a:lstStyle/>
           <a:p>
-            <a:pPr algn="ctr" indent="0" marL="0">
+            <a:pPr marL="0" indent="0" algn="ctr">
               <a:buNone/>
             </a:pPr>
             <a:r>
@@ -11305,7 +12858,7 @@
           <a:bodyPr wrap="square" lIns="0" tIns="0" rIns="0" bIns="0" rtlCol="0" anchor="ctr"/>
           <a:lstStyle/>
           <a:p>
-            <a:pPr algn="ctr" indent="0" marL="0">
+            <a:pPr marL="0" indent="0" algn="ctr">
               <a:buNone/>
             </a:pPr>
             <a:r>
@@ -11345,6 +12898,13 @@
             <a:prstDash val="solid"/>
           </a:ln>
         </p:spPr>
+        <p:txBody>
+          <a:bodyPr/>
+          <a:lstStyle/>
+          <a:p>
+            <a:endParaRPr lang="en-US"/>
+          </a:p>
+        </p:txBody>
       </p:sp>
       <p:sp>
         <p:nvSpPr>
@@ -11367,7 +12927,7 @@
           <a:bodyPr wrap="square" rtlCol="0" anchor="ctr"/>
           <a:lstStyle/>
           <a:p>
-            <a:pPr algn="ctr" indent="0" marL="0">
+            <a:pPr marL="0" indent="0" algn="ctr">
               <a:buNone/>
             </a:pPr>
             <a:r>
@@ -11406,7 +12966,7 @@
           <a:bodyPr wrap="square" rtlCol="0" anchor="ctr"/>
           <a:lstStyle/>
           <a:p>
-            <a:pPr algn="ctr" indent="0" marL="0">
+            <a:pPr marL="0" indent="0" algn="ctr">
               <a:buNone/>
             </a:pPr>
             <a:r>
@@ -11426,31 +12986,49 @@
       </p:sp>
       <p:graphicFrame>
         <p:nvGraphicFramePr>
-          <p:cNvPr id="8" name="Table 0"/>
+          <p:cNvPr id="11" name="Table 0"/>
           <p:cNvGraphicFramePr>
             <a:graphicFrameLocks noGrp="1"/>
           </p:cNvGraphicFramePr>
-          <p:nvPr>
-            <p:extLst>
-              <p:ext uri="{D42A27DB-BD31-4B8C-83A1-F6EECF244321}">
-                <p14:modId xmlns:p14="http://schemas.microsoft.com/office/powerpoint/2010/main" val="1579011935"/>
-              </p:ext>
-            </p:extLst>
-          </p:nvPr>
+          <p:nvPr/>
         </p:nvGraphicFramePr>
         <p:xfrm>
           <a:off x="365760" y="2651760"/>
-          <a:ext cx="8412480" cy="2148840"/>
+          <a:ext cx="8412480" cy="1901952"/>
         </p:xfrm>
         <a:graphic>
           <a:graphicData uri="http://schemas.openxmlformats.org/drawingml/2006/table">
             <a:tbl>
               <a:tblPr/>
               <a:tblGrid>
-                <a:gridCol w="2286000"/>
-                <a:gridCol w="2011680"/>
-                <a:gridCol w="2011680"/>
-                <a:gridCol w="2103120"/>
+                <a:gridCol w="2286000">
+                  <a:extLst>
+                    <a:ext uri="{9D8B030D-6E8A-4147-A177-3AD203B41FA5}">
+                      <a16:colId xmlns:a16="http://schemas.microsoft.com/office/drawing/2014/main" val="20000"/>
+                    </a:ext>
+                  </a:extLst>
+                </a:gridCol>
+                <a:gridCol w="2011680">
+                  <a:extLst>
+                    <a:ext uri="{9D8B030D-6E8A-4147-A177-3AD203B41FA5}">
+                      <a16:colId xmlns:a16="http://schemas.microsoft.com/office/drawing/2014/main" val="20001"/>
+                    </a:ext>
+                  </a:extLst>
+                </a:gridCol>
+                <a:gridCol w="2011680">
+                  <a:extLst>
+                    <a:ext uri="{9D8B030D-6E8A-4147-A177-3AD203B41FA5}">
+                      <a16:colId xmlns:a16="http://schemas.microsoft.com/office/drawing/2014/main" val="20002"/>
+                    </a:ext>
+                  </a:extLst>
+                </a:gridCol>
+                <a:gridCol w="2103120">
+                  <a:extLst>
+                    <a:ext uri="{9D8B030D-6E8A-4147-A177-3AD203B41FA5}">
+                      <a16:colId xmlns:a16="http://schemas.microsoft.com/office/drawing/2014/main" val="20003"/>
+                    </a:ext>
+                  </a:extLst>
+                </a:gridCol>
               </a:tblGrid>
               <a:tr h="475488">
                 <a:tc>
@@ -11458,7 +13036,7 @@
                     <a:bodyPr/>
                     <a:lstStyle/>
                     <a:p>
-                      <a:pPr algn="ctr" indent="0" marL="0">
+                      <a:pPr marL="0" indent="0" algn="ctr">
                         <a:buNone/>
                       </a:pPr>
                       <a:r>
@@ -11479,7 +13057,7 @@
                       </a:endParaRPr>
                     </a:p>
                   </a:txBody>
-                  <a:tcPr marL="91440" marR="91440" marT="45720" marB="45720" anchor="ctr">
+                  <a:tcPr anchor="ctr">
                     <a:lnL w="6350" cap="flat" cmpd="sng" algn="ctr">
                       <a:solidFill>
                         <a:srgbClr val="D0DEFF"/>
@@ -11526,7 +13104,7 @@
                     <a:bodyPr/>
                     <a:lstStyle/>
                     <a:p>
-                      <a:pPr algn="ctr" indent="0" marL="0">
+                      <a:pPr marL="0" indent="0" algn="ctr">
                         <a:buNone/>
                       </a:pPr>
                       <a:r>
@@ -11547,7 +13125,7 @@
                       </a:endParaRPr>
                     </a:p>
                   </a:txBody>
-                  <a:tcPr marL="91440" marR="91440" marT="45720" marB="45720" anchor="ctr">
+                  <a:tcPr anchor="ctr">
                     <a:lnL w="6350" cap="flat" cmpd="sng" algn="ctr">
                       <a:solidFill>
                         <a:srgbClr val="D0DEFF"/>
@@ -11594,7 +13172,7 @@
                     <a:bodyPr/>
                     <a:lstStyle/>
                     <a:p>
-                      <a:pPr algn="ctr" indent="0" marL="0">
+                      <a:pPr marL="0" indent="0" algn="ctr">
                         <a:buNone/>
                       </a:pPr>
                       <a:r>
@@ -11615,7 +13193,7 @@
                       </a:endParaRPr>
                     </a:p>
                   </a:txBody>
-                  <a:tcPr marL="91440" marR="91440" marT="45720" marB="45720" anchor="ctr">
+                  <a:tcPr anchor="ctr">
                     <a:lnL w="6350" cap="flat" cmpd="sng" algn="ctr">
                       <a:solidFill>
                         <a:srgbClr val="D0DEFF"/>
@@ -11662,7 +13240,7 @@
                     <a:bodyPr/>
                     <a:lstStyle/>
                     <a:p>
-                      <a:pPr algn="ctr" indent="0" marL="0">
+                      <a:pPr marL="0" indent="0" algn="ctr">
                         <a:buNone/>
                       </a:pPr>
                       <a:r>
@@ -11683,7 +13261,7 @@
                       </a:endParaRPr>
                     </a:p>
                   </a:txBody>
-                  <a:tcPr marL="91440" marR="91440" marT="45720" marB="45720" anchor="ctr">
+                  <a:tcPr anchor="ctr">
                     <a:lnL w="6350" cap="flat" cmpd="sng" algn="ctr">
                       <a:solidFill>
                         <a:srgbClr val="D0DEFF"/>
@@ -11725,6 +13303,11 @@
                     </a:solidFill>
                   </a:tcPr>
                 </a:tc>
+                <a:extLst>
+                  <a:ext uri="{0D108BD9-81ED-4DB2-BD59-A6C34878D82A}">
+                    <a16:rowId xmlns:a16="http://schemas.microsoft.com/office/drawing/2014/main" val="10000"/>
+                  </a:ext>
+                </a:extLst>
               </a:tr>
               <a:tr h="475488">
                 <a:tc>
@@ -11732,7 +13315,7 @@
                     <a:bodyPr/>
                     <a:lstStyle/>
                     <a:p>
-                      <a:pPr algn="ctr" indent="0" marL="0">
+                      <a:pPr marL="0" indent="0" algn="ctr">
                         <a:buNone/>
                       </a:pPr>
                       <a:r>
@@ -11753,7 +13336,7 @@
                       </a:endParaRPr>
                     </a:p>
                   </a:txBody>
-                  <a:tcPr marL="91440" marR="91440" marT="45720" marB="45720" anchor="ctr">
+                  <a:tcPr anchor="ctr">
                     <a:lnL w="6350" cap="flat" cmpd="sng" algn="ctr">
                       <a:solidFill>
                         <a:srgbClr val="D0DEFF"/>
@@ -11800,7 +13383,7 @@
                     <a:bodyPr/>
                     <a:lstStyle/>
                     <a:p>
-                      <a:pPr algn="ctr" indent="0" marL="0">
+                      <a:pPr marL="0" indent="0" algn="ctr">
                         <a:buNone/>
                       </a:pPr>
                       <a:r>
@@ -11821,7 +13404,7 @@
                       </a:endParaRPr>
                     </a:p>
                   </a:txBody>
-                  <a:tcPr marL="91440" marR="91440" marT="45720" marB="45720" anchor="ctr">
+                  <a:tcPr anchor="ctr">
                     <a:lnL w="6350" cap="flat" cmpd="sng" algn="ctr">
                       <a:solidFill>
                         <a:srgbClr val="D0DEFF"/>
@@ -11868,7 +13451,7 @@
                     <a:bodyPr/>
                     <a:lstStyle/>
                     <a:p>
-                      <a:pPr algn="ctr" indent="0" marL="0">
+                      <a:pPr marL="0" indent="0" algn="ctr">
                         <a:buNone/>
                       </a:pPr>
                       <a:r>
@@ -11889,7 +13472,7 @@
                       </a:endParaRPr>
                     </a:p>
                   </a:txBody>
-                  <a:tcPr marL="91440" marR="91440" marT="45720" marB="45720" anchor="ctr">
+                  <a:tcPr anchor="ctr">
                     <a:lnL w="6350" cap="flat" cmpd="sng" algn="ctr">
                       <a:solidFill>
                         <a:srgbClr val="D0DEFF"/>
@@ -11936,7 +13519,7 @@
                     <a:bodyPr/>
                     <a:lstStyle/>
                     <a:p>
-                      <a:pPr algn="ctr" indent="0" marL="0">
+                      <a:pPr marL="0" indent="0" algn="ctr">
                         <a:buNone/>
                       </a:pPr>
                       <a:r>
@@ -11957,7 +13540,7 @@
                       </a:endParaRPr>
                     </a:p>
                   </a:txBody>
-                  <a:tcPr marL="91440" marR="91440" marT="45720" marB="45720" anchor="ctr">
+                  <a:tcPr anchor="ctr">
                     <a:lnL w="6350" cap="flat" cmpd="sng" algn="ctr">
                       <a:solidFill>
                         <a:srgbClr val="D0DEFF"/>
@@ -11999,6 +13582,11 @@
                     </a:solidFill>
                   </a:tcPr>
                 </a:tc>
+                <a:extLst>
+                  <a:ext uri="{0D108BD9-81ED-4DB2-BD59-A6C34878D82A}">
+                    <a16:rowId xmlns:a16="http://schemas.microsoft.com/office/drawing/2014/main" val="10001"/>
+                  </a:ext>
+                </a:extLst>
               </a:tr>
               <a:tr h="475488">
                 <a:tc>
@@ -12006,7 +13594,7 @@
                     <a:bodyPr/>
                     <a:lstStyle/>
                     <a:p>
-                      <a:pPr algn="ctr" indent="0" marL="0">
+                      <a:pPr marL="0" indent="0" algn="ctr">
                         <a:buNone/>
                       </a:pPr>
                       <a:r>
@@ -12027,7 +13615,7 @@
                       </a:endParaRPr>
                     </a:p>
                   </a:txBody>
-                  <a:tcPr marL="91440" marR="91440" marT="45720" marB="45720" anchor="ctr">
+                  <a:tcPr anchor="ctr">
                     <a:lnL w="6350" cap="flat" cmpd="sng" algn="ctr">
                       <a:solidFill>
                         <a:srgbClr val="D0DEFF"/>
@@ -12074,7 +13662,7 @@
                     <a:bodyPr/>
                     <a:lstStyle/>
                     <a:p>
-                      <a:pPr algn="ctr" indent="0" marL="0">
+                      <a:pPr marL="0" indent="0" algn="ctr">
                         <a:buNone/>
                       </a:pPr>
                       <a:r>
@@ -12095,7 +13683,7 @@
                       </a:endParaRPr>
                     </a:p>
                   </a:txBody>
-                  <a:tcPr marL="91440" marR="91440" marT="45720" marB="45720" anchor="ctr">
+                  <a:tcPr anchor="ctr">
                     <a:lnL w="6350" cap="flat" cmpd="sng" algn="ctr">
                       <a:solidFill>
                         <a:srgbClr val="D0DEFF"/>
@@ -12142,7 +13730,7 @@
                     <a:bodyPr/>
                     <a:lstStyle/>
                     <a:p>
-                      <a:pPr algn="ctr" indent="0" marL="0">
+                      <a:pPr marL="0" indent="0" algn="ctr">
                         <a:buNone/>
                       </a:pPr>
                       <a:r>
@@ -12163,7 +13751,7 @@
                       </a:endParaRPr>
                     </a:p>
                   </a:txBody>
-                  <a:tcPr marL="91440" marR="91440" marT="45720" marB="45720" anchor="ctr">
+                  <a:tcPr anchor="ctr">
                     <a:lnL w="6350" cap="flat" cmpd="sng" algn="ctr">
                       <a:solidFill>
                         <a:srgbClr val="D0DEFF"/>
@@ -12210,7 +13798,7 @@
                     <a:bodyPr/>
                     <a:lstStyle/>
                     <a:p>
-                      <a:pPr algn="ctr" indent="0" marL="0">
+                      <a:pPr marL="0" indent="0" algn="ctr">
                         <a:buNone/>
                       </a:pPr>
                       <a:r>
@@ -12231,7 +13819,7 @@
                       </a:endParaRPr>
                     </a:p>
                   </a:txBody>
-                  <a:tcPr marL="91440" marR="91440" marT="45720" marB="45720" anchor="ctr">
+                  <a:tcPr anchor="ctr">
                     <a:lnL w="6350" cap="flat" cmpd="sng" algn="ctr">
                       <a:solidFill>
                         <a:srgbClr val="D0DEFF"/>
@@ -12273,6 +13861,11 @@
                     </a:solidFill>
                   </a:tcPr>
                 </a:tc>
+                <a:extLst>
+                  <a:ext uri="{0D108BD9-81ED-4DB2-BD59-A6C34878D82A}">
+                    <a16:rowId xmlns:a16="http://schemas.microsoft.com/office/drawing/2014/main" val="10002"/>
+                  </a:ext>
+                </a:extLst>
               </a:tr>
               <a:tr h="475488">
                 <a:tc>
@@ -12280,7 +13873,7 @@
                     <a:bodyPr/>
                     <a:lstStyle/>
                     <a:p>
-                      <a:pPr algn="ctr" indent="0" marL="0">
+                      <a:pPr marL="0" indent="0" algn="ctr">
                         <a:buNone/>
                       </a:pPr>
                       <a:r>
@@ -12301,7 +13894,7 @@
                       </a:endParaRPr>
                     </a:p>
                   </a:txBody>
-                  <a:tcPr marL="91440" marR="91440" marT="45720" marB="45720" anchor="ctr">
+                  <a:tcPr anchor="ctr">
                     <a:lnL w="6350" cap="flat" cmpd="sng" algn="ctr">
                       <a:solidFill>
                         <a:srgbClr val="D0DEFF"/>
@@ -12348,7 +13941,7 @@
                     <a:bodyPr/>
                     <a:lstStyle/>
                     <a:p>
-                      <a:pPr algn="ctr" indent="0" marL="0">
+                      <a:pPr marL="0" indent="0" algn="ctr">
                         <a:buNone/>
                       </a:pPr>
                       <a:r>
@@ -12369,7 +13962,7 @@
                       </a:endParaRPr>
                     </a:p>
                   </a:txBody>
-                  <a:tcPr marL="91440" marR="91440" marT="45720" marB="45720" anchor="ctr">
+                  <a:tcPr anchor="ctr">
                     <a:lnL w="6350" cap="flat" cmpd="sng" algn="ctr">
                       <a:solidFill>
                         <a:srgbClr val="D0DEFF"/>
@@ -12416,7 +14009,7 @@
                     <a:bodyPr/>
                     <a:lstStyle/>
                     <a:p>
-                      <a:pPr algn="ctr" indent="0" marL="0">
+                      <a:pPr marL="0" indent="0" algn="ctr">
                         <a:buNone/>
                       </a:pPr>
                       <a:r>
@@ -12437,7 +14030,7 @@
                       </a:endParaRPr>
                     </a:p>
                   </a:txBody>
-                  <a:tcPr marL="91440" marR="91440" marT="45720" marB="45720" anchor="ctr">
+                  <a:tcPr anchor="ctr">
                     <a:lnL w="6350" cap="flat" cmpd="sng" algn="ctr">
                       <a:solidFill>
                         <a:srgbClr val="D0DEFF"/>
@@ -12484,7 +14077,7 @@
                     <a:bodyPr/>
                     <a:lstStyle/>
                     <a:p>
-                      <a:pPr algn="ctr" indent="0" marL="0">
+                      <a:pPr marL="0" indent="0" algn="ctr">
                         <a:buNone/>
                       </a:pPr>
                       <a:r>
@@ -12505,7 +14098,7 @@
                       </a:endParaRPr>
                     </a:p>
                   </a:txBody>
-                  <a:tcPr marL="91440" marR="91440" marT="45720" marB="45720" anchor="ctr">
+                  <a:tcPr anchor="ctr">
                     <a:lnL w="6350" cap="flat" cmpd="sng" algn="ctr">
                       <a:solidFill>
                         <a:srgbClr val="D0DEFF"/>
@@ -12547,6 +14140,11 @@
                     </a:solidFill>
                   </a:tcPr>
                 </a:tc>
+                <a:extLst>
+                  <a:ext uri="{0D108BD9-81ED-4DB2-BD59-A6C34878D82A}">
+                    <a16:rowId xmlns:a16="http://schemas.microsoft.com/office/drawing/2014/main" val="10003"/>
+                  </a:ext>
+                </a:extLst>
               </a:tr>
             </a:tbl>
           </a:graphicData>
@@ -12576,6 +14174,13 @@
             <a:prstDash val="solid"/>
           </a:ln>
         </p:spPr>
+        <p:txBody>
+          <a:bodyPr/>
+          <a:lstStyle/>
+          <a:p>
+            <a:endParaRPr lang="en-US"/>
+          </a:p>
+        </p:txBody>
       </p:sp>
       <p:sp>
         <p:nvSpPr>
@@ -12598,7 +14203,7 @@
           <a:bodyPr wrap="square" rtlCol="0" anchor="ctr"/>
           <a:lstStyle/>
           <a:p>
-            <a:pPr algn="ctr" indent="0" marL="0">
+            <a:pPr marL="0" indent="0" algn="ctr">
               <a:buNone/>
             </a:pPr>
             <a:r>
@@ -12617,6 +14222,11 @@
         </p:txBody>
       </p:sp>
     </p:spTree>
+    <p:extLst>
+      <p:ext uri="{BB962C8B-B14F-4D97-AF65-F5344CB8AC3E}">
+        <p14:creationId xmlns:p14="http://schemas.microsoft.com/office/powerpoint/2010/main" val="3052299291"/>
+      </p:ext>
+    </p:extLst>
   </p:cSld>
   <p:clrMapOvr>
     <a:masterClrMapping/>
@@ -12632,6 +14242,7 @@
         <a:solidFill>
           <a:srgbClr val="0D1B2A"/>
         </a:solidFill>
+        <a:effectLst/>
       </p:bgPr>
     </p:bg>
     <p:spTree>
@@ -12672,6 +14283,13 @@
             <a:prstDash val="solid"/>
           </a:ln>
         </p:spPr>
+        <p:txBody>
+          <a:bodyPr/>
+          <a:lstStyle/>
+          <a:p>
+            <a:endParaRPr lang="en-US"/>
+          </a:p>
+        </p:txBody>
       </p:sp>
       <p:sp>
         <p:nvSpPr>
@@ -12697,6 +14315,13 @@
             <a:prstDash val="solid"/>
           </a:ln>
         </p:spPr>
+        <p:txBody>
+          <a:bodyPr/>
+          <a:lstStyle/>
+          <a:p>
+            <a:endParaRPr lang="en-US"/>
+          </a:p>
+        </p:txBody>
       </p:sp>
       <p:sp>
         <p:nvSpPr>
@@ -12722,6 +14347,13 @@
             <a:prstDash val="solid"/>
           </a:ln>
         </p:spPr>
+        <p:txBody>
+          <a:bodyPr/>
+          <a:lstStyle/>
+          <a:p>
+            <a:endParaRPr lang="en-US"/>
+          </a:p>
+        </p:txBody>
       </p:sp>
       <p:sp>
         <p:nvSpPr>
@@ -12747,6 +14379,13 @@
             <a:prstDash val="solid"/>
           </a:ln>
         </p:spPr>
+        <p:txBody>
+          <a:bodyPr/>
+          <a:lstStyle/>
+          <a:p>
+            <a:endParaRPr lang="en-US"/>
+          </a:p>
+        </p:txBody>
       </p:sp>
       <p:sp>
         <p:nvSpPr>
@@ -12772,6 +14411,13 @@
             <a:prstDash val="solid"/>
           </a:ln>
         </p:spPr>
+        <p:txBody>
+          <a:bodyPr/>
+          <a:lstStyle/>
+          <a:p>
+            <a:endParaRPr lang="en-US"/>
+          </a:p>
+        </p:txBody>
       </p:sp>
       <p:sp>
         <p:nvSpPr>
@@ -12797,6 +14443,13 @@
             <a:prstDash val="solid"/>
           </a:ln>
         </p:spPr>
+        <p:txBody>
+          <a:bodyPr/>
+          <a:lstStyle/>
+          <a:p>
+            <a:endParaRPr lang="en-US"/>
+          </a:p>
+        </p:txBody>
       </p:sp>
       <p:sp>
         <p:nvSpPr>
@@ -12822,6 +14475,13 @@
             <a:prstDash val="solid"/>
           </a:ln>
         </p:spPr>
+        <p:txBody>
+          <a:bodyPr/>
+          <a:lstStyle/>
+          <a:p>
+            <a:endParaRPr lang="en-US"/>
+          </a:p>
+        </p:txBody>
       </p:sp>
       <p:sp>
         <p:nvSpPr>
@@ -12847,6 +14507,13 @@
             <a:prstDash val="solid"/>
           </a:ln>
         </p:spPr>
+        <p:txBody>
+          <a:bodyPr/>
+          <a:lstStyle/>
+          <a:p>
+            <a:endParaRPr lang="en-US"/>
+          </a:p>
+        </p:txBody>
       </p:sp>
       <p:sp>
         <p:nvSpPr>
@@ -12872,6 +14539,13 @@
             <a:prstDash val="solid"/>
           </a:ln>
         </p:spPr>
+        <p:txBody>
+          <a:bodyPr/>
+          <a:lstStyle/>
+          <a:p>
+            <a:endParaRPr lang="en-US"/>
+          </a:p>
+        </p:txBody>
       </p:sp>
       <p:sp>
         <p:nvSpPr>
@@ -12897,6 +14571,13 @@
             <a:prstDash val="solid"/>
           </a:ln>
         </p:spPr>
+        <p:txBody>
+          <a:bodyPr/>
+          <a:lstStyle/>
+          <a:p>
+            <a:endParaRPr lang="en-US"/>
+          </a:p>
+        </p:txBody>
       </p:sp>
       <p:sp>
         <p:nvSpPr>
@@ -12922,6 +14603,13 @@
             <a:prstDash val="solid"/>
           </a:ln>
         </p:spPr>
+        <p:txBody>
+          <a:bodyPr/>
+          <a:lstStyle/>
+          <a:p>
+            <a:endParaRPr lang="en-US"/>
+          </a:p>
+        </p:txBody>
       </p:sp>
       <p:sp>
         <p:nvSpPr>
@@ -12947,6 +14635,13 @@
             <a:prstDash val="solid"/>
           </a:ln>
         </p:spPr>
+        <p:txBody>
+          <a:bodyPr/>
+          <a:lstStyle/>
+          <a:p>
+            <a:endParaRPr lang="en-US"/>
+          </a:p>
+        </p:txBody>
       </p:sp>
       <p:sp>
         <p:nvSpPr>
@@ -12972,6 +14667,13 @@
             <a:prstDash val="solid"/>
           </a:ln>
         </p:spPr>
+        <p:txBody>
+          <a:bodyPr/>
+          <a:lstStyle/>
+          <a:p>
+            <a:endParaRPr lang="en-US"/>
+          </a:p>
+        </p:txBody>
       </p:sp>
       <p:sp>
         <p:nvSpPr>
@@ -12997,6 +14699,13 @@
             <a:prstDash val="solid"/>
           </a:ln>
         </p:spPr>
+        <p:txBody>
+          <a:bodyPr/>
+          <a:lstStyle/>
+          <a:p>
+            <a:endParaRPr lang="en-US"/>
+          </a:p>
+        </p:txBody>
       </p:sp>
       <p:sp>
         <p:nvSpPr>
@@ -13022,6 +14731,13 @@
             <a:prstDash val="solid"/>
           </a:ln>
         </p:spPr>
+        <p:txBody>
+          <a:bodyPr/>
+          <a:lstStyle/>
+          <a:p>
+            <a:endParaRPr lang="en-US"/>
+          </a:p>
+        </p:txBody>
       </p:sp>
       <p:sp>
         <p:nvSpPr>
@@ -13047,6 +14763,13 @@
             <a:prstDash val="solid"/>
           </a:ln>
         </p:spPr>
+        <p:txBody>
+          <a:bodyPr/>
+          <a:lstStyle/>
+          <a:p>
+            <a:endParaRPr lang="en-US"/>
+          </a:p>
+        </p:txBody>
       </p:sp>
       <p:sp>
         <p:nvSpPr>
@@ -13072,6 +14795,13 @@
             <a:prstDash val="solid"/>
           </a:ln>
         </p:spPr>
+        <p:txBody>
+          <a:bodyPr/>
+          <a:lstStyle/>
+          <a:p>
+            <a:endParaRPr lang="en-US"/>
+          </a:p>
+        </p:txBody>
       </p:sp>
       <p:sp>
         <p:nvSpPr>
@@ -13094,7 +14824,7 @@
           <a:bodyPr wrap="square" lIns="0" tIns="0" rIns="0" bIns="0" rtlCol="0" anchor="ctr"/>
           <a:lstStyle/>
           <a:p>
-            <a:pPr algn="l" indent="0" marL="0">
+            <a:pPr marL="0" indent="0" algn="l">
               <a:buNone/>
             </a:pPr>
             <a:r>
@@ -13136,6 +14866,13 @@
             <a:prstDash val="solid"/>
           </a:ln>
         </p:spPr>
+        <p:txBody>
+          <a:bodyPr/>
+          <a:lstStyle/>
+          <a:p>
+            <a:endParaRPr lang="en-US"/>
+          </a:p>
+        </p:txBody>
       </p:sp>
       <p:sp>
         <p:nvSpPr>
@@ -13161,6 +14898,13 @@
             <a:prstDash val="solid"/>
           </a:ln>
         </p:spPr>
+        <p:txBody>
+          <a:bodyPr/>
+          <a:lstStyle/>
+          <a:p>
+            <a:endParaRPr lang="en-US"/>
+          </a:p>
+        </p:txBody>
       </p:sp>
       <p:sp>
         <p:nvSpPr>
@@ -13186,6 +14930,13 @@
             <a:prstDash val="solid"/>
           </a:ln>
         </p:spPr>
+        <p:txBody>
+          <a:bodyPr/>
+          <a:lstStyle/>
+          <a:p>
+            <a:endParaRPr lang="en-US"/>
+          </a:p>
+        </p:txBody>
       </p:sp>
       <p:sp>
         <p:nvSpPr>
@@ -13211,6 +14962,13 @@
             <a:prstDash val="solid"/>
           </a:ln>
         </p:spPr>
+        <p:txBody>
+          <a:bodyPr/>
+          <a:lstStyle/>
+          <a:p>
+            <a:endParaRPr lang="en-US"/>
+          </a:p>
+        </p:txBody>
       </p:sp>
       <p:sp>
         <p:nvSpPr>
@@ -13233,7 +14991,7 @@
           <a:bodyPr wrap="square" rtlCol="0" anchor="ctr"/>
           <a:lstStyle/>
           <a:p>
-            <a:pPr algn="ctr" indent="0" marL="0">
+            <a:pPr marL="0" indent="0" algn="ctr">
               <a:buNone/>
             </a:pPr>
             <a:r>
@@ -13272,7 +15030,7 @@
           <a:bodyPr wrap="square" lIns="0" tIns="0" rIns="0" bIns="0" rtlCol="0" anchor="ctr"/>
           <a:lstStyle/>
           <a:p>
-            <a:pPr algn="l" indent="0" marL="0">
+            <a:pPr marL="0" indent="0" algn="l">
               <a:buNone/>
             </a:pPr>
             <a:r>
@@ -13311,7 +15069,7 @@
           <a:bodyPr wrap="square" lIns="0" tIns="0" rIns="0" bIns="0" rtlCol="0" anchor="ctr"/>
           <a:lstStyle/>
           <a:p>
-            <a:pPr algn="l" indent="0" marL="0">
+            <a:pPr marL="0" indent="0" algn="l">
               <a:buNone/>
             </a:pPr>
             <a:r>
@@ -13353,6 +15111,13 @@
             <a:prstDash val="solid"/>
           </a:ln>
         </p:spPr>
+        <p:txBody>
+          <a:bodyPr/>
+          <a:lstStyle/>
+          <a:p>
+            <a:endParaRPr lang="en-US"/>
+          </a:p>
+        </p:txBody>
       </p:sp>
       <p:sp>
         <p:nvSpPr>
@@ -13378,6 +15143,13 @@
             <a:prstDash val="solid"/>
           </a:ln>
         </p:spPr>
+        <p:txBody>
+          <a:bodyPr/>
+          <a:lstStyle/>
+          <a:p>
+            <a:endParaRPr lang="en-US"/>
+          </a:p>
+        </p:txBody>
       </p:sp>
       <p:sp>
         <p:nvSpPr>
@@ -13403,6 +15175,13 @@
             <a:prstDash val="solid"/>
           </a:ln>
         </p:spPr>
+        <p:txBody>
+          <a:bodyPr/>
+          <a:lstStyle/>
+          <a:p>
+            <a:endParaRPr lang="en-US"/>
+          </a:p>
+        </p:txBody>
       </p:sp>
       <p:sp>
         <p:nvSpPr>
@@ -13425,7 +15204,7 @@
           <a:bodyPr wrap="square" rtlCol="0" anchor="ctr"/>
           <a:lstStyle/>
           <a:p>
-            <a:pPr algn="ctr" indent="0" marL="0">
+            <a:pPr marL="0" indent="0" algn="ctr">
               <a:buNone/>
             </a:pPr>
             <a:r>
@@ -13464,7 +15243,7 @@
           <a:bodyPr wrap="square" lIns="0" tIns="0" rIns="0" bIns="0" rtlCol="0" anchor="ctr"/>
           <a:lstStyle/>
           <a:p>
-            <a:pPr algn="l" indent="0" marL="0">
+            <a:pPr marL="0" indent="0" algn="l">
               <a:buNone/>
             </a:pPr>
             <a:r>
@@ -13503,7 +15282,7 @@
           <a:bodyPr wrap="square" lIns="0" tIns="0" rIns="0" bIns="0" rtlCol="0" anchor="ctr"/>
           <a:lstStyle/>
           <a:p>
-            <a:pPr algn="l" indent="0" marL="0">
+            <a:pPr marL="0" indent="0" algn="l">
               <a:buNone/>
             </a:pPr>
             <a:r>
@@ -13545,6 +15324,13 @@
             <a:prstDash val="solid"/>
           </a:ln>
         </p:spPr>
+        <p:txBody>
+          <a:bodyPr/>
+          <a:lstStyle/>
+          <a:p>
+            <a:endParaRPr lang="en-US"/>
+          </a:p>
+        </p:txBody>
       </p:sp>
       <p:sp>
         <p:nvSpPr>
@@ -13570,6 +15356,13 @@
             <a:prstDash val="solid"/>
           </a:ln>
         </p:spPr>
+        <p:txBody>
+          <a:bodyPr/>
+          <a:lstStyle/>
+          <a:p>
+            <a:endParaRPr lang="en-US"/>
+          </a:p>
+        </p:txBody>
       </p:sp>
       <p:sp>
         <p:nvSpPr>
@@ -13595,6 +15388,13 @@
             <a:prstDash val="solid"/>
           </a:ln>
         </p:spPr>
+        <p:txBody>
+          <a:bodyPr/>
+          <a:lstStyle/>
+          <a:p>
+            <a:endParaRPr lang="en-US"/>
+          </a:p>
+        </p:txBody>
       </p:sp>
       <p:sp>
         <p:nvSpPr>
@@ -13617,7 +15417,7 @@
           <a:bodyPr wrap="square" rtlCol="0" anchor="ctr"/>
           <a:lstStyle/>
           <a:p>
-            <a:pPr algn="ctr" indent="0" marL="0">
+            <a:pPr marL="0" indent="0" algn="ctr">
               <a:buNone/>
             </a:pPr>
             <a:r>
@@ -13656,7 +15456,7 @@
           <a:bodyPr wrap="square" lIns="0" tIns="0" rIns="0" bIns="0" rtlCol="0" anchor="ctr"/>
           <a:lstStyle/>
           <a:p>
-            <a:pPr algn="l" indent="0" marL="0">
+            <a:pPr marL="0" indent="0" algn="l">
               <a:buNone/>
             </a:pPr>
             <a:r>
@@ -13695,7 +15495,7 @@
           <a:bodyPr wrap="square" lIns="0" tIns="0" rIns="0" bIns="0" rtlCol="0" anchor="ctr"/>
           <a:lstStyle/>
           <a:p>
-            <a:pPr algn="l" indent="0" marL="0">
+            <a:pPr marL="0" indent="0" algn="l">
               <a:buNone/>
             </a:pPr>
             <a:r>
@@ -13737,6 +15537,13 @@
             <a:prstDash val="solid"/>
           </a:ln>
         </p:spPr>
+        <p:txBody>
+          <a:bodyPr/>
+          <a:lstStyle/>
+          <a:p>
+            <a:endParaRPr lang="en-US"/>
+          </a:p>
+        </p:txBody>
       </p:sp>
       <p:sp>
         <p:nvSpPr>
@@ -13762,6 +15569,13 @@
             <a:prstDash val="solid"/>
           </a:ln>
         </p:spPr>
+        <p:txBody>
+          <a:bodyPr/>
+          <a:lstStyle/>
+          <a:p>
+            <a:endParaRPr lang="en-US"/>
+          </a:p>
+        </p:txBody>
       </p:sp>
       <p:sp>
         <p:nvSpPr>
@@ -13787,6 +15601,13 @@
             <a:prstDash val="solid"/>
           </a:ln>
         </p:spPr>
+        <p:txBody>
+          <a:bodyPr/>
+          <a:lstStyle/>
+          <a:p>
+            <a:endParaRPr lang="en-US"/>
+          </a:p>
+        </p:txBody>
       </p:sp>
       <p:sp>
         <p:nvSpPr>
@@ -13809,7 +15630,7 @@
           <a:bodyPr wrap="square" rtlCol="0" anchor="ctr"/>
           <a:lstStyle/>
           <a:p>
-            <a:pPr algn="ctr" indent="0" marL="0">
+            <a:pPr marL="0" indent="0" algn="ctr">
               <a:buNone/>
             </a:pPr>
             <a:r>
@@ -13848,7 +15669,7 @@
           <a:bodyPr wrap="square" lIns="0" tIns="0" rIns="0" bIns="0" rtlCol="0" anchor="ctr"/>
           <a:lstStyle/>
           <a:p>
-            <a:pPr algn="l" indent="0" marL="0">
+            <a:pPr marL="0" indent="0" algn="l">
               <a:buNone/>
             </a:pPr>
             <a:r>
@@ -13887,7 +15708,7 @@
           <a:bodyPr wrap="square" lIns="0" tIns="0" rIns="0" bIns="0" rtlCol="0" anchor="ctr"/>
           <a:lstStyle/>
           <a:p>
-            <a:pPr algn="l" indent="0" marL="0">
+            <a:pPr marL="0" indent="0" algn="l">
               <a:buNone/>
             </a:pPr>
             <a:r>
@@ -13926,7 +15747,7 @@
           <a:bodyPr wrap="square" rtlCol="0" anchor="ctr"/>
           <a:lstStyle/>
           <a:p>
-            <a:pPr algn="ctr" indent="0" marL="0">
+            <a:pPr marL="0" indent="0" algn="ctr">
               <a:buNone/>
             </a:pPr>
             <a:r>
@@ -13945,6 +15766,11 @@
         </p:txBody>
       </p:sp>
     </p:spTree>
+    <p:extLst>
+      <p:ext uri="{BB962C8B-B14F-4D97-AF65-F5344CB8AC3E}">
+        <p14:creationId xmlns:p14="http://schemas.microsoft.com/office/powerpoint/2010/main" val="3999003195"/>
+      </p:ext>
+    </p:extLst>
   </p:cSld>
   <p:clrMapOvr>
     <a:masterClrMapping/>
@@ -14245,4 +16071,341 @@
     </a:ext>
   </a:extLst>
 </a:theme>
+</file>
+
+<file path=ppt/theme/theme2.xml><?xml version="1.0" encoding="utf-8"?>
+<a:theme xmlns:a="http://schemas.openxmlformats.org/drawingml/2006/main" name="Office Theme">
+  <a:themeElements>
+    <a:clrScheme name="Office">
+      <a:dk1>
+        <a:sysClr val="windowText" lastClr="000000"/>
+      </a:dk1>
+      <a:lt1>
+        <a:sysClr val="window" lastClr="FFFFFF"/>
+      </a:lt1>
+      <a:dk2>
+        <a:srgbClr val="0E2841"/>
+      </a:dk2>
+      <a:lt2>
+        <a:srgbClr val="E8E8E8"/>
+      </a:lt2>
+      <a:accent1>
+        <a:srgbClr val="156082"/>
+      </a:accent1>
+      <a:accent2>
+        <a:srgbClr val="E97132"/>
+      </a:accent2>
+      <a:accent3>
+        <a:srgbClr val="196B24"/>
+      </a:accent3>
+      <a:accent4>
+        <a:srgbClr val="0F9ED5"/>
+      </a:accent4>
+      <a:accent5>
+        <a:srgbClr val="A02B93"/>
+      </a:accent5>
+      <a:accent6>
+        <a:srgbClr val="4EA72E"/>
+      </a:accent6>
+      <a:hlink>
+        <a:srgbClr val="467886"/>
+      </a:hlink>
+      <a:folHlink>
+        <a:srgbClr val="96607D"/>
+      </a:folHlink>
+    </a:clrScheme>
+    <a:fontScheme name="Office">
+      <a:majorFont>
+        <a:latin typeface="Aptos Display" panose="02110004020202020204"/>
+        <a:ea typeface=""/>
+        <a:cs typeface=""/>
+        <a:font script="Jpan" typeface="游ゴシック Light"/>
+        <a:font script="Hang" typeface="맑은 고딕"/>
+        <a:font script="Hans" typeface="等线 Light"/>
+        <a:font script="Hant" typeface="新細明體"/>
+        <a:font script="Arab" typeface="Times New Roman"/>
+        <a:font script="Hebr" typeface="Times New Roman"/>
+        <a:font script="Thai" typeface="Angsana New"/>
+        <a:font script="Ethi" typeface="Nyala"/>
+        <a:font script="Beng" typeface="Vrinda"/>
+        <a:font script="Gujr" typeface="Shruti"/>
+        <a:font script="Khmr" typeface="MoolBoran"/>
+        <a:font script="Knda" typeface="Tunga"/>
+        <a:font script="Guru" typeface="Raavi"/>
+        <a:font script="Cans" typeface="Euphemia"/>
+        <a:font script="Cher" typeface="Plantagenet Cherokee"/>
+        <a:font script="Yiii" typeface="Microsoft Yi Baiti"/>
+        <a:font script="Tibt" typeface="Microsoft Himalaya"/>
+        <a:font script="Thaa" typeface="MV Boli"/>
+        <a:font script="Deva" typeface="Mangal"/>
+        <a:font script="Telu" typeface="Gautami"/>
+        <a:font script="Taml" typeface="Latha"/>
+        <a:font script="Syrc" typeface="Estrangelo Edessa"/>
+        <a:font script="Orya" typeface="Kalinga"/>
+        <a:font script="Mlym" typeface="Kartika"/>
+        <a:font script="Laoo" typeface="DokChampa"/>
+        <a:font script="Sinh" typeface="Iskoola Pota"/>
+        <a:font script="Mong" typeface="Mongolian Baiti"/>
+        <a:font script="Viet" typeface="Times New Roman"/>
+        <a:font script="Uigh" typeface="Microsoft Uighur"/>
+        <a:font script="Geor" typeface="Sylfaen"/>
+        <a:font script="Armn" typeface="Arial"/>
+        <a:font script="Bugi" typeface="Leelawadee UI"/>
+        <a:font script="Bopo" typeface="Microsoft JhengHei"/>
+        <a:font script="Java" typeface="Javanese Text"/>
+        <a:font script="Lisu" typeface="Segoe UI"/>
+        <a:font script="Mymr" typeface="Myanmar Text"/>
+        <a:font script="Nkoo" typeface="Ebrima"/>
+        <a:font script="Olck" typeface="Nirmala UI"/>
+        <a:font script="Osma" typeface="Ebrima"/>
+        <a:font script="Phag" typeface="Phagspa"/>
+        <a:font script="Syrn" typeface="Estrangelo Edessa"/>
+        <a:font script="Syrj" typeface="Estrangelo Edessa"/>
+        <a:font script="Syre" typeface="Estrangelo Edessa"/>
+        <a:font script="Sora" typeface="Nirmala UI"/>
+        <a:font script="Tale" typeface="Microsoft Tai Le"/>
+        <a:font script="Talu" typeface="Microsoft New Tai Lue"/>
+        <a:font script="Tfng" typeface="Ebrima"/>
+      </a:majorFont>
+      <a:minorFont>
+        <a:latin typeface="Aptos" panose="02110004020202020204"/>
+        <a:ea typeface=""/>
+        <a:cs typeface=""/>
+        <a:font script="Jpan" typeface="游ゴシック"/>
+        <a:font script="Hang" typeface="맑은 고딕"/>
+        <a:font script="Hans" typeface="等线"/>
+        <a:font script="Hant" typeface="新細明體"/>
+        <a:font script="Arab" typeface="Arial"/>
+        <a:font script="Hebr" typeface="Arial"/>
+        <a:font script="Thai" typeface="Cordia New"/>
+        <a:font script="Ethi" typeface="Nyala"/>
+        <a:font script="Beng" typeface="Vrinda"/>
+        <a:font script="Gujr" typeface="Shruti"/>
+        <a:font script="Khmr" typeface="DaunPenh"/>
+        <a:font script="Knda" typeface="Tunga"/>
+        <a:font script="Guru" typeface="Raavi"/>
+        <a:font script="Cans" typeface="Euphemia"/>
+        <a:font script="Cher" typeface="Plantagenet Cherokee"/>
+        <a:font script="Yiii" typeface="Microsoft Yi Baiti"/>
+        <a:font script="Tibt" typeface="Microsoft Himalaya"/>
+        <a:font script="Thaa" typeface="MV Boli"/>
+        <a:font script="Deva" typeface="Mangal"/>
+        <a:font script="Telu" typeface="Gautami"/>
+        <a:font script="Taml" typeface="Latha"/>
+        <a:font script="Syrc" typeface="Estrangelo Edessa"/>
+        <a:font script="Orya" typeface="Kalinga"/>
+        <a:font script="Mlym" typeface="Kartika"/>
+        <a:font script="Laoo" typeface="DokChampa"/>
+        <a:font script="Sinh" typeface="Iskoola Pota"/>
+        <a:font script="Mong" typeface="Mongolian Baiti"/>
+        <a:font script="Viet" typeface="Arial"/>
+        <a:font script="Uigh" typeface="Microsoft Uighur"/>
+        <a:font script="Geor" typeface="Sylfaen"/>
+        <a:font script="Armn" typeface="Arial"/>
+        <a:font script="Bugi" typeface="Leelawadee UI"/>
+        <a:font script="Bopo" typeface="Microsoft JhengHei"/>
+        <a:font script="Java" typeface="Javanese Text"/>
+        <a:font script="Lisu" typeface="Segoe UI"/>
+        <a:font script="Mymr" typeface="Myanmar Text"/>
+        <a:font script="Nkoo" typeface="Ebrima"/>
+        <a:font script="Olck" typeface="Nirmala UI"/>
+        <a:font script="Osma" typeface="Ebrima"/>
+        <a:font script="Phag" typeface="Phagspa"/>
+        <a:font script="Syrn" typeface="Estrangelo Edessa"/>
+        <a:font script="Syrj" typeface="Estrangelo Edessa"/>
+        <a:font script="Syre" typeface="Estrangelo Edessa"/>
+        <a:font script="Sora" typeface="Nirmala UI"/>
+        <a:font script="Tale" typeface="Microsoft Tai Le"/>
+        <a:font script="Talu" typeface="Microsoft New Tai Lue"/>
+        <a:font script="Tfng" typeface="Ebrima"/>
+      </a:minorFont>
+    </a:fontScheme>
+    <a:fmtScheme name="Office">
+      <a:fillStyleLst>
+        <a:solidFill>
+          <a:schemeClr val="phClr"/>
+        </a:solidFill>
+        <a:gradFill rotWithShape="1">
+          <a:gsLst>
+            <a:gs pos="0">
+              <a:schemeClr val="phClr">
+                <a:lumMod val="110000"/>
+                <a:satMod val="105000"/>
+                <a:tint val="67000"/>
+              </a:schemeClr>
+            </a:gs>
+            <a:gs pos="50000">
+              <a:schemeClr val="phClr">
+                <a:lumMod val="105000"/>
+                <a:satMod val="103000"/>
+                <a:tint val="73000"/>
+              </a:schemeClr>
+            </a:gs>
+            <a:gs pos="100000">
+              <a:schemeClr val="phClr">
+                <a:lumMod val="105000"/>
+                <a:satMod val="109000"/>
+                <a:tint val="81000"/>
+              </a:schemeClr>
+            </a:gs>
+          </a:gsLst>
+          <a:lin ang="5400000" scaled="0"/>
+        </a:gradFill>
+        <a:gradFill rotWithShape="1">
+          <a:gsLst>
+            <a:gs pos="0">
+              <a:schemeClr val="phClr">
+                <a:satMod val="103000"/>
+                <a:lumMod val="102000"/>
+                <a:tint val="94000"/>
+              </a:schemeClr>
+            </a:gs>
+            <a:gs pos="50000">
+              <a:schemeClr val="phClr">
+                <a:satMod val="110000"/>
+                <a:lumMod val="100000"/>
+                <a:shade val="100000"/>
+              </a:schemeClr>
+            </a:gs>
+            <a:gs pos="100000">
+              <a:schemeClr val="phClr">
+                <a:lumMod val="99000"/>
+                <a:satMod val="120000"/>
+                <a:shade val="78000"/>
+              </a:schemeClr>
+            </a:gs>
+          </a:gsLst>
+          <a:lin ang="5400000" scaled="0"/>
+        </a:gradFill>
+      </a:fillStyleLst>
+      <a:lnStyleLst>
+        <a:ln w="12700" cap="flat" cmpd="sng" algn="ctr">
+          <a:solidFill>
+            <a:schemeClr val="phClr"/>
+          </a:solidFill>
+          <a:prstDash val="solid"/>
+          <a:miter lim="800000"/>
+        </a:ln>
+        <a:ln w="19050" cap="flat" cmpd="sng" algn="ctr">
+          <a:solidFill>
+            <a:schemeClr val="phClr"/>
+          </a:solidFill>
+          <a:prstDash val="solid"/>
+          <a:miter lim="800000"/>
+        </a:ln>
+        <a:ln w="25400" cap="flat" cmpd="sng" algn="ctr">
+          <a:solidFill>
+            <a:schemeClr val="phClr"/>
+          </a:solidFill>
+          <a:prstDash val="solid"/>
+          <a:miter lim="800000"/>
+        </a:ln>
+      </a:lnStyleLst>
+      <a:effectStyleLst>
+        <a:effectStyle>
+          <a:effectLst/>
+        </a:effectStyle>
+        <a:effectStyle>
+          <a:effectLst/>
+        </a:effectStyle>
+        <a:effectStyle>
+          <a:effectLst>
+            <a:outerShdw blurRad="57150" dist="19050" dir="5400000" algn="ctr" rotWithShape="0">
+              <a:srgbClr val="000000">
+                <a:alpha val="63000"/>
+              </a:srgbClr>
+            </a:outerShdw>
+          </a:effectLst>
+        </a:effectStyle>
+      </a:effectStyleLst>
+      <a:bgFillStyleLst>
+        <a:solidFill>
+          <a:schemeClr val="phClr"/>
+        </a:solidFill>
+        <a:solidFill>
+          <a:schemeClr val="phClr">
+            <a:tint val="95000"/>
+            <a:satMod val="170000"/>
+          </a:schemeClr>
+        </a:solidFill>
+        <a:gradFill rotWithShape="1">
+          <a:gsLst>
+            <a:gs pos="0">
+              <a:schemeClr val="phClr">
+                <a:tint val="93000"/>
+                <a:satMod val="150000"/>
+                <a:shade val="98000"/>
+                <a:lumMod val="102000"/>
+              </a:schemeClr>
+            </a:gs>
+            <a:gs pos="50000">
+              <a:schemeClr val="phClr">
+                <a:tint val="98000"/>
+                <a:satMod val="130000"/>
+                <a:shade val="90000"/>
+                <a:lumMod val="103000"/>
+              </a:schemeClr>
+            </a:gs>
+            <a:gs pos="100000">
+              <a:schemeClr val="phClr">
+                <a:shade val="63000"/>
+                <a:satMod val="120000"/>
+              </a:schemeClr>
+            </a:gs>
+          </a:gsLst>
+          <a:lin ang="5400000" scaled="0"/>
+        </a:gradFill>
+      </a:bgFillStyleLst>
+    </a:fmtScheme>
+  </a:themeElements>
+  <a:objectDefaults>
+    <a:lnDef>
+      <a:spPr/>
+      <a:bodyPr/>
+      <a:lstStyle/>
+      <a:style>
+        <a:lnRef idx="2">
+          <a:schemeClr val="accent1"/>
+        </a:lnRef>
+        <a:fillRef idx="0">
+          <a:schemeClr val="accent1"/>
+        </a:fillRef>
+        <a:effectRef idx="1">
+          <a:schemeClr val="accent1"/>
+        </a:effectRef>
+        <a:fontRef idx="minor">
+          <a:schemeClr val="tx1"/>
+        </a:fontRef>
+      </a:style>
+    </a:lnDef>
+  </a:objectDefaults>
+  <a:extraClrSchemeLst/>
+  <a:extLst>
+    <a:ext uri="{05A4C25C-085E-4340-85A3-A5531E510DB2}">
+      <thm15:themeFamily xmlns:thm15="http://schemas.microsoft.com/office/thememl/2012/main" name="Office Theme" id="{2E142A2C-CD16-42D6-873A-C26D2A0506FA}" vid="{1BDDFF52-6CD6-40A5-AB3C-68EB2F1E4D0A}"/>
+    </a:ext>
+  </a:extLst>
+</a:theme>
+</file>
+
+<file path=ppt/webextensions/taskpanes.xml><?xml version="1.0" encoding="utf-8"?>
+<wetp:taskpanes xmlns:wetp="http://schemas.microsoft.com/office/webextensions/taskpanes/2010/11">
+  <wetp:taskpane dockstate="right" visibility="0" width="350" row="0">
+    <wetp:webextensionref xmlns:r="http://schemas.openxmlformats.org/officeDocument/2006/relationships" r:id="rId1"/>
+  </wetp:taskpane>
+</wetp:taskpanes>
+</file>
+
+<file path=ppt/webextensions/webextension1.xml><?xml version="1.0" encoding="utf-8"?>
+<we:webextension xmlns:we="http://schemas.microsoft.com/office/webextensions/webextension/2010/11" id="{7E72270C-F3FA-4923-A715-07534E024B6E}">
+  <we:reference id="wa200010001" version="1.0.0.1" store="en-US" storeType="OMEX"/>
+  <we:alternateReferences>
+    <we:reference id="wa200010001" version="1.0.0.1" store="wa200010001" storeType="OMEX"/>
+  </we:alternateReferences>
+  <we:properties>
+    <we:property name="claude.fileId" value="&quot;c777e94b-88d0-433c-92d8-35c608fae879&quot;"/>
+  </we:properties>
+  <we:bindings/>
+  <we:snapshot xmlns:r="http://schemas.openxmlformats.org/officeDocument/2006/relationships"/>
+</we:webextension>
 </file>